--- a/presentacion/storymaker-propuesta.pptx
+++ b/presentacion/storymaker-propuesta.pptx
@@ -5,7 +5,7 @@
     <p:sldMasterId id="2147483648" r:id="rId1"/>
   </p:sldMasterIdLst>
   <p:notesMasterIdLst>
-    <p:notesMasterId r:id="rId24"/>
+    <p:notesMasterId r:id="rId25"/>
   </p:notesMasterIdLst>
   <p:sldIdLst>
     <p:sldId id="256" r:id="rId2"/>
@@ -30,40 +30,41 @@
     <p:sldId id="275" r:id="rId21"/>
     <p:sldId id="276" r:id="rId22"/>
     <p:sldId id="277" r:id="rId23"/>
+    <p:sldId id="278" r:id="rId24"/>
   </p:sldIdLst>
   <p:sldSz cx="12192000" cy="6858000"/>
   <p:notesSz cx="6858000" cy="9144000"/>
   <p:embeddedFontLst>
     <p:embeddedFont>
       <p:font typeface="Fraunces Medium" pitchFamily="2" charset="0"/>
-      <p:italic r:id="rId25"/>
+      <p:italic r:id="rId26"/>
     </p:embeddedFont>
     <p:embeddedFont>
       <p:font typeface="Fraunces SemiBold" pitchFamily="2" charset="0"/>
-      <p:bold r:id="rId26"/>
-      <p:boldItalic r:id="rId27"/>
+      <p:bold r:id="rId27"/>
+      <p:boldItalic r:id="rId28"/>
     </p:embeddedFont>
     <p:embeddedFont>
       <p:font typeface="Inter" panose="02000503000000020004" pitchFamily="2" charset="0"/>
-      <p:regular r:id="rId28"/>
-      <p:bold r:id="rId29"/>
+      <p:regular r:id="rId29"/>
+      <p:bold r:id="rId30"/>
     </p:embeddedFont>
     <p:embeddedFont>
       <p:font typeface="Inter Medium" panose="02000503000000020004" pitchFamily="2" charset="0"/>
-      <p:regular r:id="rId30"/>
+      <p:regular r:id="rId31"/>
     </p:embeddedFont>
     <p:embeddedFont>
       <p:font typeface="Inter SemiBold" panose="02000503000000020004" pitchFamily="2" charset="0"/>
-      <p:bold r:id="rId31"/>
+      <p:bold r:id="rId32"/>
     </p:embeddedFont>
     <p:embeddedFont>
       <p:font typeface="JetBrains Mono" panose="02000009000000000000" pitchFamily="49" charset="0"/>
-      <p:regular r:id="rId32"/>
-      <p:bold r:id="rId33"/>
+      <p:regular r:id="rId33"/>
+      <p:bold r:id="rId34"/>
     </p:embeddedFont>
     <p:embeddedFont>
       <p:font typeface="JetBrains Mono Medium" panose="02000009000000000000" pitchFamily="49" charset="0"/>
-      <p:regular r:id="rId34"/>
+      <p:regular r:id="rId35"/>
     </p:embeddedFont>
   </p:embeddedFontLst>
   <p:defaultTextStyle>
@@ -205,7 +206,7 @@
     </p:spTree>
     <p:extLst>
       <p:ext uri="{BB962C8B-B14F-4D97-AF65-F5344CB8AC3E}">
-        <p14:creationId xmlns:p14="http://schemas.microsoft.com/office/powerpoint/2010/main" val="522536381"/>
+        <p14:creationId xmlns:p14="http://schemas.microsoft.com/office/powerpoint/2010/main" val="3690369271"/>
       </p:ext>
     </p:extLst>
   </p:cSld>
@@ -350,7 +351,7 @@
           <a:lstStyle/>
           <a:p>
             <a:r>
-              <a:t>Buenos días. Soy [TU NOMBRE], de Qapítulo, una iniciativa de Qaracter. Venimos a proponer a Relicario una línea de producto nueva: la Novela Relicario, novelas históricas personalizadas para regalar, verificadas antes de llegar a quien las recibe.</a:t>
+              <a:t>Buenos días. Soy [TU NOMBRE], de Qapítulo, una iniciativa de Qaracter. Venimos a proponer a Relicario una línea de producto nueva: la Novela Relicario, novelas históricas personalizadas para regalar, verificadas antes de llegar a quien las recibe. Lo que os enseñamos es la prueba de concepto, la versión 1, funcionando de verdad; al final veréis cómo sería la versión 2.</a:t>
             </a:r>
           </a:p>
         </p:txBody>
@@ -1276,7 +1277,15 @@
           <a:lstStyle/>
           <a:p>
             <a:r>
-              <a:t>Los riesgos, con franqueza. Hoy el modelo corre sobre una sesión de Claude Code, y producción necesita una API propia. El juez es el mismo modelo que escribe, y lo calibramos con revisión humana. Y las fechas de los personajes históricos que no están en el corpus las pone el arquitecto. Lo siguiente, por orden: un piloto de cincuenta novelas con Relicario, sacar esas fechas del corpus, y después un revisor de canon y escaleta con el arquitecto y el juez en un modelo mayor. Nos lo podemos permitir: los tokens son el veinte por ciento del coste.</a:t>
+              <a:t>Esto es la versión 1, una prueba de concepto. Hoy un humano aprueba cinco gates, y eso es lo que más cuesta: veinte minutos por novela. En la versión 2, esos gates los sustituyen críticos internos que revisan con más dureza la investigación histórica, el canon y la escaleta, y cada capítulo, con modelos mejores donde hace falta. Hay dos escenarios. Con Sonnet 5 en los roles clave, los tokens suben a 7,7 euros, pero la supervisión baja a cinco minutos por muestreo, y la novela cuesta prácticamente lo mismo, 14 euros, con un 71 % de margen. Con Opus 5 en el arquitecto, los críticos y el juez, cuesta 19,5 euros y el margen es del 60 %. Desarrollarlo son 210 horas, unos 14.000 euros.</a:t>
+            </a:r>
+          </a:p>
+          <a:p>
+            <a:endParaRPr/>
+          </a:p>
+          <a:p>
+            <a:r>
+              <a:t>Si preguntan por qué no se hizo ya así. Porque primero había que medir: sin los gates humanos no habríamos visto RT-07, RT-08 ni RT-09, y un crítico solo sustituye a un gate cuando las evals demuestran que caza lo mismo.</a:t>
             </a:r>
           </a:p>
         </p:txBody>
@@ -1302,6 +1311,76 @@
 </file>
 
 <file path=ppt/notesSlides/notesSlide22.xml><?xml version="1.0" encoding="utf-8"?>
+<p:notes xmlns:a="http://schemas.openxmlformats.org/drawingml/2006/main" xmlns:r="http://schemas.openxmlformats.org/officeDocument/2006/relationships" xmlns:p="http://schemas.openxmlformats.org/presentationml/2006/main">
+  <p:cSld>
+    <p:spTree>
+      <p:nvGrpSpPr>
+        <p:cNvPr id="1" name=""/>
+        <p:cNvGrpSpPr/>
+        <p:nvPr/>
+      </p:nvGrpSpPr>
+      <p:grpSpPr>
+        <a:xfrm>
+          <a:off x="0" y="0"/>
+          <a:ext cx="0" cy="0"/>
+          <a:chOff x="0" y="0"/>
+          <a:chExt cx="0" cy="0"/>
+        </a:xfrm>
+      </p:grpSpPr>
+      <p:sp>
+        <p:nvSpPr>
+          <p:cNvPr id="2" name="Slide Image Placeholder 1"/>
+          <p:cNvSpPr>
+            <a:spLocks noGrp="1" noRot="1" noChangeAspect="1"/>
+          </p:cNvSpPr>
+          <p:nvPr>
+            <p:ph type="sldImg" idx="2"/>
+          </p:nvPr>
+        </p:nvSpPr>
+        <p:spPr/>
+      </p:sp>
+      <p:sp>
+        <p:nvSpPr>
+          <p:cNvPr id="3" name="Notes Placeholder 2"/>
+          <p:cNvSpPr>
+            <a:spLocks noGrp="1"/>
+          </p:cNvSpPr>
+          <p:nvPr>
+            <p:ph type="body" sz="quarter" idx="3"/>
+          </p:nvPr>
+        </p:nvSpPr>
+        <p:spPr/>
+        <p:txBody>
+          <a:bodyPr/>
+          <a:lstStyle/>
+          <a:p>
+            <a:r>
+              <a:t>Los riesgos, con franqueza. Hoy el modelo corre sobre una sesión de Claude Code, y producción necesita una API propia. El juez es el mismo modelo que escribe, y lo calibramos con revisión humana. Y las fechas de los personajes históricos que no están en el corpus las pone el arquitecto. Lo siguiente, por orden: un piloto de cincuenta novelas con Relicario, sacar esas fechas del corpus, que es un arreglo determinista, y después la versión 2 con sus críticos.</a:t>
+            </a:r>
+          </a:p>
+        </p:txBody>
+      </p:sp>
+      <p:sp>
+        <p:nvSpPr>
+          <p:cNvPr id="4" name="Slide Number Placeholder 3"/>
+          <p:cNvSpPr>
+            <a:spLocks noGrp="1"/>
+          </p:cNvSpPr>
+          <p:nvPr>
+            <p:ph type="sldNum" sz="quarter" idx="5"/>
+          </p:nvPr>
+        </p:nvSpPr>
+        <p:spPr/>
+      </p:sp>
+    </p:spTree>
+  </p:cSld>
+  <p:clrMapOvr>
+    <a:masterClrMapping/>
+  </p:clrMapOvr>
+</p:notes>
+</file>
+
+<file path=ppt/notesSlides/notesSlide23.xml><?xml version="1.0" encoding="utf-8"?>
 <p:notes xmlns:a="http://schemas.openxmlformats.org/drawingml/2006/main" xmlns:r="http://schemas.openxmlformats.org/officeDocument/2006/relationships" xmlns:p="http://schemas.openxmlformats.org/presentationml/2006/main">
   <p:cSld>
     <p:spTree>
@@ -5028,7 +5107,7 @@
         </p:nvSpPr>
         <p:spPr>
           <a:xfrm>
-            <a:off x="1971675" y="2619375"/>
+            <a:off x="1971675" y="2447925"/>
             <a:ext cx="4091521" cy="1247775"/>
           </a:xfrm>
           <a:prstGeom prst="rect">
@@ -5075,7 +5154,7 @@
         </p:nvSpPr>
         <p:spPr>
           <a:xfrm>
-            <a:off x="1971675" y="3990975"/>
+            <a:off x="1971675" y="3819525"/>
             <a:ext cx="4091521" cy="533400"/>
           </a:xfrm>
           <a:prstGeom prst="rect">
@@ -5122,7 +5201,7 @@
         </p:nvSpPr>
         <p:spPr>
           <a:xfrm>
-            <a:off x="1971675" y="4867275"/>
+            <a:off x="1971675" y="4638675"/>
             <a:ext cx="685800" cy="9525"/>
           </a:xfrm>
           <a:prstGeom prst="rect">
@@ -5149,7 +5228,7 @@
         </p:nvCxnSpPr>
         <p:spPr>
           <a:xfrm>
-            <a:off x="1971675" y="4872038"/>
+            <a:off x="1971675" y="4643438"/>
             <a:ext cx="685800" cy="0"/>
           </a:xfrm>
           <a:prstGeom prst="line">
@@ -5170,16 +5249,16 @@
         </p:nvSpPr>
         <p:spPr>
           <a:xfrm>
-            <a:off x="1971675" y="5153025"/>
-            <a:ext cx="4091521" cy="704850"/>
-          </a:xfrm>
-          <a:prstGeom prst="rect">
-            <a:avLst/>
-          </a:prstGeom>
-          <a:noFill/>
-        </p:spPr>
-        <p:txBody>
-          <a:bodyPr wrap="square" lIns="0" tIns="0" rIns="0" bIns="0" anchor="t">
+            <a:off x="1971675" y="4867275"/>
+            <a:ext cx="3470374" cy="190500"/>
+          </a:xfrm>
+          <a:prstGeom prst="rect">
+            <a:avLst/>
+          </a:prstGeom>
+          <a:noFill/>
+        </p:spPr>
+        <p:txBody>
+          <a:bodyPr wrap="none" lIns="0" tIns="0" rIns="0" bIns="0" anchor="t">
             <a:noAutofit/>
           </a:bodyPr>
           <a:lstStyle/>
@@ -5207,6 +5286,76 @@
               <a:t>Propuesta técnico-comercial para Relicario</a:t>
             </a:r>
           </a:p>
+        </p:txBody>
+      </p:sp>
+      <p:sp>
+        <p:nvSpPr>
+          <p:cNvPr id="12" name="TextBox 11"/>
+          <p:cNvSpPr txBox="1"/>
+          <p:nvPr/>
+        </p:nvSpPr>
+        <p:spPr>
+          <a:xfrm>
+            <a:off x="1971675" y="5124450"/>
+            <a:ext cx="2956655" cy="161925"/>
+          </a:xfrm>
+          <a:prstGeom prst="rect">
+            <a:avLst/>
+          </a:prstGeom>
+          <a:noFill/>
+        </p:spPr>
+        <p:txBody>
+          <a:bodyPr wrap="none" lIns="0" tIns="0" rIns="0" bIns="0" anchor="t">
+            <a:noAutofit/>
+          </a:bodyPr>
+          <a:lstStyle/>
+          <a:p>
+            <a:pPr algn="l">
+              <a:lnSpc>
+                <a:spcPts val="1500"/>
+              </a:lnSpc>
+              <a:spcBef>
+                <a:spcPts val="0"/>
+              </a:spcBef>
+              <a:spcAft>
+                <a:spcPts val="0"/>
+              </a:spcAft>
+            </a:pPr>
+            <a:r>
+              <a:rPr sz="1050" b="0" i="0" spc="126">
+                <a:solidFill>
+                  <a:srgbClr val="C9A34E"/>
+                </a:solidFill>
+                <a:latin typeface="Inter SemiBold"/>
+                <a:ea typeface="Inter SemiBold"/>
+                <a:cs typeface="Inter SemiBold"/>
+              </a:rPr>
+              <a:t>PRUEBA DE CONCEPTO · VERSIÓN 1</a:t>
+            </a:r>
+          </a:p>
+        </p:txBody>
+      </p:sp>
+      <p:sp>
+        <p:nvSpPr>
+          <p:cNvPr id="13" name="TextBox 12"/>
+          <p:cNvSpPr txBox="1"/>
+          <p:nvPr/>
+        </p:nvSpPr>
+        <p:spPr>
+          <a:xfrm>
+            <a:off x="1971675" y="5391150"/>
+            <a:ext cx="4091521" cy="447675"/>
+          </a:xfrm>
+          <a:prstGeom prst="rect">
+            <a:avLst/>
+          </a:prstGeom>
+          <a:noFill/>
+        </p:spPr>
+        <p:txBody>
+          <a:bodyPr wrap="square" lIns="0" tIns="0" rIns="0" bIns="0" anchor="t">
+            <a:noAutofit/>
+          </a:bodyPr>
+          <a:lstStyle/>
           <a:p>
             <a:pPr algn="l">
               <a:lnSpc>
@@ -5259,7 +5408,7 @@
       </p:sp>
       <p:pic>
         <p:nvPicPr>
-          <p:cNvPr id="12" name="Picture 11" descr="r001.png"/>
+          <p:cNvPr id="14" name="Picture 13" descr="r001.png"/>
           <p:cNvPicPr>
             <a:picLocks noChangeAspect="1"/>
           </p:cNvPicPr>
@@ -5283,7 +5432,7 @@
       </p:pic>
       <p:sp>
         <p:nvSpPr>
-          <p:cNvPr id="13" name="TextBox 12"/>
+          <p:cNvPr id="15" name="TextBox 14"/>
           <p:cNvSpPr txBox="1"/>
           <p:nvPr/>
         </p:nvSpPr>
@@ -5330,7 +5479,7 @@
       </p:sp>
       <p:sp>
         <p:nvSpPr>
-          <p:cNvPr id="14" name="TextBox 13"/>
+          <p:cNvPr id="16" name="TextBox 15"/>
           <p:cNvSpPr txBox="1"/>
           <p:nvPr/>
         </p:nvSpPr>
@@ -5377,7 +5526,7 @@
       </p:sp>
       <p:sp>
         <p:nvSpPr>
-          <p:cNvPr id="15" name="TextBox 14"/>
+          <p:cNvPr id="17" name="TextBox 16"/>
           <p:cNvSpPr txBox="1"/>
           <p:nvPr/>
         </p:nvSpPr>
@@ -6902,7 +7051,7 @@
                 <a:ea typeface="JetBrains Mono Medium"/>
                 <a:cs typeface="JetBrains Mono Medium"/>
               </a:rPr>
-              <a:t>10 / 22</a:t>
+              <a:t>10 / 23</a:t>
             </a:r>
           </a:p>
         </p:txBody>
@@ -11596,7 +11745,7 @@
                 <a:ea typeface="JetBrains Mono Medium"/>
                 <a:cs typeface="JetBrains Mono Medium"/>
               </a:rPr>
-              <a:t>11 / 22</a:t>
+              <a:t>11 / 23</a:t>
             </a:r>
           </a:p>
         </p:txBody>
@@ -26436,7 +26585,7 @@
                 <a:ea typeface="JetBrains Mono Medium"/>
                 <a:cs typeface="JetBrains Mono Medium"/>
               </a:rPr>
-              <a:t>12 / 22</a:t>
+              <a:t>12 / 23</a:t>
             </a:r>
           </a:p>
         </p:txBody>
@@ -28373,7 +28522,7 @@
                 <a:ea typeface="JetBrains Mono Medium"/>
                 <a:cs typeface="JetBrains Mono Medium"/>
               </a:rPr>
-              <a:t>13 / 22</a:t>
+              <a:t>13 / 23</a:t>
             </a:r>
           </a:p>
         </p:txBody>
@@ -30339,7 +30488,7 @@
                 <a:ea typeface="JetBrains Mono Medium"/>
                 <a:cs typeface="JetBrains Mono Medium"/>
               </a:rPr>
-              <a:t>14 / 22</a:t>
+              <a:t>14 / 23</a:t>
             </a:r>
           </a:p>
         </p:txBody>
@@ -32652,7 +32801,7 @@
                 <a:ea typeface="JetBrains Mono Medium"/>
                 <a:cs typeface="JetBrains Mono Medium"/>
               </a:rPr>
-              <a:t>15 / 22</a:t>
+              <a:t>15 / 23</a:t>
             </a:r>
           </a:p>
         </p:txBody>
@@ -34831,7 +34980,7 @@
                 <a:ea typeface="JetBrains Mono Medium"/>
                 <a:cs typeface="JetBrains Mono Medium"/>
               </a:rPr>
-              <a:t>16 / 22</a:t>
+              <a:t>16 / 23</a:t>
             </a:r>
           </a:p>
         </p:txBody>
@@ -36465,7 +36614,7 @@
                 <a:ea typeface="JetBrains Mono Medium"/>
                 <a:cs typeface="JetBrains Mono Medium"/>
               </a:rPr>
-              <a:t>17 / 22</a:t>
+              <a:t>17 / 23</a:t>
             </a:r>
           </a:p>
         </p:txBody>
@@ -38385,7 +38534,7 @@
                 <a:ea typeface="JetBrains Mono Medium"/>
                 <a:cs typeface="JetBrains Mono Medium"/>
               </a:rPr>
-              <a:t>18 / 22</a:t>
+              <a:t>18 / 23</a:t>
             </a:r>
           </a:p>
         </p:txBody>
@@ -41054,7 +41203,7 @@
                 <a:ea typeface="JetBrains Mono Medium"/>
                 <a:cs typeface="JetBrains Mono Medium"/>
               </a:rPr>
-              <a:t>19 / 22</a:t>
+              <a:t>19 / 23</a:t>
             </a:r>
           </a:p>
         </p:txBody>
@@ -42531,7 +42680,7 @@
                 <a:ea typeface="JetBrains Mono Medium"/>
                 <a:cs typeface="JetBrains Mono Medium"/>
               </a:rPr>
-              <a:t>02 / 22</a:t>
+              <a:t>02 / 23</a:t>
             </a:r>
           </a:p>
         </p:txBody>
@@ -47653,7 +47802,7 @@
                 <a:ea typeface="JetBrains Mono Medium"/>
                 <a:cs typeface="JetBrains Mono Medium"/>
               </a:rPr>
-              <a:t>20 / 22</a:t>
+              <a:t>20 / 23</a:t>
             </a:r>
           </a:p>
         </p:txBody>
@@ -47700,7 +47849,7 @@
         <p:spPr>
           <a:xfrm>
             <a:off x="2140000" y="323850"/>
-            <a:ext cx="579215" cy="142875"/>
+            <a:ext cx="852404" cy="142875"/>
           </a:xfrm>
           <a:prstGeom prst="rect">
             <a:avLst/>
@@ -47733,7 +47882,7 @@
                 <a:ea typeface="Inter SemiBold"/>
                 <a:cs typeface="Inter SemiBold"/>
               </a:rPr>
-              <a:t>CIERRE</a:t>
+              <a:t>VERSIÓN 2</a:t>
             </a:r>
           </a:p>
         </p:txBody>
@@ -47842,32 +47991,32 @@
         <p:spPr>
           <a:xfrm>
             <a:off x="609600" y="561975"/>
-            <a:ext cx="9720441" cy="419100"/>
-          </a:xfrm>
-          <a:prstGeom prst="rect">
-            <a:avLst/>
-          </a:prstGeom>
-          <a:noFill/>
-        </p:spPr>
-        <p:txBody>
-          <a:bodyPr wrap="none" lIns="0" tIns="0" rIns="0" bIns="0" anchor="t">
+            <a:ext cx="11048162" cy="752475"/>
+          </a:xfrm>
+          <a:prstGeom prst="rect">
+            <a:avLst/>
+          </a:prstGeom>
+          <a:noFill/>
+        </p:spPr>
+        <p:txBody>
+          <a:bodyPr wrap="square" lIns="0" tIns="0" rIns="0" bIns="0" anchor="t">
             <a:noAutofit/>
           </a:bodyPr>
           <a:lstStyle/>
           <a:p>
             <a:pPr algn="l">
               <a:lnSpc>
-                <a:spcPts val="3150"/>
-              </a:lnSpc>
-              <a:spcBef>
-                <a:spcPts val="0"/>
-              </a:spcBef>
-              <a:spcAft>
-                <a:spcPts val="0"/>
-              </a:spcAft>
-            </a:pPr>
-            <a:r>
-              <a:rPr sz="2700" b="0" i="0" spc="-27">
+                <a:spcPts val="2925"/>
+              </a:lnSpc>
+              <a:spcBef>
+                <a:spcPts val="0"/>
+              </a:spcBef>
+              <a:spcAft>
+                <a:spcPts val="0"/>
+              </a:spcAft>
+            </a:pPr>
+            <a:r>
+              <a:rPr sz="2500" b="0" i="0" spc="-25">
                 <a:solidFill>
                   <a:srgbClr val="1C2433"/>
                 </a:solidFill>
@@ -47875,7 +48024,7 @@
                 <a:ea typeface="Fraunces SemiBold"/>
                 <a:cs typeface="Fraunces SemiBold"/>
               </a:rPr>
-              <a:t>Lo que queda por hacer antes de vender la primera novela</a:t>
+              <a:t>De la prueba de concepto a la versión 2: críticos internos en lugar de gates humanos</a:t>
             </a:r>
           </a:p>
         </p:txBody>
@@ -47888,8 +48037,8 @@
         </p:nvSpPr>
         <p:spPr>
           <a:xfrm>
-            <a:off x="609600" y="1257300"/>
-            <a:ext cx="725019" cy="152400"/>
+            <a:off x="609600" y="1428750"/>
+            <a:ext cx="1041547" cy="152400"/>
           </a:xfrm>
           <a:prstGeom prst="rect">
             <a:avLst/>
@@ -47916,20 +48065,3767 @@
             <a:r>
               <a:rPr sz="1000" b="0" i="0" spc="136">
                 <a:solidFill>
-                  <a:srgbClr val="B23A2B"/>
+                  <a:srgbClr val="7D7869"/>
                 </a:solidFill>
                 <a:latin typeface="Inter SemiBold"/>
                 <a:ea typeface="Inter SemiBold"/>
                 <a:cs typeface="Inter SemiBold"/>
               </a:rPr>
-              <a:t>RIESGOS</a:t>
+              <a:t>QUÉ CAMBIA</a:t>
+            </a:r>
+          </a:p>
+        </p:txBody>
+      </p:sp>
+      <p:sp>
+        <p:nvSpPr>
+          <p:cNvPr id="8" name="Rounded Rectangle 7"/>
+          <p:cNvSpPr/>
+          <p:nvPr/>
+        </p:nvSpPr>
+        <p:spPr>
+          <a:xfrm>
+            <a:off x="609600" y="1666875"/>
+            <a:ext cx="247650" cy="247650"/>
+          </a:xfrm>
+          <a:prstGeom prst="roundRect">
+            <a:avLst>
+              <a:gd name="adj" fmla="val 50000"/>
+            </a:avLst>
+          </a:prstGeom>
+          <a:solidFill>
+            <a:srgbClr val="C9A34E"/>
+          </a:solidFill>
+          <a:ln>
+            <a:noFill/>
+          </a:ln>
+        </p:spPr>
+        <p:txBody>
+          <a:bodyPr rtlCol="0" anchor="ctr"/>
+          <a:lstStyle/>
+          <a:p>
+            <a:endParaRPr/>
+          </a:p>
+        </p:txBody>
+      </p:sp>
+      <p:sp>
+        <p:nvSpPr>
+          <p:cNvPr id="9" name="TextBox 8"/>
+          <p:cNvSpPr txBox="1"/>
+          <p:nvPr/>
+        </p:nvSpPr>
+        <p:spPr>
+          <a:xfrm>
+            <a:off x="672739" y="1704975"/>
+            <a:ext cx="121372" cy="171450"/>
+          </a:xfrm>
+          <a:prstGeom prst="rect">
+            <a:avLst/>
+          </a:prstGeom>
+          <a:noFill/>
+        </p:spPr>
+        <p:txBody>
+          <a:bodyPr wrap="none" lIns="0" tIns="0" rIns="0" bIns="0" anchor="t">
+            <a:noAutofit/>
+          </a:bodyPr>
+          <a:lstStyle/>
+          <a:p>
+            <a:pPr algn="ctr">
+              <a:lnSpc>
+                <a:spcPts val="1200"/>
+              </a:lnSpc>
+              <a:spcBef>
+                <a:spcPts val="0"/>
+              </a:spcBef>
+              <a:spcAft>
+                <a:spcPts val="0"/>
+              </a:spcAft>
+            </a:pPr>
+            <a:r>
+              <a:rPr sz="1050" b="1" i="0">
+                <a:solidFill>
+                  <a:srgbClr val="1C2433"/>
+                </a:solidFill>
+                <a:latin typeface="JetBrains Mono"/>
+                <a:ea typeface="JetBrains Mono"/>
+                <a:cs typeface="JetBrains Mono"/>
+              </a:rPr>
+              <a:t>a</a:t>
+            </a:r>
+          </a:p>
+        </p:txBody>
+      </p:sp>
+      <p:sp>
+        <p:nvSpPr>
+          <p:cNvPr id="10" name="TextBox 9"/>
+          <p:cNvSpPr txBox="1"/>
+          <p:nvPr/>
+        </p:nvSpPr>
+        <p:spPr>
+          <a:xfrm>
+            <a:off x="971550" y="1666875"/>
+            <a:ext cx="4149014" cy="609600"/>
+          </a:xfrm>
+          <a:prstGeom prst="rect">
+            <a:avLst/>
+          </a:prstGeom>
+          <a:noFill/>
+        </p:spPr>
+        <p:txBody>
+          <a:bodyPr wrap="square" lIns="0" tIns="0" rIns="0" bIns="0" anchor="t">
+            <a:noAutofit/>
+          </a:bodyPr>
+          <a:lstStyle/>
+          <a:p>
+            <a:pPr algn="l">
+              <a:lnSpc>
+                <a:spcPts val="1650"/>
+              </a:lnSpc>
+              <a:spcBef>
+                <a:spcPts val="0"/>
+              </a:spcBef>
+              <a:spcAft>
+                <a:spcPts val="0"/>
+              </a:spcAft>
+            </a:pPr>
+            <a:r>
+              <a:rPr sz="1200" b="0" i="0">
+                <a:solidFill>
+                  <a:srgbClr val="1C2433"/>
+                </a:solidFill>
+                <a:latin typeface="Inter SemiBold"/>
+                <a:ea typeface="Inter SemiBold"/>
+                <a:cs typeface="Inter SemiBold"/>
+              </a:rPr>
+              <a:t>Investigación histórica:</a:t>
+            </a:r>
+            <a:r>
+              <a:rPr sz="1200" b="0" i="0">
+                <a:solidFill>
+                  <a:srgbClr val="1C2433"/>
+                </a:solidFill>
+                <a:latin typeface="Inter"/>
+                <a:ea typeface="Inter"/>
+                <a:cs typeface="Inter"/>
+              </a:rPr>
+              <a:t> modo exhaustivo por defecto y un crítico que coteja las fechas vitales de los personajes históricos contra el corpus (cierra RT-09)</a:t>
+            </a:r>
+          </a:p>
+        </p:txBody>
+      </p:sp>
+      <p:sp>
+        <p:nvSpPr>
+          <p:cNvPr id="11" name="Rounded Rectangle 10"/>
+          <p:cNvSpPr/>
+          <p:nvPr/>
+        </p:nvSpPr>
+        <p:spPr>
+          <a:xfrm>
+            <a:off x="609600" y="2409825"/>
+            <a:ext cx="247650" cy="247650"/>
+          </a:xfrm>
+          <a:prstGeom prst="roundRect">
+            <a:avLst>
+              <a:gd name="adj" fmla="val 50000"/>
+            </a:avLst>
+          </a:prstGeom>
+          <a:solidFill>
+            <a:srgbClr val="C9A34E"/>
+          </a:solidFill>
+          <a:ln>
+            <a:noFill/>
+          </a:ln>
+        </p:spPr>
+        <p:txBody>
+          <a:bodyPr rtlCol="0" anchor="ctr"/>
+          <a:lstStyle/>
+          <a:p>
+            <a:endParaRPr/>
+          </a:p>
+        </p:txBody>
+      </p:sp>
+      <p:sp>
+        <p:nvSpPr>
+          <p:cNvPr id="12" name="TextBox 11"/>
+          <p:cNvSpPr txBox="1"/>
+          <p:nvPr/>
+        </p:nvSpPr>
+        <p:spPr>
+          <a:xfrm>
+            <a:off x="672739" y="2447925"/>
+            <a:ext cx="121372" cy="171450"/>
+          </a:xfrm>
+          <a:prstGeom prst="rect">
+            <a:avLst/>
+          </a:prstGeom>
+          <a:noFill/>
+        </p:spPr>
+        <p:txBody>
+          <a:bodyPr wrap="none" lIns="0" tIns="0" rIns="0" bIns="0" anchor="t">
+            <a:noAutofit/>
+          </a:bodyPr>
+          <a:lstStyle/>
+          <a:p>
+            <a:pPr algn="ctr">
+              <a:lnSpc>
+                <a:spcPts val="1200"/>
+              </a:lnSpc>
+              <a:spcBef>
+                <a:spcPts val="0"/>
+              </a:spcBef>
+              <a:spcAft>
+                <a:spcPts val="0"/>
+              </a:spcAft>
+            </a:pPr>
+            <a:r>
+              <a:rPr sz="1050" b="1" i="0">
+                <a:solidFill>
+                  <a:srgbClr val="1C2433"/>
+                </a:solidFill>
+                <a:latin typeface="JetBrains Mono"/>
+                <a:ea typeface="JetBrains Mono"/>
+                <a:cs typeface="JetBrains Mono"/>
+              </a:rPr>
+              <a:t>b</a:t>
+            </a:r>
+          </a:p>
+        </p:txBody>
+      </p:sp>
+      <p:sp>
+        <p:nvSpPr>
+          <p:cNvPr id="13" name="TextBox 12"/>
+          <p:cNvSpPr txBox="1"/>
+          <p:nvPr/>
+        </p:nvSpPr>
+        <p:spPr>
+          <a:xfrm>
+            <a:off x="971550" y="2409825"/>
+            <a:ext cx="4149014" cy="400050"/>
+          </a:xfrm>
+          <a:prstGeom prst="rect">
+            <a:avLst/>
+          </a:prstGeom>
+          <a:noFill/>
+        </p:spPr>
+        <p:txBody>
+          <a:bodyPr wrap="square" lIns="0" tIns="0" rIns="0" bIns="0" anchor="t">
+            <a:noAutofit/>
+          </a:bodyPr>
+          <a:lstStyle/>
+          <a:p>
+            <a:pPr algn="l">
+              <a:lnSpc>
+                <a:spcPts val="1650"/>
+              </a:lnSpc>
+              <a:spcBef>
+                <a:spcPts val="0"/>
+              </a:spcBef>
+              <a:spcAft>
+                <a:spcPts val="0"/>
+              </a:spcAft>
+            </a:pPr>
+            <a:r>
+              <a:rPr sz="1200" b="0" i="0">
+                <a:solidFill>
+                  <a:srgbClr val="1C2433"/>
+                </a:solidFill>
+                <a:latin typeface="Inter SemiBold"/>
+                <a:ea typeface="Inter SemiBold"/>
+                <a:cs typeface="Inter SemiBold"/>
+              </a:rPr>
+              <a:t>Canon y escaleta:</a:t>
+            </a:r>
+            <a:r>
+              <a:rPr sz="1200" b="0" i="0">
+                <a:solidFill>
+                  <a:srgbClr val="1C2433"/>
+                </a:solidFill>
+                <a:latin typeface="Inter"/>
+                <a:ea typeface="Inter"/>
+                <a:cs typeface="Inter"/>
+              </a:rPr>
+              <a:t> un crítico en un modelo mayor antes de sellar, que mira coherencia de trama, arcos y fechas</a:t>
+            </a:r>
+          </a:p>
+        </p:txBody>
+      </p:sp>
+      <p:sp>
+        <p:nvSpPr>
+          <p:cNvPr id="14" name="Rounded Rectangle 13"/>
+          <p:cNvSpPr/>
+          <p:nvPr/>
+        </p:nvSpPr>
+        <p:spPr>
+          <a:xfrm>
+            <a:off x="609600" y="2943225"/>
+            <a:ext cx="247650" cy="247650"/>
+          </a:xfrm>
+          <a:prstGeom prst="roundRect">
+            <a:avLst>
+              <a:gd name="adj" fmla="val 50000"/>
+            </a:avLst>
+          </a:prstGeom>
+          <a:solidFill>
+            <a:srgbClr val="C9A34E"/>
+          </a:solidFill>
+          <a:ln>
+            <a:noFill/>
+          </a:ln>
+        </p:spPr>
+        <p:txBody>
+          <a:bodyPr rtlCol="0" anchor="ctr"/>
+          <a:lstStyle/>
+          <a:p>
+            <a:endParaRPr/>
+          </a:p>
+        </p:txBody>
+      </p:sp>
+      <p:sp>
+        <p:nvSpPr>
+          <p:cNvPr id="15" name="TextBox 14"/>
+          <p:cNvSpPr txBox="1"/>
+          <p:nvPr/>
+        </p:nvSpPr>
+        <p:spPr>
+          <a:xfrm>
+            <a:off x="672739" y="2981325"/>
+            <a:ext cx="121372" cy="171450"/>
+          </a:xfrm>
+          <a:prstGeom prst="rect">
+            <a:avLst/>
+          </a:prstGeom>
+          <a:noFill/>
+        </p:spPr>
+        <p:txBody>
+          <a:bodyPr wrap="none" lIns="0" tIns="0" rIns="0" bIns="0" anchor="t">
+            <a:noAutofit/>
+          </a:bodyPr>
+          <a:lstStyle/>
+          <a:p>
+            <a:pPr algn="ctr">
+              <a:lnSpc>
+                <a:spcPts val="1200"/>
+              </a:lnSpc>
+              <a:spcBef>
+                <a:spcPts val="0"/>
+              </a:spcBef>
+              <a:spcAft>
+                <a:spcPts val="0"/>
+              </a:spcAft>
+            </a:pPr>
+            <a:r>
+              <a:rPr sz="1050" b="1" i="0">
+                <a:solidFill>
+                  <a:srgbClr val="1C2433"/>
+                </a:solidFill>
+                <a:latin typeface="JetBrains Mono"/>
+                <a:ea typeface="JetBrains Mono"/>
+                <a:cs typeface="JetBrains Mono"/>
+              </a:rPr>
+              <a:t>c</a:t>
+            </a:r>
+          </a:p>
+        </p:txBody>
+      </p:sp>
+      <p:sp>
+        <p:nvSpPr>
+          <p:cNvPr id="16" name="TextBox 15"/>
+          <p:cNvSpPr txBox="1"/>
+          <p:nvPr/>
+        </p:nvSpPr>
+        <p:spPr>
+          <a:xfrm>
+            <a:off x="971550" y="2943225"/>
+            <a:ext cx="4149014" cy="400050"/>
+          </a:xfrm>
+          <a:prstGeom prst="rect">
+            <a:avLst/>
+          </a:prstGeom>
+          <a:noFill/>
+        </p:spPr>
+        <p:txBody>
+          <a:bodyPr wrap="square" lIns="0" tIns="0" rIns="0" bIns="0" anchor="t">
+            <a:noAutofit/>
+          </a:bodyPr>
+          <a:lstStyle/>
+          <a:p>
+            <a:pPr algn="l">
+              <a:lnSpc>
+                <a:spcPts val="1650"/>
+              </a:lnSpc>
+              <a:spcBef>
+                <a:spcPts val="0"/>
+              </a:spcBef>
+              <a:spcAft>
+                <a:spcPts val="0"/>
+              </a:spcAft>
+            </a:pPr>
+            <a:r>
+              <a:rPr sz="1200" b="0" i="0">
+                <a:solidFill>
+                  <a:srgbClr val="1C2433"/>
+                </a:solidFill>
+                <a:latin typeface="Inter SemiBold"/>
+                <a:ea typeface="Inter SemiBold"/>
+                <a:cs typeface="Inter SemiBold"/>
+              </a:rPr>
+              <a:t>Redacción:</a:t>
+            </a:r>
+            <a:r>
+              <a:rPr sz="1200" b="0" i="0">
+                <a:solidFill>
+                  <a:srgbClr val="1C2433"/>
+                </a:solidFill>
+                <a:latin typeface="Inter"/>
+                <a:ea typeface="Inter"/>
+                <a:cs typeface="Inter"/>
+              </a:rPr>
+              <a:t> un crítico por capítulo, además de los validadores deterministas, y escritor y editor en Sonnet 5</a:t>
+            </a:r>
+          </a:p>
+        </p:txBody>
+      </p:sp>
+      <p:sp>
+        <p:nvSpPr>
+          <p:cNvPr id="17" name="Rounded Rectangle 16"/>
+          <p:cNvSpPr/>
+          <p:nvPr/>
+        </p:nvSpPr>
+        <p:spPr>
+          <a:xfrm>
+            <a:off x="609600" y="3467100"/>
+            <a:ext cx="4476750" cy="819150"/>
+          </a:xfrm>
+          <a:prstGeom prst="roundRect">
+            <a:avLst>
+              <a:gd name="adj" fmla="val 9302"/>
+            </a:avLst>
+          </a:prstGeom>
+          <a:solidFill>
+            <a:srgbClr val="1C2433"/>
+          </a:solidFill>
+          <a:ln>
+            <a:noFill/>
+          </a:ln>
+        </p:spPr>
+        <p:txBody>
+          <a:bodyPr rtlCol="0" anchor="ctr"/>
+          <a:lstStyle/>
+          <a:p>
+            <a:endParaRPr/>
+          </a:p>
+        </p:txBody>
+      </p:sp>
+      <p:sp>
+        <p:nvSpPr>
+          <p:cNvPr id="18" name="TextBox 17"/>
+          <p:cNvSpPr txBox="1"/>
+          <p:nvPr/>
+        </p:nvSpPr>
+        <p:spPr>
+          <a:xfrm>
+            <a:off x="742950" y="3571875"/>
+            <a:ext cx="4244835" cy="609600"/>
+          </a:xfrm>
+          <a:prstGeom prst="rect">
+            <a:avLst/>
+          </a:prstGeom>
+          <a:noFill/>
+        </p:spPr>
+        <p:txBody>
+          <a:bodyPr wrap="square" lIns="0" tIns="0" rIns="0" bIns="0" anchor="t">
+            <a:noAutofit/>
+          </a:bodyPr>
+          <a:lstStyle/>
+          <a:p>
+            <a:pPr algn="l">
+              <a:lnSpc>
+                <a:spcPts val="1650"/>
+              </a:lnSpc>
+              <a:spcBef>
+                <a:spcPts val="0"/>
+              </a:spcBef>
+              <a:spcAft>
+                <a:spcPts val="0"/>
+              </a:spcAft>
+            </a:pPr>
+            <a:r>
+              <a:rPr sz="1200" b="0" i="0">
+                <a:solidFill>
+                  <a:srgbClr val="F5EFE3"/>
+                </a:solidFill>
+                <a:latin typeface="Inter"/>
+                <a:ea typeface="Inter"/>
+                <a:cs typeface="Inter"/>
+              </a:rPr>
+              <a:t>Los cinco gates humanos pasan a ser nodos críticos; la persona solo revisa por muestreo (≈5 min por novela en vez de 20)</a:t>
+            </a:r>
+          </a:p>
+        </p:txBody>
+      </p:sp>
+      <p:sp>
+        <p:nvSpPr>
+          <p:cNvPr id="19" name="TextBox 18"/>
+          <p:cNvSpPr txBox="1"/>
+          <p:nvPr/>
+        </p:nvSpPr>
+        <p:spPr>
+          <a:xfrm>
+            <a:off x="5391150" y="1428750"/>
+            <a:ext cx="4092750" cy="152400"/>
+          </a:xfrm>
+          <a:prstGeom prst="rect">
+            <a:avLst/>
+          </a:prstGeom>
+          <a:noFill/>
+        </p:spPr>
+        <p:txBody>
+          <a:bodyPr wrap="none" lIns="0" tIns="0" rIns="0" bIns="0" anchor="t">
+            <a:noAutofit/>
+          </a:bodyPr>
+          <a:lstStyle/>
+          <a:p>
+            <a:pPr algn="l">
+              <a:lnSpc>
+                <a:spcPts val="1200"/>
+              </a:lnSpc>
+              <a:spcBef>
+                <a:spcPts val="0"/>
+              </a:spcBef>
+              <a:spcAft>
+                <a:spcPts val="0"/>
+              </a:spcAft>
+            </a:pPr>
+            <a:r>
+              <a:rPr sz="1000" b="0" i="0" spc="136">
+                <a:solidFill>
+                  <a:srgbClr val="7D7869"/>
+                </a:solidFill>
+                <a:latin typeface="Inter SemiBold"/>
+                <a:ea typeface="Inter SemiBold"/>
+                <a:cs typeface="Inter SemiBold"/>
+              </a:rPr>
+              <a:t>COSTE UNITARIO POR NOVELA · 300 NOVELAS/MES</a:t>
+            </a:r>
+          </a:p>
+        </p:txBody>
+      </p:sp>
+      <p:sp>
+        <p:nvSpPr>
+          <p:cNvPr id="20" name="Rectangle 19"/>
+          <p:cNvSpPr/>
+          <p:nvPr/>
+        </p:nvSpPr>
+        <p:spPr>
+          <a:xfrm>
+            <a:off x="5391150" y="1657350"/>
+            <a:ext cx="1962150" cy="809625"/>
+          </a:xfrm>
+          <a:prstGeom prst="rect">
+            <a:avLst/>
+          </a:prstGeom>
+          <a:solidFill>
+            <a:srgbClr val="1C2433"/>
+          </a:solidFill>
+          <a:ln>
+            <a:noFill/>
+          </a:ln>
+        </p:spPr>
+        <p:txBody>
+          <a:bodyPr rtlCol="0" anchor="ctr"/>
+          <a:lstStyle/>
+          <a:p>
+            <a:endParaRPr/>
+          </a:p>
+        </p:txBody>
+      </p:sp>
+      <p:sp>
+        <p:nvSpPr>
+          <p:cNvPr id="21" name="Rectangle 20"/>
+          <p:cNvSpPr/>
+          <p:nvPr/>
+        </p:nvSpPr>
+        <p:spPr>
+          <a:xfrm>
+            <a:off x="7353300" y="1657350"/>
+            <a:ext cx="1409700" cy="809625"/>
+          </a:xfrm>
+          <a:prstGeom prst="rect">
+            <a:avLst/>
+          </a:prstGeom>
+          <a:solidFill>
+            <a:srgbClr val="1C2433"/>
+          </a:solidFill>
+          <a:ln>
+            <a:noFill/>
+          </a:ln>
+        </p:spPr>
+        <p:txBody>
+          <a:bodyPr rtlCol="0" anchor="ctr"/>
+          <a:lstStyle/>
+          <a:p>
+            <a:endParaRPr/>
+          </a:p>
+        </p:txBody>
+      </p:sp>
+      <p:sp>
+        <p:nvSpPr>
+          <p:cNvPr id="22" name="TextBox 21"/>
+          <p:cNvSpPr txBox="1"/>
+          <p:nvPr/>
+        </p:nvSpPr>
+        <p:spPr>
+          <a:xfrm>
+            <a:off x="8147352" y="1876425"/>
+            <a:ext cx="520398" cy="180975"/>
+          </a:xfrm>
+          <a:prstGeom prst="rect">
+            <a:avLst/>
+          </a:prstGeom>
+          <a:noFill/>
+        </p:spPr>
+        <p:txBody>
+          <a:bodyPr wrap="none" lIns="0" tIns="0" rIns="0" bIns="0" anchor="t">
+            <a:noAutofit/>
+          </a:bodyPr>
+          <a:lstStyle/>
+          <a:p>
+            <a:pPr algn="r">
+              <a:lnSpc>
+                <a:spcPts val="1350"/>
+              </a:lnSpc>
+              <a:spcBef>
+                <a:spcPts val="0"/>
+              </a:spcBef>
+              <a:spcAft>
+                <a:spcPts val="0"/>
+              </a:spcAft>
+            </a:pPr>
+            <a:r>
+              <a:rPr sz="1100" b="0" i="0">
+                <a:solidFill>
+                  <a:srgbClr val="F5EFE3"/>
+                </a:solidFill>
+                <a:latin typeface="Inter SemiBold"/>
+                <a:ea typeface="Inter SemiBold"/>
+                <a:cs typeface="Inter SemiBold"/>
+              </a:rPr>
+              <a:t>PoC v1</a:t>
+            </a:r>
+          </a:p>
+        </p:txBody>
+      </p:sp>
+      <p:sp>
+        <p:nvSpPr>
+          <p:cNvPr id="23" name="TextBox 22"/>
+          <p:cNvSpPr txBox="1"/>
+          <p:nvPr/>
+        </p:nvSpPr>
+        <p:spPr>
+          <a:xfrm>
+            <a:off x="7431710" y="2076450"/>
+            <a:ext cx="1236040" cy="323850"/>
+          </a:xfrm>
+          <a:prstGeom prst="rect">
+            <a:avLst/>
+          </a:prstGeom>
+          <a:noFill/>
+        </p:spPr>
+        <p:txBody>
+          <a:bodyPr wrap="square" lIns="0" tIns="0" rIns="0" bIns="0" anchor="t">
+            <a:noAutofit/>
+          </a:bodyPr>
+          <a:lstStyle/>
+          <a:p>
+            <a:pPr algn="r">
+              <a:lnSpc>
+                <a:spcPts val="1275"/>
+              </a:lnSpc>
+              <a:spcBef>
+                <a:spcPts val="0"/>
+              </a:spcBef>
+              <a:spcAft>
+                <a:spcPts val="0"/>
+              </a:spcAft>
+            </a:pPr>
+            <a:r>
+              <a:rPr sz="1050" b="0" i="0">
+                <a:solidFill>
+                  <a:srgbClr val="CFCCC6"/>
+                </a:solidFill>
+                <a:latin typeface="Inter"/>
+                <a:ea typeface="Inter"/>
+                <a:cs typeface="Inter"/>
+              </a:rPr>
+              <a:t>Haiku 4.5 en todos los roles</a:t>
+            </a:r>
+          </a:p>
+        </p:txBody>
+      </p:sp>
+      <p:sp>
+        <p:nvSpPr>
+          <p:cNvPr id="24" name="Rectangle 23"/>
+          <p:cNvSpPr/>
+          <p:nvPr/>
+        </p:nvSpPr>
+        <p:spPr>
+          <a:xfrm>
+            <a:off x="8763000" y="1657350"/>
+            <a:ext cx="1409700" cy="809625"/>
+          </a:xfrm>
+          <a:prstGeom prst="rect">
+            <a:avLst/>
+          </a:prstGeom>
+          <a:solidFill>
+            <a:srgbClr val="1C2433"/>
+          </a:solidFill>
+          <a:ln>
+            <a:noFill/>
+          </a:ln>
+        </p:spPr>
+        <p:txBody>
+          <a:bodyPr rtlCol="0" anchor="ctr"/>
+          <a:lstStyle/>
+          <a:p>
+            <a:endParaRPr/>
+          </a:p>
+        </p:txBody>
+      </p:sp>
+      <p:sp>
+        <p:nvSpPr>
+          <p:cNvPr id="25" name="TextBox 24"/>
+          <p:cNvSpPr txBox="1"/>
+          <p:nvPr/>
+        </p:nvSpPr>
+        <p:spPr>
+          <a:xfrm>
+            <a:off x="9714000" y="1876425"/>
+            <a:ext cx="363450" cy="180975"/>
+          </a:xfrm>
+          <a:prstGeom prst="rect">
+            <a:avLst/>
+          </a:prstGeom>
+          <a:noFill/>
+        </p:spPr>
+        <p:txBody>
+          <a:bodyPr wrap="none" lIns="0" tIns="0" rIns="0" bIns="0" anchor="t">
+            <a:noAutofit/>
+          </a:bodyPr>
+          <a:lstStyle/>
+          <a:p>
+            <a:pPr algn="r">
+              <a:lnSpc>
+                <a:spcPts val="1350"/>
+              </a:lnSpc>
+              <a:spcBef>
+                <a:spcPts val="0"/>
+              </a:spcBef>
+              <a:spcAft>
+                <a:spcPts val="0"/>
+              </a:spcAft>
+            </a:pPr>
+            <a:r>
+              <a:rPr sz="1100" b="0" i="0">
+                <a:solidFill>
+                  <a:srgbClr val="F5EFE3"/>
+                </a:solidFill>
+                <a:latin typeface="Inter SemiBold"/>
+                <a:ea typeface="Inter SemiBold"/>
+                <a:cs typeface="Inter SemiBold"/>
+              </a:rPr>
+              <a:t>v2 A</a:t>
+            </a:r>
+          </a:p>
+        </p:txBody>
+      </p:sp>
+      <p:sp>
+        <p:nvSpPr>
+          <p:cNvPr id="26" name="TextBox 25"/>
+          <p:cNvSpPr txBox="1"/>
+          <p:nvPr/>
+        </p:nvSpPr>
+        <p:spPr>
+          <a:xfrm>
+            <a:off x="8841410" y="2076450"/>
+            <a:ext cx="1236040" cy="323850"/>
+          </a:xfrm>
+          <a:prstGeom prst="rect">
+            <a:avLst/>
+          </a:prstGeom>
+          <a:noFill/>
+        </p:spPr>
+        <p:txBody>
+          <a:bodyPr wrap="square" lIns="0" tIns="0" rIns="0" bIns="0" anchor="t">
+            <a:noAutofit/>
+          </a:bodyPr>
+          <a:lstStyle/>
+          <a:p>
+            <a:pPr algn="r">
+              <a:lnSpc>
+                <a:spcPts val="1275"/>
+              </a:lnSpc>
+              <a:spcBef>
+                <a:spcPts val="0"/>
+              </a:spcBef>
+              <a:spcAft>
+                <a:spcPts val="0"/>
+              </a:spcAft>
+            </a:pPr>
+            <a:r>
+              <a:rPr sz="1050" b="0" i="0">
+                <a:solidFill>
+                  <a:srgbClr val="CFCCC6"/>
+                </a:solidFill>
+                <a:latin typeface="Inter"/>
+                <a:ea typeface="Inter"/>
+                <a:cs typeface="Inter"/>
+              </a:rPr>
+              <a:t>Sonnet 5 en roles clave</a:t>
+            </a:r>
+          </a:p>
+        </p:txBody>
+      </p:sp>
+      <p:sp>
+        <p:nvSpPr>
+          <p:cNvPr id="27" name="Rectangle 26"/>
+          <p:cNvSpPr/>
+          <p:nvPr/>
+        </p:nvSpPr>
+        <p:spPr>
+          <a:xfrm>
+            <a:off x="10172700" y="1657350"/>
+            <a:ext cx="1409700" cy="809625"/>
+          </a:xfrm>
+          <a:prstGeom prst="rect">
+            <a:avLst/>
+          </a:prstGeom>
+          <a:solidFill>
+            <a:srgbClr val="1C2433"/>
+          </a:solidFill>
+          <a:ln>
+            <a:noFill/>
+          </a:ln>
+        </p:spPr>
+        <p:txBody>
+          <a:bodyPr rtlCol="0" anchor="ctr"/>
+          <a:lstStyle/>
+          <a:p>
+            <a:endParaRPr/>
+          </a:p>
+        </p:txBody>
+      </p:sp>
+      <p:sp>
+        <p:nvSpPr>
+          <p:cNvPr id="28" name="TextBox 27"/>
+          <p:cNvSpPr txBox="1"/>
+          <p:nvPr/>
+        </p:nvSpPr>
+        <p:spPr>
+          <a:xfrm>
+            <a:off x="11133761" y="1714500"/>
+            <a:ext cx="353389" cy="180975"/>
+          </a:xfrm>
+          <a:prstGeom prst="rect">
+            <a:avLst/>
+          </a:prstGeom>
+          <a:noFill/>
+        </p:spPr>
+        <p:txBody>
+          <a:bodyPr wrap="none" lIns="0" tIns="0" rIns="0" bIns="0" anchor="t">
+            <a:noAutofit/>
+          </a:bodyPr>
+          <a:lstStyle/>
+          <a:p>
+            <a:pPr algn="r">
+              <a:lnSpc>
+                <a:spcPts val="1350"/>
+              </a:lnSpc>
+              <a:spcBef>
+                <a:spcPts val="0"/>
+              </a:spcBef>
+              <a:spcAft>
+                <a:spcPts val="0"/>
+              </a:spcAft>
+            </a:pPr>
+            <a:r>
+              <a:rPr sz="1100" b="0" i="0">
+                <a:solidFill>
+                  <a:srgbClr val="F5EFE3"/>
+                </a:solidFill>
+                <a:latin typeface="Inter SemiBold"/>
+                <a:ea typeface="Inter SemiBold"/>
+                <a:cs typeface="Inter SemiBold"/>
+              </a:rPr>
+              <a:t>v2 B</a:t>
+            </a:r>
+          </a:p>
+        </p:txBody>
+      </p:sp>
+      <p:sp>
+        <p:nvSpPr>
+          <p:cNvPr id="29" name="TextBox 28"/>
+          <p:cNvSpPr txBox="1"/>
+          <p:nvPr/>
+        </p:nvSpPr>
+        <p:spPr>
+          <a:xfrm>
+            <a:off x="10251110" y="1914525"/>
+            <a:ext cx="1236040" cy="485775"/>
+          </a:xfrm>
+          <a:prstGeom prst="rect">
+            <a:avLst/>
+          </a:prstGeom>
+          <a:noFill/>
+        </p:spPr>
+        <p:txBody>
+          <a:bodyPr wrap="square" lIns="0" tIns="0" rIns="0" bIns="0" anchor="t">
+            <a:noAutofit/>
+          </a:bodyPr>
+          <a:lstStyle/>
+          <a:p>
+            <a:pPr algn="r">
+              <a:lnSpc>
+                <a:spcPts val="1275"/>
+              </a:lnSpc>
+              <a:spcBef>
+                <a:spcPts val="0"/>
+              </a:spcBef>
+              <a:spcAft>
+                <a:spcPts val="0"/>
+              </a:spcAft>
+            </a:pPr>
+            <a:r>
+              <a:rPr sz="1050" b="0" i="0">
+                <a:solidFill>
+                  <a:srgbClr val="CFCCC6"/>
+                </a:solidFill>
+                <a:latin typeface="Inter"/>
+                <a:ea typeface="Inter"/>
+                <a:cs typeface="Inter"/>
+              </a:rPr>
+              <a:t>Opus 5 en arquitecto, críticos y juez</a:t>
+            </a:r>
+          </a:p>
+        </p:txBody>
+      </p:sp>
+      <p:sp>
+        <p:nvSpPr>
+          <p:cNvPr id="30" name="Rectangle 29"/>
+          <p:cNvSpPr/>
+          <p:nvPr/>
+        </p:nvSpPr>
+        <p:spPr>
+          <a:xfrm>
+            <a:off x="5391150" y="2466975"/>
+            <a:ext cx="1962150" cy="309562"/>
+          </a:xfrm>
+          <a:prstGeom prst="rect">
+            <a:avLst/>
+          </a:prstGeom>
+          <a:noFill/>
+          <a:ln>
+            <a:noFill/>
+          </a:ln>
+        </p:spPr>
+        <p:txBody>
+          <a:bodyPr rtlCol="0" anchor="ctr"/>
+          <a:lstStyle/>
+          <a:p>
+            <a:endParaRPr/>
+          </a:p>
+        </p:txBody>
+      </p:sp>
+      <p:cxnSp>
+        <p:nvCxnSpPr>
+          <p:cNvPr id="31" name="Connector 30"/>
+          <p:cNvCxnSpPr/>
+          <p:nvPr/>
+        </p:nvCxnSpPr>
+        <p:spPr>
+          <a:xfrm>
+            <a:off x="5391150" y="2771775"/>
+            <a:ext cx="1962150" cy="0"/>
+          </a:xfrm>
+          <a:prstGeom prst="line">
+            <a:avLst/>
+          </a:prstGeom>
+          <a:ln w="9525">
+            <a:solidFill>
+              <a:srgbClr val="D9D2C3"/>
+            </a:solidFill>
+          </a:ln>
+        </p:spPr>
+      </p:cxnSp>
+      <p:sp>
+        <p:nvSpPr>
+          <p:cNvPr id="32" name="TextBox 31"/>
+          <p:cNvSpPr txBox="1"/>
+          <p:nvPr/>
+        </p:nvSpPr>
+        <p:spPr>
+          <a:xfrm>
+            <a:off x="5486400" y="2524125"/>
+            <a:ext cx="576274" cy="190500"/>
+          </a:xfrm>
+          <a:prstGeom prst="rect">
+            <a:avLst/>
+          </a:prstGeom>
+          <a:noFill/>
+        </p:spPr>
+        <p:txBody>
+          <a:bodyPr wrap="none" lIns="0" tIns="0" rIns="0" bIns="0" anchor="t">
+            <a:noAutofit/>
+          </a:bodyPr>
+          <a:lstStyle/>
+          <a:p>
+            <a:pPr algn="l">
+              <a:lnSpc>
+                <a:spcPts val="1500"/>
+              </a:lnSpc>
+              <a:spcBef>
+                <a:spcPts val="0"/>
+              </a:spcBef>
+              <a:spcAft>
+                <a:spcPts val="0"/>
+              </a:spcAft>
+            </a:pPr>
+            <a:r>
+              <a:rPr sz="1200" b="0" i="0">
+                <a:solidFill>
+                  <a:srgbClr val="1C2433"/>
+                </a:solidFill>
+                <a:latin typeface="Inter"/>
+                <a:ea typeface="Inter"/>
+                <a:cs typeface="Inter"/>
+              </a:rPr>
+              <a:t>Tokens</a:t>
+            </a:r>
+          </a:p>
+        </p:txBody>
+      </p:sp>
+      <p:sp>
+        <p:nvSpPr>
+          <p:cNvPr id="33" name="Rectangle 32"/>
+          <p:cNvSpPr/>
+          <p:nvPr/>
+        </p:nvSpPr>
+        <p:spPr>
+          <a:xfrm>
+            <a:off x="7353300" y="2466975"/>
+            <a:ext cx="1409700" cy="309562"/>
+          </a:xfrm>
+          <a:prstGeom prst="rect">
+            <a:avLst/>
+          </a:prstGeom>
+          <a:noFill/>
+          <a:ln>
+            <a:noFill/>
+          </a:ln>
+        </p:spPr>
+        <p:txBody>
+          <a:bodyPr rtlCol="0" anchor="ctr"/>
+          <a:lstStyle/>
+          <a:p>
+            <a:endParaRPr/>
+          </a:p>
+        </p:txBody>
+      </p:sp>
+      <p:cxnSp>
+        <p:nvCxnSpPr>
+          <p:cNvPr id="34" name="Connector 33"/>
+          <p:cNvCxnSpPr/>
+          <p:nvPr/>
+        </p:nvCxnSpPr>
+        <p:spPr>
+          <a:xfrm>
+            <a:off x="7353300" y="2771775"/>
+            <a:ext cx="1409700" cy="0"/>
+          </a:xfrm>
+          <a:prstGeom prst="line">
+            <a:avLst/>
+          </a:prstGeom>
+          <a:ln w="9525">
+            <a:solidFill>
+              <a:srgbClr val="D9D2C3"/>
+            </a:solidFill>
+          </a:ln>
+        </p:spPr>
+      </p:cxnSp>
+      <p:sp>
+        <p:nvSpPr>
+          <p:cNvPr id="35" name="TextBox 34"/>
+          <p:cNvSpPr txBox="1"/>
+          <p:nvPr/>
+        </p:nvSpPr>
+        <p:spPr>
+          <a:xfrm>
+            <a:off x="8058972" y="2514600"/>
+            <a:ext cx="608778" cy="200025"/>
+          </a:xfrm>
+          <a:prstGeom prst="rect">
+            <a:avLst/>
+          </a:prstGeom>
+          <a:noFill/>
+        </p:spPr>
+        <p:txBody>
+          <a:bodyPr wrap="none" lIns="0" tIns="0" rIns="0" bIns="0" anchor="t">
+            <a:noAutofit/>
+          </a:bodyPr>
+          <a:lstStyle/>
+          <a:p>
+            <a:pPr algn="r">
+              <a:lnSpc>
+                <a:spcPts val="1500"/>
+              </a:lnSpc>
+              <a:spcBef>
+                <a:spcPts val="0"/>
+              </a:spcBef>
+              <a:spcAft>
+                <a:spcPts val="0"/>
+              </a:spcAft>
+            </a:pPr>
+            <a:r>
+              <a:rPr sz="1200" b="0" i="0">
+                <a:solidFill>
+                  <a:srgbClr val="1C2433"/>
+                </a:solidFill>
+                <a:latin typeface="JetBrains Mono Medium"/>
+                <a:ea typeface="JetBrains Mono Medium"/>
+                <a:cs typeface="JetBrains Mono Medium"/>
+              </a:rPr>
+              <a:t>2,77 €</a:t>
+            </a:r>
+          </a:p>
+        </p:txBody>
+      </p:sp>
+      <p:sp>
+        <p:nvSpPr>
+          <p:cNvPr id="36" name="Rectangle 35"/>
+          <p:cNvSpPr/>
+          <p:nvPr/>
+        </p:nvSpPr>
+        <p:spPr>
+          <a:xfrm>
+            <a:off x="8763000" y="2466975"/>
+            <a:ext cx="1409700" cy="309562"/>
+          </a:xfrm>
+          <a:prstGeom prst="rect">
+            <a:avLst/>
+          </a:prstGeom>
+          <a:noFill/>
+          <a:ln>
+            <a:noFill/>
+          </a:ln>
+        </p:spPr>
+        <p:txBody>
+          <a:bodyPr rtlCol="0" anchor="ctr"/>
+          <a:lstStyle/>
+          <a:p>
+            <a:endParaRPr/>
+          </a:p>
+        </p:txBody>
+      </p:sp>
+      <p:cxnSp>
+        <p:nvCxnSpPr>
+          <p:cNvPr id="37" name="Connector 36"/>
+          <p:cNvCxnSpPr/>
+          <p:nvPr/>
+        </p:nvCxnSpPr>
+        <p:spPr>
+          <a:xfrm>
+            <a:off x="8763000" y="2771775"/>
+            <a:ext cx="1409700" cy="0"/>
+          </a:xfrm>
+          <a:prstGeom prst="line">
+            <a:avLst/>
+          </a:prstGeom>
+          <a:ln w="9525">
+            <a:solidFill>
+              <a:srgbClr val="D9D2C3"/>
+            </a:solidFill>
+          </a:ln>
+        </p:spPr>
+      </p:cxnSp>
+      <p:sp>
+        <p:nvSpPr>
+          <p:cNvPr id="38" name="TextBox 37"/>
+          <p:cNvSpPr txBox="1"/>
+          <p:nvPr/>
+        </p:nvSpPr>
+        <p:spPr>
+          <a:xfrm>
+            <a:off x="9468672" y="2514600"/>
+            <a:ext cx="608778" cy="200025"/>
+          </a:xfrm>
+          <a:prstGeom prst="rect">
+            <a:avLst/>
+          </a:prstGeom>
+          <a:noFill/>
+        </p:spPr>
+        <p:txBody>
+          <a:bodyPr wrap="none" lIns="0" tIns="0" rIns="0" bIns="0" anchor="t">
+            <a:noAutofit/>
+          </a:bodyPr>
+          <a:lstStyle/>
+          <a:p>
+            <a:pPr algn="r">
+              <a:lnSpc>
+                <a:spcPts val="1500"/>
+              </a:lnSpc>
+              <a:spcBef>
+                <a:spcPts val="0"/>
+              </a:spcBef>
+              <a:spcAft>
+                <a:spcPts val="0"/>
+              </a:spcAft>
+            </a:pPr>
+            <a:r>
+              <a:rPr sz="1200" b="0" i="0">
+                <a:solidFill>
+                  <a:srgbClr val="1C2433"/>
+                </a:solidFill>
+                <a:latin typeface="JetBrains Mono Medium"/>
+                <a:ea typeface="JetBrains Mono Medium"/>
+                <a:cs typeface="JetBrains Mono Medium"/>
+              </a:rPr>
+              <a:t>7,72 €</a:t>
+            </a:r>
+          </a:p>
+        </p:txBody>
+      </p:sp>
+      <p:sp>
+        <p:nvSpPr>
+          <p:cNvPr id="39" name="Rectangle 38"/>
+          <p:cNvSpPr/>
+          <p:nvPr/>
+        </p:nvSpPr>
+        <p:spPr>
+          <a:xfrm>
+            <a:off x="10172700" y="2466975"/>
+            <a:ext cx="1409700" cy="309562"/>
+          </a:xfrm>
+          <a:prstGeom prst="rect">
+            <a:avLst/>
+          </a:prstGeom>
+          <a:noFill/>
+          <a:ln>
+            <a:noFill/>
+          </a:ln>
+        </p:spPr>
+        <p:txBody>
+          <a:bodyPr rtlCol="0" anchor="ctr"/>
+          <a:lstStyle/>
+          <a:p>
+            <a:endParaRPr/>
+          </a:p>
+        </p:txBody>
+      </p:sp>
+      <p:cxnSp>
+        <p:nvCxnSpPr>
+          <p:cNvPr id="40" name="Connector 39"/>
+          <p:cNvCxnSpPr/>
+          <p:nvPr/>
+        </p:nvCxnSpPr>
+        <p:spPr>
+          <a:xfrm>
+            <a:off x="10172700" y="2771775"/>
+            <a:ext cx="1409700" cy="0"/>
+          </a:xfrm>
+          <a:prstGeom prst="line">
+            <a:avLst/>
+          </a:prstGeom>
+          <a:ln w="9525">
+            <a:solidFill>
+              <a:srgbClr val="D9D2C3"/>
+            </a:solidFill>
+          </a:ln>
+        </p:spPr>
+      </p:cxnSp>
+      <p:sp>
+        <p:nvSpPr>
+          <p:cNvPr id="41" name="TextBox 40"/>
+          <p:cNvSpPr txBox="1"/>
+          <p:nvPr/>
+        </p:nvSpPr>
+        <p:spPr>
+          <a:xfrm>
+            <a:off x="10783336" y="2514600"/>
+            <a:ext cx="703814" cy="200025"/>
+          </a:xfrm>
+          <a:prstGeom prst="rect">
+            <a:avLst/>
+          </a:prstGeom>
+          <a:noFill/>
+        </p:spPr>
+        <p:txBody>
+          <a:bodyPr wrap="none" lIns="0" tIns="0" rIns="0" bIns="0" anchor="t">
+            <a:noAutofit/>
+          </a:bodyPr>
+          <a:lstStyle/>
+          <a:p>
+            <a:pPr algn="r">
+              <a:lnSpc>
+                <a:spcPts val="1500"/>
+              </a:lnSpc>
+              <a:spcBef>
+                <a:spcPts val="0"/>
+              </a:spcBef>
+              <a:spcAft>
+                <a:spcPts val="0"/>
+              </a:spcAft>
+            </a:pPr>
+            <a:r>
+              <a:rPr sz="1200" b="0" i="0">
+                <a:solidFill>
+                  <a:srgbClr val="1C2433"/>
+                </a:solidFill>
+                <a:latin typeface="JetBrains Mono Medium"/>
+                <a:ea typeface="JetBrains Mono Medium"/>
+                <a:cs typeface="JetBrains Mono Medium"/>
+              </a:rPr>
+              <a:t>12,74 €</a:t>
+            </a:r>
+          </a:p>
+        </p:txBody>
+      </p:sp>
+      <p:sp>
+        <p:nvSpPr>
+          <p:cNvPr id="42" name="Rectangle 41"/>
+          <p:cNvSpPr/>
+          <p:nvPr/>
+        </p:nvSpPr>
+        <p:spPr>
+          <a:xfrm>
+            <a:off x="5391150" y="2776538"/>
+            <a:ext cx="1962150" cy="323850"/>
+          </a:xfrm>
+          <a:prstGeom prst="rect">
+            <a:avLst/>
+          </a:prstGeom>
+          <a:noFill/>
+          <a:ln>
+            <a:noFill/>
+          </a:ln>
+        </p:spPr>
+        <p:txBody>
+          <a:bodyPr rtlCol="0" anchor="ctr"/>
+          <a:lstStyle/>
+          <a:p>
+            <a:endParaRPr/>
+          </a:p>
+        </p:txBody>
+      </p:sp>
+      <p:cxnSp>
+        <p:nvCxnSpPr>
+          <p:cNvPr id="43" name="Connector 42"/>
+          <p:cNvCxnSpPr/>
+          <p:nvPr/>
+        </p:nvCxnSpPr>
+        <p:spPr>
+          <a:xfrm>
+            <a:off x="5391150" y="3095625"/>
+            <a:ext cx="1962150" cy="0"/>
+          </a:xfrm>
+          <a:prstGeom prst="line">
+            <a:avLst/>
+          </a:prstGeom>
+          <a:ln w="9525">
+            <a:solidFill>
+              <a:srgbClr val="D9D2C3"/>
+            </a:solidFill>
+          </a:ln>
+        </p:spPr>
+      </p:cxnSp>
+      <p:sp>
+        <p:nvSpPr>
+          <p:cNvPr id="44" name="TextBox 43"/>
+          <p:cNvSpPr txBox="1"/>
+          <p:nvPr/>
+        </p:nvSpPr>
+        <p:spPr>
+          <a:xfrm>
+            <a:off x="5486400" y="2838450"/>
+            <a:ext cx="1806476" cy="190500"/>
+          </a:xfrm>
+          <a:prstGeom prst="rect">
+            <a:avLst/>
+          </a:prstGeom>
+          <a:noFill/>
+        </p:spPr>
+        <p:txBody>
+          <a:bodyPr wrap="none" lIns="0" tIns="0" rIns="0" bIns="0" anchor="t">
+            <a:noAutofit/>
+          </a:bodyPr>
+          <a:lstStyle/>
+          <a:p>
+            <a:pPr algn="l">
+              <a:lnSpc>
+                <a:spcPts val="1500"/>
+              </a:lnSpc>
+              <a:spcBef>
+                <a:spcPts val="0"/>
+              </a:spcBef>
+              <a:spcAft>
+                <a:spcPts val="0"/>
+              </a:spcAft>
+            </a:pPr>
+            <a:r>
+              <a:rPr sz="1200" b="0" i="0">
+                <a:solidFill>
+                  <a:srgbClr val="1C2433"/>
+                </a:solidFill>
+                <a:latin typeface="Inter"/>
+                <a:ea typeface="Inter"/>
+                <a:cs typeface="Inter"/>
+              </a:rPr>
+              <a:t>Revisiones </a:t>
+            </a:r>
+            <a:r>
+              <a:rPr sz="1050" b="0" i="0">
+                <a:solidFill>
+                  <a:srgbClr val="7D7869"/>
+                </a:solidFill>
+                <a:latin typeface="Inter"/>
+                <a:ea typeface="Inter"/>
+                <a:cs typeface="Inter"/>
+              </a:rPr>
+              <a:t>(1,5 de media)</a:t>
+            </a:r>
+          </a:p>
+        </p:txBody>
+      </p:sp>
+      <p:sp>
+        <p:nvSpPr>
+          <p:cNvPr id="45" name="Rectangle 44"/>
+          <p:cNvSpPr/>
+          <p:nvPr/>
+        </p:nvSpPr>
+        <p:spPr>
+          <a:xfrm>
+            <a:off x="7353300" y="2776538"/>
+            <a:ext cx="1409700" cy="323850"/>
+          </a:xfrm>
+          <a:prstGeom prst="rect">
+            <a:avLst/>
+          </a:prstGeom>
+          <a:noFill/>
+          <a:ln>
+            <a:noFill/>
+          </a:ln>
+        </p:spPr>
+        <p:txBody>
+          <a:bodyPr rtlCol="0" anchor="ctr"/>
+          <a:lstStyle/>
+          <a:p>
+            <a:endParaRPr/>
+          </a:p>
+        </p:txBody>
+      </p:sp>
+      <p:cxnSp>
+        <p:nvCxnSpPr>
+          <p:cNvPr id="46" name="Connector 45"/>
+          <p:cNvCxnSpPr/>
+          <p:nvPr/>
+        </p:nvCxnSpPr>
+        <p:spPr>
+          <a:xfrm>
+            <a:off x="7353300" y="3095625"/>
+            <a:ext cx="1409700" cy="0"/>
+          </a:xfrm>
+          <a:prstGeom prst="line">
+            <a:avLst/>
+          </a:prstGeom>
+          <a:ln w="9525">
+            <a:solidFill>
+              <a:srgbClr val="D9D2C3"/>
+            </a:solidFill>
+          </a:ln>
+        </p:spPr>
+      </p:cxnSp>
+      <p:sp>
+        <p:nvSpPr>
+          <p:cNvPr id="47" name="TextBox 46"/>
+          <p:cNvSpPr txBox="1"/>
+          <p:nvPr/>
+        </p:nvSpPr>
+        <p:spPr>
+          <a:xfrm>
+            <a:off x="8058972" y="2833688"/>
+            <a:ext cx="608778" cy="200025"/>
+          </a:xfrm>
+          <a:prstGeom prst="rect">
+            <a:avLst/>
+          </a:prstGeom>
+          <a:noFill/>
+        </p:spPr>
+        <p:txBody>
+          <a:bodyPr wrap="none" lIns="0" tIns="0" rIns="0" bIns="0" anchor="t">
+            <a:noAutofit/>
+          </a:bodyPr>
+          <a:lstStyle/>
+          <a:p>
+            <a:pPr algn="r">
+              <a:lnSpc>
+                <a:spcPts val="1500"/>
+              </a:lnSpc>
+              <a:spcBef>
+                <a:spcPts val="0"/>
+              </a:spcBef>
+              <a:spcAft>
+                <a:spcPts val="0"/>
+              </a:spcAft>
+            </a:pPr>
+            <a:r>
+              <a:rPr sz="1200" b="0" i="0">
+                <a:solidFill>
+                  <a:srgbClr val="1C2433"/>
+                </a:solidFill>
+                <a:latin typeface="JetBrains Mono Medium"/>
+                <a:ea typeface="JetBrains Mono Medium"/>
+                <a:cs typeface="JetBrains Mono Medium"/>
+              </a:rPr>
+              <a:t>0,81 €</a:t>
+            </a:r>
+          </a:p>
+        </p:txBody>
+      </p:sp>
+      <p:sp>
+        <p:nvSpPr>
+          <p:cNvPr id="48" name="Rectangle 47"/>
+          <p:cNvSpPr/>
+          <p:nvPr/>
+        </p:nvSpPr>
+        <p:spPr>
+          <a:xfrm>
+            <a:off x="8763000" y="2776538"/>
+            <a:ext cx="1409700" cy="323850"/>
+          </a:xfrm>
+          <a:prstGeom prst="rect">
+            <a:avLst/>
+          </a:prstGeom>
+          <a:noFill/>
+          <a:ln>
+            <a:noFill/>
+          </a:ln>
+        </p:spPr>
+        <p:txBody>
+          <a:bodyPr rtlCol="0" anchor="ctr"/>
+          <a:lstStyle/>
+          <a:p>
+            <a:endParaRPr/>
+          </a:p>
+        </p:txBody>
+      </p:sp>
+      <p:cxnSp>
+        <p:nvCxnSpPr>
+          <p:cNvPr id="49" name="Connector 48"/>
+          <p:cNvCxnSpPr/>
+          <p:nvPr/>
+        </p:nvCxnSpPr>
+        <p:spPr>
+          <a:xfrm>
+            <a:off x="8763000" y="3095625"/>
+            <a:ext cx="1409700" cy="0"/>
+          </a:xfrm>
+          <a:prstGeom prst="line">
+            <a:avLst/>
+          </a:prstGeom>
+          <a:ln w="9525">
+            <a:solidFill>
+              <a:srgbClr val="D9D2C3"/>
+            </a:solidFill>
+          </a:ln>
+        </p:spPr>
+      </p:cxnSp>
+      <p:sp>
+        <p:nvSpPr>
+          <p:cNvPr id="50" name="TextBox 49"/>
+          <p:cNvSpPr txBox="1"/>
+          <p:nvPr/>
+        </p:nvSpPr>
+        <p:spPr>
+          <a:xfrm>
+            <a:off x="9468672" y="2833688"/>
+            <a:ext cx="608778" cy="200025"/>
+          </a:xfrm>
+          <a:prstGeom prst="rect">
+            <a:avLst/>
+          </a:prstGeom>
+          <a:noFill/>
+        </p:spPr>
+        <p:txBody>
+          <a:bodyPr wrap="none" lIns="0" tIns="0" rIns="0" bIns="0" anchor="t">
+            <a:noAutofit/>
+          </a:bodyPr>
+          <a:lstStyle/>
+          <a:p>
+            <a:pPr algn="r">
+              <a:lnSpc>
+                <a:spcPts val="1500"/>
+              </a:lnSpc>
+              <a:spcBef>
+                <a:spcPts val="0"/>
+              </a:spcBef>
+              <a:spcAft>
+                <a:spcPts val="0"/>
+              </a:spcAft>
+            </a:pPr>
+            <a:r>
+              <a:rPr sz="1200" b="0" i="0">
+                <a:solidFill>
+                  <a:srgbClr val="1C2433"/>
+                </a:solidFill>
+                <a:latin typeface="JetBrains Mono Medium"/>
+                <a:ea typeface="JetBrains Mono Medium"/>
+                <a:cs typeface="JetBrains Mono Medium"/>
+              </a:rPr>
+              <a:t>2,27 €</a:t>
+            </a:r>
+          </a:p>
+        </p:txBody>
+      </p:sp>
+      <p:sp>
+        <p:nvSpPr>
+          <p:cNvPr id="51" name="Rectangle 50"/>
+          <p:cNvSpPr/>
+          <p:nvPr/>
+        </p:nvSpPr>
+        <p:spPr>
+          <a:xfrm>
+            <a:off x="10172700" y="2776538"/>
+            <a:ext cx="1409700" cy="323850"/>
+          </a:xfrm>
+          <a:prstGeom prst="rect">
+            <a:avLst/>
+          </a:prstGeom>
+          <a:noFill/>
+          <a:ln>
+            <a:noFill/>
+          </a:ln>
+        </p:spPr>
+        <p:txBody>
+          <a:bodyPr rtlCol="0" anchor="ctr"/>
+          <a:lstStyle/>
+          <a:p>
+            <a:endParaRPr/>
+          </a:p>
+        </p:txBody>
+      </p:sp>
+      <p:cxnSp>
+        <p:nvCxnSpPr>
+          <p:cNvPr id="52" name="Connector 51"/>
+          <p:cNvCxnSpPr/>
+          <p:nvPr/>
+        </p:nvCxnSpPr>
+        <p:spPr>
+          <a:xfrm>
+            <a:off x="10172700" y="3095625"/>
+            <a:ext cx="1409700" cy="0"/>
+          </a:xfrm>
+          <a:prstGeom prst="line">
+            <a:avLst/>
+          </a:prstGeom>
+          <a:ln w="9525">
+            <a:solidFill>
+              <a:srgbClr val="D9D2C3"/>
+            </a:solidFill>
+          </a:ln>
+        </p:spPr>
+      </p:cxnSp>
+      <p:sp>
+        <p:nvSpPr>
+          <p:cNvPr id="53" name="TextBox 52"/>
+          <p:cNvSpPr txBox="1"/>
+          <p:nvPr/>
+        </p:nvSpPr>
+        <p:spPr>
+          <a:xfrm>
+            <a:off x="10878372" y="2833688"/>
+            <a:ext cx="608778" cy="200025"/>
+          </a:xfrm>
+          <a:prstGeom prst="rect">
+            <a:avLst/>
+          </a:prstGeom>
+          <a:noFill/>
+        </p:spPr>
+        <p:txBody>
+          <a:bodyPr wrap="none" lIns="0" tIns="0" rIns="0" bIns="0" anchor="t">
+            <a:noAutofit/>
+          </a:bodyPr>
+          <a:lstStyle/>
+          <a:p>
+            <a:pPr algn="r">
+              <a:lnSpc>
+                <a:spcPts val="1500"/>
+              </a:lnSpc>
+              <a:spcBef>
+                <a:spcPts val="0"/>
+              </a:spcBef>
+              <a:spcAft>
+                <a:spcPts val="0"/>
+              </a:spcAft>
+            </a:pPr>
+            <a:r>
+              <a:rPr sz="1200" b="0" i="0">
+                <a:solidFill>
+                  <a:srgbClr val="1C2433"/>
+                </a:solidFill>
+                <a:latin typeface="JetBrains Mono Medium"/>
+                <a:ea typeface="JetBrains Mono Medium"/>
+                <a:cs typeface="JetBrains Mono Medium"/>
+              </a:rPr>
+              <a:t>2,70 €</a:t>
+            </a:r>
+          </a:p>
+        </p:txBody>
+      </p:sp>
+      <p:sp>
+        <p:nvSpPr>
+          <p:cNvPr id="54" name="Rectangle 53"/>
+          <p:cNvSpPr/>
+          <p:nvPr/>
+        </p:nvSpPr>
+        <p:spPr>
+          <a:xfrm>
+            <a:off x="5391150" y="3100388"/>
+            <a:ext cx="1962150" cy="314325"/>
+          </a:xfrm>
+          <a:prstGeom prst="rect">
+            <a:avLst/>
+          </a:prstGeom>
+          <a:noFill/>
+          <a:ln>
+            <a:noFill/>
+          </a:ln>
+        </p:spPr>
+        <p:txBody>
+          <a:bodyPr rtlCol="0" anchor="ctr"/>
+          <a:lstStyle/>
+          <a:p>
+            <a:endParaRPr/>
+          </a:p>
+        </p:txBody>
+      </p:sp>
+      <p:cxnSp>
+        <p:nvCxnSpPr>
+          <p:cNvPr id="55" name="Connector 54"/>
+          <p:cNvCxnSpPr/>
+          <p:nvPr/>
+        </p:nvCxnSpPr>
+        <p:spPr>
+          <a:xfrm>
+            <a:off x="5391150" y="3409950"/>
+            <a:ext cx="1962150" cy="0"/>
+          </a:xfrm>
+          <a:prstGeom prst="line">
+            <a:avLst/>
+          </a:prstGeom>
+          <a:ln w="9525">
+            <a:solidFill>
+              <a:srgbClr val="D9D2C3"/>
+            </a:solidFill>
+          </a:ln>
+        </p:spPr>
+      </p:cxnSp>
+      <p:sp>
+        <p:nvSpPr>
+          <p:cNvPr id="56" name="TextBox 55"/>
+          <p:cNvSpPr txBox="1"/>
+          <p:nvPr/>
+        </p:nvSpPr>
+        <p:spPr>
+          <a:xfrm>
+            <a:off x="5486400" y="3162300"/>
+            <a:ext cx="1565791" cy="190500"/>
+          </a:xfrm>
+          <a:prstGeom prst="rect">
+            <a:avLst/>
+          </a:prstGeom>
+          <a:noFill/>
+        </p:spPr>
+        <p:txBody>
+          <a:bodyPr wrap="none" lIns="0" tIns="0" rIns="0" bIns="0" anchor="t">
+            <a:noAutofit/>
+          </a:bodyPr>
+          <a:lstStyle/>
+          <a:p>
+            <a:pPr algn="l">
+              <a:lnSpc>
+                <a:spcPts val="1500"/>
+              </a:lnSpc>
+              <a:spcBef>
+                <a:spcPts val="0"/>
+              </a:spcBef>
+              <a:spcAft>
+                <a:spcPts val="0"/>
+              </a:spcAft>
+            </a:pPr>
+            <a:r>
+              <a:rPr sz="1200" b="0" i="0">
+                <a:solidFill>
+                  <a:srgbClr val="1C2433"/>
+                </a:solidFill>
+                <a:latin typeface="Inter"/>
+                <a:ea typeface="Inter"/>
+                <a:cs typeface="Inter"/>
+              </a:rPr>
+              <a:t>Supervisión humana</a:t>
+            </a:r>
+          </a:p>
+        </p:txBody>
+      </p:sp>
+      <p:sp>
+        <p:nvSpPr>
+          <p:cNvPr id="57" name="Rectangle 56"/>
+          <p:cNvSpPr/>
+          <p:nvPr/>
+        </p:nvSpPr>
+        <p:spPr>
+          <a:xfrm>
+            <a:off x="7353300" y="3100388"/>
+            <a:ext cx="1409700" cy="314325"/>
+          </a:xfrm>
+          <a:prstGeom prst="rect">
+            <a:avLst/>
+          </a:prstGeom>
+          <a:noFill/>
+          <a:ln>
+            <a:noFill/>
+          </a:ln>
+        </p:spPr>
+        <p:txBody>
+          <a:bodyPr rtlCol="0" anchor="ctr"/>
+          <a:lstStyle/>
+          <a:p>
+            <a:endParaRPr/>
+          </a:p>
+        </p:txBody>
+      </p:sp>
+      <p:cxnSp>
+        <p:nvCxnSpPr>
+          <p:cNvPr id="58" name="Connector 57"/>
+          <p:cNvCxnSpPr/>
+          <p:nvPr/>
+        </p:nvCxnSpPr>
+        <p:spPr>
+          <a:xfrm>
+            <a:off x="7353300" y="3409950"/>
+            <a:ext cx="1409700" cy="0"/>
+          </a:xfrm>
+          <a:prstGeom prst="line">
+            <a:avLst/>
+          </a:prstGeom>
+          <a:ln w="9525">
+            <a:solidFill>
+              <a:srgbClr val="D9D2C3"/>
+            </a:solidFill>
+          </a:ln>
+        </p:spPr>
+      </p:cxnSp>
+      <p:sp>
+        <p:nvSpPr>
+          <p:cNvPr id="59" name="TextBox 58"/>
+          <p:cNvSpPr txBox="1"/>
+          <p:nvPr/>
+        </p:nvSpPr>
+        <p:spPr>
+          <a:xfrm>
+            <a:off x="7414617" y="3152775"/>
+            <a:ext cx="1253133" cy="200025"/>
+          </a:xfrm>
+          <a:prstGeom prst="rect">
+            <a:avLst/>
+          </a:prstGeom>
+          <a:noFill/>
+        </p:spPr>
+        <p:txBody>
+          <a:bodyPr wrap="none" lIns="0" tIns="0" rIns="0" bIns="0" anchor="t">
+            <a:noAutofit/>
+          </a:bodyPr>
+          <a:lstStyle/>
+          <a:p>
+            <a:pPr algn="r">
+              <a:lnSpc>
+                <a:spcPts val="1500"/>
+              </a:lnSpc>
+              <a:spcBef>
+                <a:spcPts val="0"/>
+              </a:spcBef>
+              <a:spcAft>
+                <a:spcPts val="0"/>
+              </a:spcAft>
+            </a:pPr>
+            <a:r>
+              <a:rPr sz="1200" b="0" i="0">
+                <a:solidFill>
+                  <a:srgbClr val="1C2433"/>
+                </a:solidFill>
+                <a:latin typeface="JetBrains Mono Medium"/>
+                <a:ea typeface="JetBrains Mono Medium"/>
+                <a:cs typeface="JetBrains Mono Medium"/>
+              </a:rPr>
+              <a:t>8,35 € </a:t>
+            </a:r>
+            <a:r>
+              <a:rPr sz="1050" b="0" i="0">
+                <a:solidFill>
+                  <a:srgbClr val="7D7869"/>
+                </a:solidFill>
+                <a:latin typeface="Inter"/>
+                <a:ea typeface="Inter"/>
+                <a:cs typeface="Inter"/>
+              </a:rPr>
+              <a:t>(20 min)</a:t>
+            </a:r>
+          </a:p>
+        </p:txBody>
+      </p:sp>
+      <p:sp>
+        <p:nvSpPr>
+          <p:cNvPr id="60" name="Rectangle 59"/>
+          <p:cNvSpPr/>
+          <p:nvPr/>
+        </p:nvSpPr>
+        <p:spPr>
+          <a:xfrm>
+            <a:off x="8763000" y="3100388"/>
+            <a:ext cx="1409700" cy="314325"/>
+          </a:xfrm>
+          <a:prstGeom prst="rect">
+            <a:avLst/>
+          </a:prstGeom>
+          <a:noFill/>
+          <a:ln>
+            <a:noFill/>
+          </a:ln>
+        </p:spPr>
+        <p:txBody>
+          <a:bodyPr rtlCol="0" anchor="ctr"/>
+          <a:lstStyle/>
+          <a:p>
+            <a:endParaRPr/>
+          </a:p>
+        </p:txBody>
+      </p:sp>
+      <p:cxnSp>
+        <p:nvCxnSpPr>
+          <p:cNvPr id="61" name="Connector 60"/>
+          <p:cNvCxnSpPr/>
+          <p:nvPr/>
+        </p:nvCxnSpPr>
+        <p:spPr>
+          <a:xfrm>
+            <a:off x="8763000" y="3409950"/>
+            <a:ext cx="1409700" cy="0"/>
+          </a:xfrm>
+          <a:prstGeom prst="line">
+            <a:avLst/>
+          </a:prstGeom>
+          <a:ln w="9525">
+            <a:solidFill>
+              <a:srgbClr val="D9D2C3"/>
+            </a:solidFill>
+          </a:ln>
+        </p:spPr>
+      </p:cxnSp>
+      <p:sp>
+        <p:nvSpPr>
+          <p:cNvPr id="62" name="TextBox 61"/>
+          <p:cNvSpPr txBox="1"/>
+          <p:nvPr/>
+        </p:nvSpPr>
+        <p:spPr>
+          <a:xfrm>
+            <a:off x="8914090" y="3152775"/>
+            <a:ext cx="1163360" cy="200025"/>
+          </a:xfrm>
+          <a:prstGeom prst="rect">
+            <a:avLst/>
+          </a:prstGeom>
+          <a:noFill/>
+        </p:spPr>
+        <p:txBody>
+          <a:bodyPr wrap="none" lIns="0" tIns="0" rIns="0" bIns="0" anchor="t">
+            <a:noAutofit/>
+          </a:bodyPr>
+          <a:lstStyle/>
+          <a:p>
+            <a:pPr algn="r">
+              <a:lnSpc>
+                <a:spcPts val="1500"/>
+              </a:lnSpc>
+              <a:spcBef>
+                <a:spcPts val="0"/>
+              </a:spcBef>
+              <a:spcAft>
+                <a:spcPts val="0"/>
+              </a:spcAft>
+            </a:pPr>
+            <a:r>
+              <a:rPr sz="1200" b="0" i="0">
+                <a:solidFill>
+                  <a:srgbClr val="1C2433"/>
+                </a:solidFill>
+                <a:latin typeface="JetBrains Mono Medium"/>
+                <a:ea typeface="JetBrains Mono Medium"/>
+                <a:cs typeface="JetBrains Mono Medium"/>
+              </a:rPr>
+              <a:t>2,08 € </a:t>
+            </a:r>
+            <a:r>
+              <a:rPr sz="1050" b="0" i="0">
+                <a:solidFill>
+                  <a:srgbClr val="7D7869"/>
+                </a:solidFill>
+                <a:latin typeface="Inter"/>
+                <a:ea typeface="Inter"/>
+                <a:cs typeface="Inter"/>
+              </a:rPr>
+              <a:t>(5 min)</a:t>
+            </a:r>
+          </a:p>
+        </p:txBody>
+      </p:sp>
+      <p:sp>
+        <p:nvSpPr>
+          <p:cNvPr id="63" name="Rectangle 62"/>
+          <p:cNvSpPr/>
+          <p:nvPr/>
+        </p:nvSpPr>
+        <p:spPr>
+          <a:xfrm>
+            <a:off x="10172700" y="3100388"/>
+            <a:ext cx="1409700" cy="314325"/>
+          </a:xfrm>
+          <a:prstGeom prst="rect">
+            <a:avLst/>
+          </a:prstGeom>
+          <a:noFill/>
+          <a:ln>
+            <a:noFill/>
+          </a:ln>
+        </p:spPr>
+        <p:txBody>
+          <a:bodyPr rtlCol="0" anchor="ctr"/>
+          <a:lstStyle/>
+          <a:p>
+            <a:endParaRPr/>
+          </a:p>
+        </p:txBody>
+      </p:sp>
+      <p:cxnSp>
+        <p:nvCxnSpPr>
+          <p:cNvPr id="64" name="Connector 63"/>
+          <p:cNvCxnSpPr/>
+          <p:nvPr/>
+        </p:nvCxnSpPr>
+        <p:spPr>
+          <a:xfrm>
+            <a:off x="10172700" y="3409950"/>
+            <a:ext cx="1409700" cy="0"/>
+          </a:xfrm>
+          <a:prstGeom prst="line">
+            <a:avLst/>
+          </a:prstGeom>
+          <a:ln w="9525">
+            <a:solidFill>
+              <a:srgbClr val="D9D2C3"/>
+            </a:solidFill>
+          </a:ln>
+        </p:spPr>
+      </p:cxnSp>
+      <p:sp>
+        <p:nvSpPr>
+          <p:cNvPr id="65" name="TextBox 64"/>
+          <p:cNvSpPr txBox="1"/>
+          <p:nvPr/>
+        </p:nvSpPr>
+        <p:spPr>
+          <a:xfrm>
+            <a:off x="10323790" y="3152775"/>
+            <a:ext cx="1163360" cy="200025"/>
+          </a:xfrm>
+          <a:prstGeom prst="rect">
+            <a:avLst/>
+          </a:prstGeom>
+          <a:noFill/>
+        </p:spPr>
+        <p:txBody>
+          <a:bodyPr wrap="none" lIns="0" tIns="0" rIns="0" bIns="0" anchor="t">
+            <a:noAutofit/>
+          </a:bodyPr>
+          <a:lstStyle/>
+          <a:p>
+            <a:pPr algn="r">
+              <a:lnSpc>
+                <a:spcPts val="1500"/>
+              </a:lnSpc>
+              <a:spcBef>
+                <a:spcPts val="0"/>
+              </a:spcBef>
+              <a:spcAft>
+                <a:spcPts val="0"/>
+              </a:spcAft>
+            </a:pPr>
+            <a:r>
+              <a:rPr sz="1200" b="0" i="0">
+                <a:solidFill>
+                  <a:srgbClr val="1C2433"/>
+                </a:solidFill>
+                <a:latin typeface="JetBrains Mono Medium"/>
+                <a:ea typeface="JetBrains Mono Medium"/>
+                <a:cs typeface="JetBrains Mono Medium"/>
+              </a:rPr>
+              <a:t>2,08 € </a:t>
+            </a:r>
+            <a:r>
+              <a:rPr sz="1050" b="0" i="0">
+                <a:solidFill>
+                  <a:srgbClr val="7D7869"/>
+                </a:solidFill>
+                <a:latin typeface="Inter"/>
+                <a:ea typeface="Inter"/>
+                <a:cs typeface="Inter"/>
+              </a:rPr>
+              <a:t>(5 min)</a:t>
+            </a:r>
+          </a:p>
+        </p:txBody>
+      </p:sp>
+      <p:sp>
+        <p:nvSpPr>
+          <p:cNvPr id="66" name="Rectangle 65"/>
+          <p:cNvSpPr/>
+          <p:nvPr/>
+        </p:nvSpPr>
+        <p:spPr>
+          <a:xfrm>
+            <a:off x="5391150" y="3414712"/>
+            <a:ext cx="1962150" cy="504825"/>
+          </a:xfrm>
+          <a:prstGeom prst="rect">
+            <a:avLst/>
+          </a:prstGeom>
+          <a:noFill/>
+          <a:ln>
+            <a:noFill/>
+          </a:ln>
+        </p:spPr>
+        <p:txBody>
+          <a:bodyPr rtlCol="0" anchor="ctr"/>
+          <a:lstStyle/>
+          <a:p>
+            <a:endParaRPr/>
+          </a:p>
+        </p:txBody>
+      </p:sp>
+      <p:cxnSp>
+        <p:nvCxnSpPr>
+          <p:cNvPr id="67" name="Connector 66"/>
+          <p:cNvCxnSpPr/>
+          <p:nvPr/>
+        </p:nvCxnSpPr>
+        <p:spPr>
+          <a:xfrm>
+            <a:off x="5391150" y="3914775"/>
+            <a:ext cx="1962150" cy="0"/>
+          </a:xfrm>
+          <a:prstGeom prst="line">
+            <a:avLst/>
+          </a:prstGeom>
+          <a:ln w="9525">
+            <a:solidFill>
+              <a:srgbClr val="D9D2C3"/>
+            </a:solidFill>
+          </a:ln>
+        </p:spPr>
+      </p:cxnSp>
+      <p:sp>
+        <p:nvSpPr>
+          <p:cNvPr id="68" name="TextBox 67"/>
+          <p:cNvSpPr txBox="1"/>
+          <p:nvPr/>
+        </p:nvSpPr>
+        <p:spPr>
+          <a:xfrm>
+            <a:off x="5486400" y="3476625"/>
+            <a:ext cx="1791805" cy="381000"/>
+          </a:xfrm>
+          <a:prstGeom prst="rect">
+            <a:avLst/>
+          </a:prstGeom>
+          <a:noFill/>
+        </p:spPr>
+        <p:txBody>
+          <a:bodyPr wrap="square" lIns="0" tIns="0" rIns="0" bIns="0" anchor="t">
+            <a:noAutofit/>
+          </a:bodyPr>
+          <a:lstStyle/>
+          <a:p>
+            <a:pPr algn="l">
+              <a:lnSpc>
+                <a:spcPts val="1500"/>
+              </a:lnSpc>
+              <a:spcBef>
+                <a:spcPts val="0"/>
+              </a:spcBef>
+              <a:spcAft>
+                <a:spcPts val="0"/>
+              </a:spcAft>
+            </a:pPr>
+            <a:r>
+              <a:rPr sz="1200" b="0" i="0">
+                <a:solidFill>
+                  <a:srgbClr val="1C2433"/>
+                </a:solidFill>
+                <a:latin typeface="Inter"/>
+                <a:ea typeface="Inter"/>
+                <a:cs typeface="Inter"/>
+              </a:rPr>
+              <a:t>Infraestructura y mantenimiento</a:t>
+            </a:r>
+          </a:p>
+        </p:txBody>
+      </p:sp>
+      <p:sp>
+        <p:nvSpPr>
+          <p:cNvPr id="69" name="Rectangle 68"/>
+          <p:cNvSpPr/>
+          <p:nvPr/>
+        </p:nvSpPr>
+        <p:spPr>
+          <a:xfrm>
+            <a:off x="7353300" y="3414712"/>
+            <a:ext cx="1409700" cy="504825"/>
+          </a:xfrm>
+          <a:prstGeom prst="rect">
+            <a:avLst/>
+          </a:prstGeom>
+          <a:noFill/>
+          <a:ln>
+            <a:noFill/>
+          </a:ln>
+        </p:spPr>
+        <p:txBody>
+          <a:bodyPr rtlCol="0" anchor="ctr"/>
+          <a:lstStyle/>
+          <a:p>
+            <a:endParaRPr/>
+          </a:p>
+        </p:txBody>
+      </p:sp>
+      <p:cxnSp>
+        <p:nvCxnSpPr>
+          <p:cNvPr id="70" name="Connector 69"/>
+          <p:cNvCxnSpPr/>
+          <p:nvPr/>
+        </p:nvCxnSpPr>
+        <p:spPr>
+          <a:xfrm>
+            <a:off x="7353300" y="3914775"/>
+            <a:ext cx="1409700" cy="0"/>
+          </a:xfrm>
+          <a:prstGeom prst="line">
+            <a:avLst/>
+          </a:prstGeom>
+          <a:ln w="9525">
+            <a:solidFill>
+              <a:srgbClr val="D9D2C3"/>
+            </a:solidFill>
+          </a:ln>
+        </p:spPr>
+      </p:cxnSp>
+      <p:sp>
+        <p:nvSpPr>
+          <p:cNvPr id="71" name="TextBox 70"/>
+          <p:cNvSpPr txBox="1"/>
+          <p:nvPr/>
+        </p:nvSpPr>
+        <p:spPr>
+          <a:xfrm>
+            <a:off x="8058972" y="3562350"/>
+            <a:ext cx="608778" cy="200025"/>
+          </a:xfrm>
+          <a:prstGeom prst="rect">
+            <a:avLst/>
+          </a:prstGeom>
+          <a:noFill/>
+        </p:spPr>
+        <p:txBody>
+          <a:bodyPr wrap="none" lIns="0" tIns="0" rIns="0" bIns="0" anchor="t">
+            <a:noAutofit/>
+          </a:bodyPr>
+          <a:lstStyle/>
+          <a:p>
+            <a:pPr algn="r">
+              <a:lnSpc>
+                <a:spcPts val="1500"/>
+              </a:lnSpc>
+              <a:spcBef>
+                <a:spcPts val="0"/>
+              </a:spcBef>
+              <a:spcAft>
+                <a:spcPts val="0"/>
+              </a:spcAft>
+            </a:pPr>
+            <a:r>
+              <a:rPr sz="1200" b="0" i="0">
+                <a:solidFill>
+                  <a:srgbClr val="1C2433"/>
+                </a:solidFill>
+                <a:latin typeface="JetBrains Mono Medium"/>
+                <a:ea typeface="JetBrains Mono Medium"/>
+                <a:cs typeface="JetBrains Mono Medium"/>
+              </a:rPr>
+              <a:t>1,97 €</a:t>
+            </a:r>
+          </a:p>
+        </p:txBody>
+      </p:sp>
+      <p:sp>
+        <p:nvSpPr>
+          <p:cNvPr id="72" name="Rectangle 71"/>
+          <p:cNvSpPr/>
+          <p:nvPr/>
+        </p:nvSpPr>
+        <p:spPr>
+          <a:xfrm>
+            <a:off x="8763000" y="3414712"/>
+            <a:ext cx="1409700" cy="504825"/>
+          </a:xfrm>
+          <a:prstGeom prst="rect">
+            <a:avLst/>
+          </a:prstGeom>
+          <a:noFill/>
+          <a:ln>
+            <a:noFill/>
+          </a:ln>
+        </p:spPr>
+        <p:txBody>
+          <a:bodyPr rtlCol="0" anchor="ctr"/>
+          <a:lstStyle/>
+          <a:p>
+            <a:endParaRPr/>
+          </a:p>
+        </p:txBody>
+      </p:sp>
+      <p:cxnSp>
+        <p:nvCxnSpPr>
+          <p:cNvPr id="73" name="Connector 72"/>
+          <p:cNvCxnSpPr/>
+          <p:nvPr/>
+        </p:nvCxnSpPr>
+        <p:spPr>
+          <a:xfrm>
+            <a:off x="8763000" y="3914775"/>
+            <a:ext cx="1409700" cy="0"/>
+          </a:xfrm>
+          <a:prstGeom prst="line">
+            <a:avLst/>
+          </a:prstGeom>
+          <a:ln w="9525">
+            <a:solidFill>
+              <a:srgbClr val="D9D2C3"/>
+            </a:solidFill>
+          </a:ln>
+        </p:spPr>
+      </p:cxnSp>
+      <p:sp>
+        <p:nvSpPr>
+          <p:cNvPr id="74" name="TextBox 73"/>
+          <p:cNvSpPr txBox="1"/>
+          <p:nvPr/>
+        </p:nvSpPr>
+        <p:spPr>
+          <a:xfrm>
+            <a:off x="9468672" y="3562350"/>
+            <a:ext cx="608778" cy="200025"/>
+          </a:xfrm>
+          <a:prstGeom prst="rect">
+            <a:avLst/>
+          </a:prstGeom>
+          <a:noFill/>
+        </p:spPr>
+        <p:txBody>
+          <a:bodyPr wrap="none" lIns="0" tIns="0" rIns="0" bIns="0" anchor="t">
+            <a:noAutofit/>
+          </a:bodyPr>
+          <a:lstStyle/>
+          <a:p>
+            <a:pPr algn="r">
+              <a:lnSpc>
+                <a:spcPts val="1500"/>
+              </a:lnSpc>
+              <a:spcBef>
+                <a:spcPts val="0"/>
+              </a:spcBef>
+              <a:spcAft>
+                <a:spcPts val="0"/>
+              </a:spcAft>
+            </a:pPr>
+            <a:r>
+              <a:rPr sz="1200" b="0" i="0">
+                <a:solidFill>
+                  <a:srgbClr val="1C2433"/>
+                </a:solidFill>
+                <a:latin typeface="JetBrains Mono Medium"/>
+                <a:ea typeface="JetBrains Mono Medium"/>
+                <a:cs typeface="JetBrains Mono Medium"/>
+              </a:rPr>
+              <a:t>1,97 €</a:t>
+            </a:r>
+          </a:p>
+        </p:txBody>
+      </p:sp>
+      <p:sp>
+        <p:nvSpPr>
+          <p:cNvPr id="75" name="Rectangle 74"/>
+          <p:cNvSpPr/>
+          <p:nvPr/>
+        </p:nvSpPr>
+        <p:spPr>
+          <a:xfrm>
+            <a:off x="10172700" y="3414712"/>
+            <a:ext cx="1409700" cy="504825"/>
+          </a:xfrm>
+          <a:prstGeom prst="rect">
+            <a:avLst/>
+          </a:prstGeom>
+          <a:noFill/>
+          <a:ln>
+            <a:noFill/>
+          </a:ln>
+        </p:spPr>
+        <p:txBody>
+          <a:bodyPr rtlCol="0" anchor="ctr"/>
+          <a:lstStyle/>
+          <a:p>
+            <a:endParaRPr/>
+          </a:p>
+        </p:txBody>
+      </p:sp>
+      <p:cxnSp>
+        <p:nvCxnSpPr>
+          <p:cNvPr id="76" name="Connector 75"/>
+          <p:cNvCxnSpPr/>
+          <p:nvPr/>
+        </p:nvCxnSpPr>
+        <p:spPr>
+          <a:xfrm>
+            <a:off x="10172700" y="3914775"/>
+            <a:ext cx="1409700" cy="0"/>
+          </a:xfrm>
+          <a:prstGeom prst="line">
+            <a:avLst/>
+          </a:prstGeom>
+          <a:ln w="9525">
+            <a:solidFill>
+              <a:srgbClr val="D9D2C3"/>
+            </a:solidFill>
+          </a:ln>
+        </p:spPr>
+      </p:cxnSp>
+      <p:sp>
+        <p:nvSpPr>
+          <p:cNvPr id="77" name="TextBox 76"/>
+          <p:cNvSpPr txBox="1"/>
+          <p:nvPr/>
+        </p:nvSpPr>
+        <p:spPr>
+          <a:xfrm>
+            <a:off x="10878372" y="3562350"/>
+            <a:ext cx="608778" cy="200025"/>
+          </a:xfrm>
+          <a:prstGeom prst="rect">
+            <a:avLst/>
+          </a:prstGeom>
+          <a:noFill/>
+        </p:spPr>
+        <p:txBody>
+          <a:bodyPr wrap="none" lIns="0" tIns="0" rIns="0" bIns="0" anchor="t">
+            <a:noAutofit/>
+          </a:bodyPr>
+          <a:lstStyle/>
+          <a:p>
+            <a:pPr algn="r">
+              <a:lnSpc>
+                <a:spcPts val="1500"/>
+              </a:lnSpc>
+              <a:spcBef>
+                <a:spcPts val="0"/>
+              </a:spcBef>
+              <a:spcAft>
+                <a:spcPts val="0"/>
+              </a:spcAft>
+            </a:pPr>
+            <a:r>
+              <a:rPr sz="1200" b="0" i="0">
+                <a:solidFill>
+                  <a:srgbClr val="1C2433"/>
+                </a:solidFill>
+                <a:latin typeface="JetBrains Mono Medium"/>
+                <a:ea typeface="JetBrains Mono Medium"/>
+                <a:cs typeface="JetBrains Mono Medium"/>
+              </a:rPr>
+              <a:t>1,97 €</a:t>
+            </a:r>
+          </a:p>
+        </p:txBody>
+      </p:sp>
+      <p:sp>
+        <p:nvSpPr>
+          <p:cNvPr id="78" name="Rectangle 77"/>
+          <p:cNvSpPr/>
+          <p:nvPr/>
+        </p:nvSpPr>
+        <p:spPr>
+          <a:xfrm>
+            <a:off x="5391150" y="3919538"/>
+            <a:ext cx="1962150" cy="309562"/>
+          </a:xfrm>
+          <a:prstGeom prst="rect">
+            <a:avLst/>
+          </a:prstGeom>
+          <a:solidFill>
+            <a:srgbClr val="1C2433"/>
+          </a:solidFill>
+          <a:ln>
+            <a:noFill/>
+          </a:ln>
+        </p:spPr>
+        <p:txBody>
+          <a:bodyPr rtlCol="0" anchor="ctr"/>
+          <a:lstStyle/>
+          <a:p>
+            <a:endParaRPr/>
+          </a:p>
+        </p:txBody>
+      </p:sp>
+      <p:sp>
+        <p:nvSpPr>
+          <p:cNvPr id="79" name="TextBox 78"/>
+          <p:cNvSpPr txBox="1"/>
+          <p:nvPr/>
+        </p:nvSpPr>
+        <p:spPr>
+          <a:xfrm>
+            <a:off x="5486400" y="3981450"/>
+            <a:ext cx="439757" cy="190500"/>
+          </a:xfrm>
+          <a:prstGeom prst="rect">
+            <a:avLst/>
+          </a:prstGeom>
+          <a:noFill/>
+        </p:spPr>
+        <p:txBody>
+          <a:bodyPr wrap="none" lIns="0" tIns="0" rIns="0" bIns="0" anchor="t">
+            <a:noAutofit/>
+          </a:bodyPr>
+          <a:lstStyle/>
+          <a:p>
+            <a:pPr algn="l">
+              <a:lnSpc>
+                <a:spcPts val="1500"/>
+              </a:lnSpc>
+              <a:spcBef>
+                <a:spcPts val="0"/>
+              </a:spcBef>
+              <a:spcAft>
+                <a:spcPts val="0"/>
+              </a:spcAft>
+            </a:pPr>
+            <a:r>
+              <a:rPr sz="1300" b="0" i="0">
+                <a:solidFill>
+                  <a:srgbClr val="F5EFE3"/>
+                </a:solidFill>
+                <a:latin typeface="Inter SemiBold"/>
+                <a:ea typeface="Inter SemiBold"/>
+                <a:cs typeface="Inter SemiBold"/>
+              </a:rPr>
+              <a:t>Total</a:t>
+            </a:r>
+          </a:p>
+        </p:txBody>
+      </p:sp>
+      <p:sp>
+        <p:nvSpPr>
+          <p:cNvPr id="80" name="Rectangle 79"/>
+          <p:cNvSpPr/>
+          <p:nvPr/>
+        </p:nvSpPr>
+        <p:spPr>
+          <a:xfrm>
+            <a:off x="7353300" y="3919538"/>
+            <a:ext cx="1409700" cy="309562"/>
+          </a:xfrm>
+          <a:prstGeom prst="rect">
+            <a:avLst/>
+          </a:prstGeom>
+          <a:solidFill>
+            <a:srgbClr val="1C2433"/>
+          </a:solidFill>
+          <a:ln>
+            <a:noFill/>
+          </a:ln>
+        </p:spPr>
+        <p:txBody>
+          <a:bodyPr rtlCol="0" anchor="ctr"/>
+          <a:lstStyle/>
+          <a:p>
+            <a:endParaRPr/>
+          </a:p>
+        </p:txBody>
+      </p:sp>
+      <p:sp>
+        <p:nvSpPr>
+          <p:cNvPr id="81" name="TextBox 80"/>
+          <p:cNvSpPr txBox="1"/>
+          <p:nvPr/>
+        </p:nvSpPr>
+        <p:spPr>
+          <a:xfrm>
+            <a:off x="7922300" y="3971925"/>
+            <a:ext cx="745450" cy="209550"/>
+          </a:xfrm>
+          <a:prstGeom prst="rect">
+            <a:avLst/>
+          </a:prstGeom>
+          <a:noFill/>
+        </p:spPr>
+        <p:txBody>
+          <a:bodyPr wrap="none" lIns="0" tIns="0" rIns="0" bIns="0" anchor="t">
+            <a:noAutofit/>
+          </a:bodyPr>
+          <a:lstStyle/>
+          <a:p>
+            <a:pPr algn="r">
+              <a:lnSpc>
+                <a:spcPts val="1500"/>
+              </a:lnSpc>
+              <a:spcBef>
+                <a:spcPts val="0"/>
+              </a:spcBef>
+              <a:spcAft>
+                <a:spcPts val="0"/>
+              </a:spcAft>
+            </a:pPr>
+            <a:r>
+              <a:rPr sz="1300" b="1" i="0">
+                <a:solidFill>
+                  <a:srgbClr val="F5EFE3"/>
+                </a:solidFill>
+                <a:latin typeface="JetBrains Mono"/>
+                <a:ea typeface="JetBrains Mono"/>
+                <a:cs typeface="JetBrains Mono"/>
+              </a:rPr>
+              <a:t>13,90 €</a:t>
+            </a:r>
+          </a:p>
+        </p:txBody>
+      </p:sp>
+      <p:sp>
+        <p:nvSpPr>
+          <p:cNvPr id="82" name="Rectangle 81"/>
+          <p:cNvSpPr/>
+          <p:nvPr/>
+        </p:nvSpPr>
+        <p:spPr>
+          <a:xfrm>
+            <a:off x="8763000" y="3919538"/>
+            <a:ext cx="1409700" cy="309562"/>
+          </a:xfrm>
+          <a:prstGeom prst="rect">
+            <a:avLst/>
+          </a:prstGeom>
+          <a:solidFill>
+            <a:srgbClr val="1C2433"/>
+          </a:solidFill>
+          <a:ln>
+            <a:noFill/>
+          </a:ln>
+        </p:spPr>
+        <p:txBody>
+          <a:bodyPr rtlCol="0" anchor="ctr"/>
+          <a:lstStyle/>
+          <a:p>
+            <a:endParaRPr/>
+          </a:p>
+        </p:txBody>
+      </p:sp>
+      <p:sp>
+        <p:nvSpPr>
+          <p:cNvPr id="83" name="TextBox 82"/>
+          <p:cNvSpPr txBox="1"/>
+          <p:nvPr/>
+        </p:nvSpPr>
+        <p:spPr>
+          <a:xfrm>
+            <a:off x="9332000" y="3971925"/>
+            <a:ext cx="745450" cy="209550"/>
+          </a:xfrm>
+          <a:prstGeom prst="rect">
+            <a:avLst/>
+          </a:prstGeom>
+          <a:noFill/>
+        </p:spPr>
+        <p:txBody>
+          <a:bodyPr wrap="none" lIns="0" tIns="0" rIns="0" bIns="0" anchor="t">
+            <a:noAutofit/>
+          </a:bodyPr>
+          <a:lstStyle/>
+          <a:p>
+            <a:pPr algn="r">
+              <a:lnSpc>
+                <a:spcPts val="1500"/>
+              </a:lnSpc>
+              <a:spcBef>
+                <a:spcPts val="0"/>
+              </a:spcBef>
+              <a:spcAft>
+                <a:spcPts val="0"/>
+              </a:spcAft>
+            </a:pPr>
+            <a:r>
+              <a:rPr sz="1300" b="1" i="0">
+                <a:solidFill>
+                  <a:srgbClr val="F5EFE3"/>
+                </a:solidFill>
+                <a:latin typeface="JetBrains Mono"/>
+                <a:ea typeface="JetBrains Mono"/>
+                <a:cs typeface="JetBrains Mono"/>
+              </a:rPr>
+              <a:t>14,04 €</a:t>
+            </a:r>
+          </a:p>
+        </p:txBody>
+      </p:sp>
+      <p:sp>
+        <p:nvSpPr>
+          <p:cNvPr id="84" name="Rectangle 83"/>
+          <p:cNvSpPr/>
+          <p:nvPr/>
+        </p:nvSpPr>
+        <p:spPr>
+          <a:xfrm>
+            <a:off x="10172700" y="3919538"/>
+            <a:ext cx="1409700" cy="309562"/>
+          </a:xfrm>
+          <a:prstGeom prst="rect">
+            <a:avLst/>
+          </a:prstGeom>
+          <a:solidFill>
+            <a:srgbClr val="1C2433"/>
+          </a:solidFill>
+          <a:ln>
+            <a:noFill/>
+          </a:ln>
+        </p:spPr>
+        <p:txBody>
+          <a:bodyPr rtlCol="0" anchor="ctr"/>
+          <a:lstStyle/>
+          <a:p>
+            <a:endParaRPr/>
+          </a:p>
+        </p:txBody>
+      </p:sp>
+      <p:sp>
+        <p:nvSpPr>
+          <p:cNvPr id="85" name="TextBox 84"/>
+          <p:cNvSpPr txBox="1"/>
+          <p:nvPr/>
+        </p:nvSpPr>
+        <p:spPr>
+          <a:xfrm>
+            <a:off x="10741700" y="3971925"/>
+            <a:ext cx="745450" cy="209550"/>
+          </a:xfrm>
+          <a:prstGeom prst="rect">
+            <a:avLst/>
+          </a:prstGeom>
+          <a:noFill/>
+        </p:spPr>
+        <p:txBody>
+          <a:bodyPr wrap="none" lIns="0" tIns="0" rIns="0" bIns="0" anchor="t">
+            <a:noAutofit/>
+          </a:bodyPr>
+          <a:lstStyle/>
+          <a:p>
+            <a:pPr algn="r">
+              <a:lnSpc>
+                <a:spcPts val="1500"/>
+              </a:lnSpc>
+              <a:spcBef>
+                <a:spcPts val="0"/>
+              </a:spcBef>
+              <a:spcAft>
+                <a:spcPts val="0"/>
+              </a:spcAft>
+            </a:pPr>
+            <a:r>
+              <a:rPr sz="1300" b="1" i="0">
+                <a:solidFill>
+                  <a:srgbClr val="F5EFE3"/>
+                </a:solidFill>
+                <a:latin typeface="JetBrains Mono"/>
+                <a:ea typeface="JetBrains Mono"/>
+                <a:cs typeface="JetBrains Mono"/>
+              </a:rPr>
+              <a:t>19,49 €</a:t>
+            </a:r>
+          </a:p>
+        </p:txBody>
+      </p:sp>
+      <p:sp>
+        <p:nvSpPr>
+          <p:cNvPr id="86" name="Rectangle 85"/>
+          <p:cNvSpPr/>
+          <p:nvPr/>
+        </p:nvSpPr>
+        <p:spPr>
+          <a:xfrm>
+            <a:off x="5391150" y="4229100"/>
+            <a:ext cx="1962150" cy="314325"/>
+          </a:xfrm>
+          <a:prstGeom prst="rect">
+            <a:avLst/>
+          </a:prstGeom>
+          <a:solidFill>
+            <a:srgbClr val="DDE3D5"/>
+          </a:solidFill>
+          <a:ln>
+            <a:noFill/>
+          </a:ln>
+        </p:spPr>
+        <p:txBody>
+          <a:bodyPr rtlCol="0" anchor="ctr"/>
+          <a:lstStyle/>
+          <a:p>
+            <a:endParaRPr/>
+          </a:p>
+        </p:txBody>
+      </p:sp>
+      <p:cxnSp>
+        <p:nvCxnSpPr>
+          <p:cNvPr id="87" name="Connector 86"/>
+          <p:cNvCxnSpPr/>
+          <p:nvPr/>
+        </p:nvCxnSpPr>
+        <p:spPr>
+          <a:xfrm>
+            <a:off x="5391150" y="4533900"/>
+            <a:ext cx="1962150" cy="0"/>
+          </a:xfrm>
+          <a:prstGeom prst="line">
+            <a:avLst/>
+          </a:prstGeom>
+          <a:ln w="19050">
+            <a:solidFill>
+              <a:srgbClr val="5E8C6A"/>
+            </a:solidFill>
+          </a:ln>
+        </p:spPr>
+      </p:cxnSp>
+      <p:sp>
+        <p:nvSpPr>
+          <p:cNvPr id="88" name="TextBox 87"/>
+          <p:cNvSpPr txBox="1"/>
+          <p:nvPr/>
+        </p:nvSpPr>
+        <p:spPr>
+          <a:xfrm>
+            <a:off x="5486400" y="4286250"/>
+            <a:ext cx="1141381" cy="190500"/>
+          </a:xfrm>
+          <a:prstGeom prst="rect">
+            <a:avLst/>
+          </a:prstGeom>
+          <a:noFill/>
+        </p:spPr>
+        <p:txBody>
+          <a:bodyPr wrap="none" lIns="0" tIns="0" rIns="0" bIns="0" anchor="t">
+            <a:noAutofit/>
+          </a:bodyPr>
+          <a:lstStyle/>
+          <a:p>
+            <a:pPr algn="l">
+              <a:lnSpc>
+                <a:spcPts val="1500"/>
+              </a:lnSpc>
+              <a:spcBef>
+                <a:spcPts val="0"/>
+              </a:spcBef>
+              <a:spcAft>
+                <a:spcPts val="0"/>
+              </a:spcAft>
+            </a:pPr>
+            <a:r>
+              <a:rPr sz="1200" b="0" i="0">
+                <a:solidFill>
+                  <a:srgbClr val="1C2433"/>
+                </a:solidFill>
+                <a:latin typeface="Inter SemiBold"/>
+                <a:ea typeface="Inter SemiBold"/>
+                <a:cs typeface="Inter SemiBold"/>
+              </a:rPr>
+              <a:t>Margen a 59 €</a:t>
+            </a:r>
+          </a:p>
+        </p:txBody>
+      </p:sp>
+      <p:sp>
+        <p:nvSpPr>
+          <p:cNvPr id="89" name="Rectangle 88"/>
+          <p:cNvSpPr/>
+          <p:nvPr/>
+        </p:nvSpPr>
+        <p:spPr>
+          <a:xfrm>
+            <a:off x="7353300" y="4229100"/>
+            <a:ext cx="1409700" cy="314325"/>
+          </a:xfrm>
+          <a:prstGeom prst="rect">
+            <a:avLst/>
+          </a:prstGeom>
+          <a:solidFill>
+            <a:srgbClr val="DDE3D5"/>
+          </a:solidFill>
+          <a:ln>
+            <a:noFill/>
+          </a:ln>
+        </p:spPr>
+        <p:txBody>
+          <a:bodyPr rtlCol="0" anchor="ctr"/>
+          <a:lstStyle/>
+          <a:p>
+            <a:endParaRPr/>
+          </a:p>
+        </p:txBody>
+      </p:sp>
+      <p:cxnSp>
+        <p:nvCxnSpPr>
+          <p:cNvPr id="90" name="Connector 89"/>
+          <p:cNvCxnSpPr/>
+          <p:nvPr/>
+        </p:nvCxnSpPr>
+        <p:spPr>
+          <a:xfrm>
+            <a:off x="7353300" y="4533900"/>
+            <a:ext cx="1409700" cy="0"/>
+          </a:xfrm>
+          <a:prstGeom prst="line">
+            <a:avLst/>
+          </a:prstGeom>
+          <a:ln w="19050">
+            <a:solidFill>
+              <a:srgbClr val="5E8C6A"/>
+            </a:solidFill>
+          </a:ln>
+        </p:spPr>
+      </p:cxnSp>
+      <p:sp>
+        <p:nvSpPr>
+          <p:cNvPr id="91" name="TextBox 90"/>
+          <p:cNvSpPr txBox="1"/>
+          <p:nvPr/>
+        </p:nvSpPr>
+        <p:spPr>
+          <a:xfrm>
+            <a:off x="7438299" y="4276725"/>
+            <a:ext cx="1229451" cy="200025"/>
+          </a:xfrm>
+          <a:prstGeom prst="rect">
+            <a:avLst/>
+          </a:prstGeom>
+          <a:noFill/>
+        </p:spPr>
+        <p:txBody>
+          <a:bodyPr wrap="none" lIns="0" tIns="0" rIns="0" bIns="0" anchor="t">
+            <a:noAutofit/>
+          </a:bodyPr>
+          <a:lstStyle/>
+          <a:p>
+            <a:pPr algn="r">
+              <a:lnSpc>
+                <a:spcPts val="1500"/>
+              </a:lnSpc>
+              <a:spcBef>
+                <a:spcPts val="0"/>
+              </a:spcBef>
+              <a:spcAft>
+                <a:spcPts val="0"/>
+              </a:spcAft>
+            </a:pPr>
+            <a:r>
+              <a:rPr sz="1200" b="1" i="0">
+                <a:solidFill>
+                  <a:srgbClr val="1C2433"/>
+                </a:solidFill>
+                <a:latin typeface="JetBrains Mono"/>
+                <a:ea typeface="JetBrains Mono"/>
+                <a:cs typeface="JetBrains Mono"/>
+              </a:rPr>
+              <a:t>34,86 € </a:t>
+            </a:r>
+            <a:r>
+              <a:rPr sz="1050" b="0" i="0">
+                <a:solidFill>
+                  <a:srgbClr val="1C2433"/>
+                </a:solidFill>
+                <a:latin typeface="Inter"/>
+                <a:ea typeface="Inter"/>
+                <a:cs typeface="Inter"/>
+              </a:rPr>
+              <a:t>71,5 %</a:t>
+            </a:r>
+          </a:p>
+        </p:txBody>
+      </p:sp>
+      <p:sp>
+        <p:nvSpPr>
+          <p:cNvPr id="92" name="Rectangle 91"/>
+          <p:cNvSpPr/>
+          <p:nvPr/>
+        </p:nvSpPr>
+        <p:spPr>
+          <a:xfrm>
+            <a:off x="8763000" y="4229100"/>
+            <a:ext cx="1409700" cy="314325"/>
+          </a:xfrm>
+          <a:prstGeom prst="rect">
+            <a:avLst/>
+          </a:prstGeom>
+          <a:solidFill>
+            <a:srgbClr val="DDE3D5"/>
+          </a:solidFill>
+          <a:ln>
+            <a:noFill/>
+          </a:ln>
+        </p:spPr>
+        <p:txBody>
+          <a:bodyPr rtlCol="0" anchor="ctr"/>
+          <a:lstStyle/>
+          <a:p>
+            <a:endParaRPr/>
+          </a:p>
+        </p:txBody>
+      </p:sp>
+      <p:cxnSp>
+        <p:nvCxnSpPr>
+          <p:cNvPr id="93" name="Connector 92"/>
+          <p:cNvCxnSpPr/>
+          <p:nvPr/>
+        </p:nvCxnSpPr>
+        <p:spPr>
+          <a:xfrm>
+            <a:off x="8763000" y="4533900"/>
+            <a:ext cx="1409700" cy="0"/>
+          </a:xfrm>
+          <a:prstGeom prst="line">
+            <a:avLst/>
+          </a:prstGeom>
+          <a:ln w="19050">
+            <a:solidFill>
+              <a:srgbClr val="5E8C6A"/>
+            </a:solidFill>
+          </a:ln>
+        </p:spPr>
+      </p:cxnSp>
+      <p:sp>
+        <p:nvSpPr>
+          <p:cNvPr id="94" name="TextBox 93"/>
+          <p:cNvSpPr txBox="1"/>
+          <p:nvPr/>
+        </p:nvSpPr>
+        <p:spPr>
+          <a:xfrm>
+            <a:off x="8843820" y="4276725"/>
+            <a:ext cx="1233630" cy="200025"/>
+          </a:xfrm>
+          <a:prstGeom prst="rect">
+            <a:avLst/>
+          </a:prstGeom>
+          <a:noFill/>
+        </p:spPr>
+        <p:txBody>
+          <a:bodyPr wrap="none" lIns="0" tIns="0" rIns="0" bIns="0" anchor="t">
+            <a:noAutofit/>
+          </a:bodyPr>
+          <a:lstStyle/>
+          <a:p>
+            <a:pPr algn="r">
+              <a:lnSpc>
+                <a:spcPts val="1500"/>
+              </a:lnSpc>
+              <a:spcBef>
+                <a:spcPts val="0"/>
+              </a:spcBef>
+              <a:spcAft>
+                <a:spcPts val="0"/>
+              </a:spcAft>
+            </a:pPr>
+            <a:r>
+              <a:rPr sz="1200" b="1" i="0">
+                <a:solidFill>
+                  <a:srgbClr val="1C2433"/>
+                </a:solidFill>
+                <a:latin typeface="JetBrains Mono"/>
+                <a:ea typeface="JetBrains Mono"/>
+                <a:cs typeface="JetBrains Mono"/>
+              </a:rPr>
+              <a:t>34,72 € </a:t>
+            </a:r>
+            <a:r>
+              <a:rPr sz="1050" b="0" i="0">
+                <a:solidFill>
+                  <a:srgbClr val="1C2433"/>
+                </a:solidFill>
+                <a:latin typeface="Inter"/>
+                <a:ea typeface="Inter"/>
+                <a:cs typeface="Inter"/>
+              </a:rPr>
+              <a:t>71,2 %</a:t>
+            </a:r>
+          </a:p>
+        </p:txBody>
+      </p:sp>
+      <p:sp>
+        <p:nvSpPr>
+          <p:cNvPr id="95" name="Rectangle 94"/>
+          <p:cNvSpPr/>
+          <p:nvPr/>
+        </p:nvSpPr>
+        <p:spPr>
+          <a:xfrm>
+            <a:off x="10172700" y="4229100"/>
+            <a:ext cx="1409700" cy="314325"/>
+          </a:xfrm>
+          <a:prstGeom prst="rect">
+            <a:avLst/>
+          </a:prstGeom>
+          <a:solidFill>
+            <a:srgbClr val="DDE3D5"/>
+          </a:solidFill>
+          <a:ln>
+            <a:noFill/>
+          </a:ln>
+        </p:spPr>
+        <p:txBody>
+          <a:bodyPr rtlCol="0" anchor="ctr"/>
+          <a:lstStyle/>
+          <a:p>
+            <a:endParaRPr/>
+          </a:p>
+        </p:txBody>
+      </p:sp>
+      <p:cxnSp>
+        <p:nvCxnSpPr>
+          <p:cNvPr id="96" name="Connector 95"/>
+          <p:cNvCxnSpPr/>
+          <p:nvPr/>
+        </p:nvCxnSpPr>
+        <p:spPr>
+          <a:xfrm>
+            <a:off x="10172700" y="4533900"/>
+            <a:ext cx="1409700" cy="0"/>
+          </a:xfrm>
+          <a:prstGeom prst="line">
+            <a:avLst/>
+          </a:prstGeom>
+          <a:ln w="19050">
+            <a:solidFill>
+              <a:srgbClr val="5E8C6A"/>
+            </a:solidFill>
+          </a:ln>
+        </p:spPr>
+      </p:cxnSp>
+      <p:sp>
+        <p:nvSpPr>
+          <p:cNvPr id="97" name="TextBox 96"/>
+          <p:cNvSpPr txBox="1"/>
+          <p:nvPr/>
+        </p:nvSpPr>
+        <p:spPr>
+          <a:xfrm>
+            <a:off x="10339423" y="4276725"/>
+            <a:ext cx="1147727" cy="200025"/>
+          </a:xfrm>
+          <a:prstGeom prst="rect">
+            <a:avLst/>
+          </a:prstGeom>
+          <a:noFill/>
+        </p:spPr>
+        <p:txBody>
+          <a:bodyPr wrap="none" lIns="0" tIns="0" rIns="0" bIns="0" anchor="t">
+            <a:noAutofit/>
+          </a:bodyPr>
+          <a:lstStyle/>
+          <a:p>
+            <a:pPr algn="r">
+              <a:lnSpc>
+                <a:spcPts val="1500"/>
+              </a:lnSpc>
+              <a:spcBef>
+                <a:spcPts val="0"/>
+              </a:spcBef>
+              <a:spcAft>
+                <a:spcPts val="0"/>
+              </a:spcAft>
+            </a:pPr>
+            <a:r>
+              <a:rPr sz="1200" b="1" i="0">
+                <a:solidFill>
+                  <a:srgbClr val="1C2433"/>
+                </a:solidFill>
+                <a:latin typeface="JetBrains Mono"/>
+                <a:ea typeface="JetBrains Mono"/>
+                <a:cs typeface="JetBrains Mono"/>
+              </a:rPr>
+              <a:t>29,27 € </a:t>
+            </a:r>
+            <a:r>
+              <a:rPr sz="1050" b="0" i="0">
+                <a:solidFill>
+                  <a:srgbClr val="1C2433"/>
+                </a:solidFill>
+                <a:latin typeface="Inter"/>
+                <a:ea typeface="Inter"/>
+                <a:cs typeface="Inter"/>
+              </a:rPr>
+              <a:t>60 %</a:t>
+            </a:r>
+          </a:p>
+        </p:txBody>
+      </p:sp>
+      <p:sp>
+        <p:nvSpPr>
+          <p:cNvPr id="98" name="TextBox 97"/>
+          <p:cNvSpPr txBox="1"/>
+          <p:nvPr/>
+        </p:nvSpPr>
+        <p:spPr>
+          <a:xfrm>
+            <a:off x="609600" y="4876800"/>
+            <a:ext cx="3175361" cy="152400"/>
+          </a:xfrm>
+          <a:prstGeom prst="rect">
+            <a:avLst/>
+          </a:prstGeom>
+          <a:noFill/>
+        </p:spPr>
+        <p:txBody>
+          <a:bodyPr wrap="none" lIns="0" tIns="0" rIns="0" bIns="0" anchor="t">
+            <a:noAutofit/>
+          </a:bodyPr>
+          <a:lstStyle/>
+          <a:p>
+            <a:pPr algn="l">
+              <a:lnSpc>
+                <a:spcPts val="1200"/>
+              </a:lnSpc>
+              <a:spcBef>
+                <a:spcPts val="0"/>
+              </a:spcBef>
+              <a:spcAft>
+                <a:spcPts val="0"/>
+              </a:spcAft>
+            </a:pPr>
+            <a:r>
+              <a:rPr sz="1000" b="0" i="0" spc="136">
+                <a:solidFill>
+                  <a:srgbClr val="7D7869"/>
+                </a:solidFill>
+                <a:latin typeface="Inter SemiBold"/>
+                <a:ea typeface="Inter SemiBold"/>
+                <a:cs typeface="Inter SemiBold"/>
+              </a:rPr>
+              <a:t>DESARROLLO DE LA VERSIÓN 2 · 65 €/H</a:t>
+            </a:r>
+          </a:p>
+        </p:txBody>
+      </p:sp>
+      <p:sp>
+        <p:nvSpPr>
+          <p:cNvPr id="99" name="Rounded Rectangle 98"/>
+          <p:cNvSpPr/>
+          <p:nvPr/>
+        </p:nvSpPr>
+        <p:spPr>
+          <a:xfrm>
+            <a:off x="609600" y="5105400"/>
+            <a:ext cx="1032867" cy="285750"/>
+          </a:xfrm>
+          <a:prstGeom prst="roundRect">
+            <a:avLst>
+              <a:gd name="adj" fmla="val 23333"/>
+            </a:avLst>
+          </a:prstGeom>
+          <a:solidFill>
+            <a:srgbClr val="E8E3D8"/>
+          </a:solidFill>
+          <a:ln w="9525">
+            <a:solidFill>
+              <a:srgbClr val="D9D2C3"/>
+            </a:solidFill>
+          </a:ln>
+        </p:spPr>
+        <p:txBody>
+          <a:bodyPr rtlCol="0" anchor="ctr"/>
+          <a:lstStyle/>
+          <a:p>
+            <a:endParaRPr/>
+          </a:p>
+        </p:txBody>
+      </p:sp>
+      <p:sp>
+        <p:nvSpPr>
+          <p:cNvPr id="100" name="TextBox 99"/>
+          <p:cNvSpPr txBox="1"/>
+          <p:nvPr/>
+        </p:nvSpPr>
+        <p:spPr>
+          <a:xfrm>
+            <a:off x="714375" y="5153025"/>
+            <a:ext cx="894350" cy="180975"/>
+          </a:xfrm>
+          <a:prstGeom prst="rect">
+            <a:avLst/>
+          </a:prstGeom>
+          <a:noFill/>
+        </p:spPr>
+        <p:txBody>
+          <a:bodyPr wrap="none" lIns="0" tIns="0" rIns="0" bIns="0" anchor="t">
+            <a:noAutofit/>
+          </a:bodyPr>
+          <a:lstStyle/>
+          <a:p>
+            <a:pPr algn="l">
+              <a:lnSpc>
+                <a:spcPts val="1350"/>
+              </a:lnSpc>
+              <a:spcBef>
+                <a:spcPts val="0"/>
+              </a:spcBef>
+              <a:spcAft>
+                <a:spcPts val="0"/>
+              </a:spcAft>
+            </a:pPr>
+            <a:r>
+              <a:rPr sz="1100" b="0" i="0">
+                <a:solidFill>
+                  <a:srgbClr val="1C2433"/>
+                </a:solidFill>
+                <a:latin typeface="Inter Medium"/>
+                <a:ea typeface="Inter Medium"/>
+                <a:cs typeface="Inter Medium"/>
+              </a:rPr>
+              <a:t>Diseño </a:t>
+            </a:r>
+            <a:r>
+              <a:rPr sz="1100" b="0" i="0">
+                <a:solidFill>
+                  <a:srgbClr val="1C2433"/>
+                </a:solidFill>
+                <a:latin typeface="Inter SemiBold"/>
+                <a:ea typeface="Inter SemiBold"/>
+                <a:cs typeface="Inter SemiBold"/>
+              </a:rPr>
+              <a:t>40 h</a:t>
+            </a:r>
+          </a:p>
+        </p:txBody>
+      </p:sp>
+      <p:sp>
+        <p:nvSpPr>
+          <p:cNvPr id="101" name="Rounded Rectangle 100"/>
+          <p:cNvSpPr/>
+          <p:nvPr/>
+        </p:nvSpPr>
+        <p:spPr>
+          <a:xfrm>
+            <a:off x="1737717" y="5105400"/>
+            <a:ext cx="1256258" cy="285750"/>
+          </a:xfrm>
+          <a:prstGeom prst="roundRect">
+            <a:avLst>
+              <a:gd name="adj" fmla="val 23333"/>
+            </a:avLst>
+          </a:prstGeom>
+          <a:solidFill>
+            <a:srgbClr val="E8E3D8"/>
+          </a:solidFill>
+          <a:ln w="9525">
+            <a:solidFill>
+              <a:srgbClr val="D9D2C3"/>
+            </a:solidFill>
+          </a:ln>
+        </p:spPr>
+        <p:txBody>
+          <a:bodyPr rtlCol="0" anchor="ctr"/>
+          <a:lstStyle/>
+          <a:p>
+            <a:endParaRPr/>
+          </a:p>
+        </p:txBody>
+      </p:sp>
+      <p:sp>
+        <p:nvSpPr>
+          <p:cNvPr id="102" name="TextBox 101"/>
+          <p:cNvSpPr txBox="1"/>
+          <p:nvPr/>
+        </p:nvSpPr>
+        <p:spPr>
+          <a:xfrm>
+            <a:off x="1842492" y="5153025"/>
+            <a:ext cx="1126677" cy="180975"/>
+          </a:xfrm>
+          <a:prstGeom prst="rect">
+            <a:avLst/>
+          </a:prstGeom>
+          <a:noFill/>
+        </p:spPr>
+        <p:txBody>
+          <a:bodyPr wrap="none" lIns="0" tIns="0" rIns="0" bIns="0" anchor="t">
+            <a:noAutofit/>
+          </a:bodyPr>
+          <a:lstStyle/>
+          <a:p>
+            <a:pPr algn="l">
+              <a:lnSpc>
+                <a:spcPts val="1350"/>
+              </a:lnSpc>
+              <a:spcBef>
+                <a:spcPts val="0"/>
+              </a:spcBef>
+              <a:spcAft>
+                <a:spcPts val="0"/>
+              </a:spcAft>
+            </a:pPr>
+            <a:r>
+              <a:rPr sz="1100" b="0" i="0">
+                <a:solidFill>
+                  <a:srgbClr val="1C2433"/>
+                </a:solidFill>
+                <a:latin typeface="Inter Medium"/>
+                <a:ea typeface="Inter Medium"/>
+                <a:cs typeface="Inter Medium"/>
+              </a:rPr>
+              <a:t>Desarrollo </a:t>
+            </a:r>
+            <a:r>
+              <a:rPr sz="1100" b="0" i="0">
+                <a:solidFill>
+                  <a:srgbClr val="1C2433"/>
+                </a:solidFill>
+                <a:latin typeface="Inter SemiBold"/>
+                <a:ea typeface="Inter SemiBold"/>
+                <a:cs typeface="Inter SemiBold"/>
+              </a:rPr>
+              <a:t>90 h</a:t>
+            </a:r>
+          </a:p>
+        </p:txBody>
+      </p:sp>
+      <p:sp>
+        <p:nvSpPr>
+          <p:cNvPr id="103" name="Rounded Rectangle 102"/>
+          <p:cNvSpPr/>
+          <p:nvPr/>
+        </p:nvSpPr>
+        <p:spPr>
+          <a:xfrm>
+            <a:off x="3089225" y="5105400"/>
+            <a:ext cx="1263848" cy="285750"/>
+          </a:xfrm>
+          <a:prstGeom prst="roundRect">
+            <a:avLst>
+              <a:gd name="adj" fmla="val 23333"/>
+            </a:avLst>
+          </a:prstGeom>
+          <a:solidFill>
+            <a:srgbClr val="E8E3D8"/>
+          </a:solidFill>
+          <a:ln w="9525">
+            <a:solidFill>
+              <a:srgbClr val="D9D2C3"/>
+            </a:solidFill>
+          </a:ln>
+        </p:spPr>
+        <p:txBody>
+          <a:bodyPr rtlCol="0" anchor="ctr"/>
+          <a:lstStyle/>
+          <a:p>
+            <a:endParaRPr/>
+          </a:p>
+        </p:txBody>
+      </p:sp>
+      <p:sp>
+        <p:nvSpPr>
+          <p:cNvPr id="104" name="TextBox 103"/>
+          <p:cNvSpPr txBox="1"/>
+          <p:nvPr/>
+        </p:nvSpPr>
+        <p:spPr>
+          <a:xfrm>
+            <a:off x="3194000" y="5153025"/>
+            <a:ext cx="1134570" cy="180975"/>
+          </a:xfrm>
+          <a:prstGeom prst="rect">
+            <a:avLst/>
+          </a:prstGeom>
+          <a:noFill/>
+        </p:spPr>
+        <p:txBody>
+          <a:bodyPr wrap="none" lIns="0" tIns="0" rIns="0" bIns="0" anchor="t">
+            <a:noAutofit/>
+          </a:bodyPr>
+          <a:lstStyle/>
+          <a:p>
+            <a:pPr algn="l">
+              <a:lnSpc>
+                <a:spcPts val="1350"/>
+              </a:lnSpc>
+              <a:spcBef>
+                <a:spcPts val="0"/>
+              </a:spcBef>
+              <a:spcAft>
+                <a:spcPts val="0"/>
+              </a:spcAft>
+            </a:pPr>
+            <a:r>
+              <a:rPr sz="1100" b="0" i="0">
+                <a:solidFill>
+                  <a:srgbClr val="1C2433"/>
+                </a:solidFill>
+                <a:latin typeface="Inter Medium"/>
+                <a:ea typeface="Inter Medium"/>
+                <a:cs typeface="Inter Medium"/>
+              </a:rPr>
+              <a:t>Validación </a:t>
+            </a:r>
+            <a:r>
+              <a:rPr sz="1100" b="0" i="0">
+                <a:solidFill>
+                  <a:srgbClr val="1C2433"/>
+                </a:solidFill>
+                <a:latin typeface="Inter SemiBold"/>
+                <a:ea typeface="Inter SemiBold"/>
+                <a:cs typeface="Inter SemiBold"/>
+              </a:rPr>
+              <a:t>60 h</a:t>
+            </a:r>
+          </a:p>
+        </p:txBody>
+      </p:sp>
+      <p:sp>
+        <p:nvSpPr>
+          <p:cNvPr id="105" name="Rounded Rectangle 104"/>
+          <p:cNvSpPr/>
+          <p:nvPr/>
+        </p:nvSpPr>
+        <p:spPr>
+          <a:xfrm>
+            <a:off x="4448324" y="5105400"/>
+            <a:ext cx="1321296" cy="285750"/>
+          </a:xfrm>
+          <a:prstGeom prst="roundRect">
+            <a:avLst>
+              <a:gd name="adj" fmla="val 23333"/>
+            </a:avLst>
+          </a:prstGeom>
+          <a:solidFill>
+            <a:srgbClr val="E8E3D8"/>
+          </a:solidFill>
+          <a:ln w="9525">
+            <a:solidFill>
+              <a:srgbClr val="D9D2C3"/>
+            </a:solidFill>
+          </a:ln>
+        </p:spPr>
+        <p:txBody>
+          <a:bodyPr rtlCol="0" anchor="ctr"/>
+          <a:lstStyle/>
+          <a:p>
+            <a:endParaRPr/>
+          </a:p>
+        </p:txBody>
+      </p:sp>
+      <p:sp>
+        <p:nvSpPr>
+          <p:cNvPr id="106" name="TextBox 105"/>
+          <p:cNvSpPr txBox="1"/>
+          <p:nvPr/>
+        </p:nvSpPr>
+        <p:spPr>
+          <a:xfrm>
+            <a:off x="4553099" y="5153025"/>
+            <a:ext cx="1194316" cy="180975"/>
+          </a:xfrm>
+          <a:prstGeom prst="rect">
+            <a:avLst/>
+          </a:prstGeom>
+          <a:noFill/>
+        </p:spPr>
+        <p:txBody>
+          <a:bodyPr wrap="none" lIns="0" tIns="0" rIns="0" bIns="0" anchor="t">
+            <a:noAutofit/>
+          </a:bodyPr>
+          <a:lstStyle/>
+          <a:p>
+            <a:pPr algn="l">
+              <a:lnSpc>
+                <a:spcPts val="1350"/>
+              </a:lnSpc>
+              <a:spcBef>
+                <a:spcPts val="0"/>
+              </a:spcBef>
+              <a:spcAft>
+                <a:spcPts val="0"/>
+              </a:spcAft>
+            </a:pPr>
+            <a:r>
+              <a:rPr sz="1100" b="0" i="0">
+                <a:solidFill>
+                  <a:srgbClr val="1C2433"/>
+                </a:solidFill>
+                <a:latin typeface="Inter Medium"/>
+                <a:ea typeface="Inter Medium"/>
+                <a:cs typeface="Inter Medium"/>
+              </a:rPr>
+              <a:t>Despliegue </a:t>
+            </a:r>
+            <a:r>
+              <a:rPr sz="1100" b="0" i="0">
+                <a:solidFill>
+                  <a:srgbClr val="1C2433"/>
+                </a:solidFill>
+                <a:latin typeface="Inter SemiBold"/>
+                <a:ea typeface="Inter SemiBold"/>
+                <a:cs typeface="Inter SemiBold"/>
+              </a:rPr>
+              <a:t>20 h</a:t>
+            </a:r>
+          </a:p>
+        </p:txBody>
+      </p:sp>
+      <p:sp>
+        <p:nvSpPr>
+          <p:cNvPr id="107" name="TextBox 106"/>
+          <p:cNvSpPr txBox="1"/>
+          <p:nvPr/>
+        </p:nvSpPr>
+        <p:spPr>
+          <a:xfrm>
+            <a:off x="5864870" y="5153025"/>
+            <a:ext cx="4707696" cy="190500"/>
+          </a:xfrm>
+          <a:prstGeom prst="rect">
+            <a:avLst/>
+          </a:prstGeom>
+          <a:noFill/>
+        </p:spPr>
+        <p:txBody>
+          <a:bodyPr wrap="none" lIns="0" tIns="0" rIns="0" bIns="0" anchor="t">
+            <a:noAutofit/>
+          </a:bodyPr>
+          <a:lstStyle/>
+          <a:p>
+            <a:pPr algn="l">
+              <a:lnSpc>
+                <a:spcPts val="1500"/>
+              </a:lnSpc>
+              <a:spcBef>
+                <a:spcPts val="0"/>
+              </a:spcBef>
+              <a:spcAft>
+                <a:spcPts val="0"/>
+              </a:spcAft>
+            </a:pPr>
+            <a:r>
+              <a:rPr sz="1200" b="0" i="0">
+                <a:solidFill>
+                  <a:srgbClr val="1C2433"/>
+                </a:solidFill>
+                <a:latin typeface="Inter SemiBold"/>
+                <a:ea typeface="Inter SemiBold"/>
+                <a:cs typeface="Inter SemiBold"/>
+              </a:rPr>
+              <a:t>= </a:t>
+            </a:r>
+            <a:r>
+              <a:rPr sz="1200" b="1" i="0">
+                <a:solidFill>
+                  <a:srgbClr val="9A7A2E"/>
+                </a:solidFill>
+                <a:latin typeface="Inter"/>
+                <a:ea typeface="Inter"/>
+                <a:cs typeface="Inter"/>
+              </a:rPr>
+              <a:t>210 h · 13.650 €</a:t>
+            </a:r>
+            <a:r>
+              <a:rPr sz="1200" b="0" i="0">
+                <a:solidFill>
+                  <a:srgbClr val="1C2433"/>
+                </a:solidFill>
+                <a:latin typeface="Inter SemiBold"/>
+                <a:ea typeface="Inter SemiBold"/>
+                <a:cs typeface="Inter SemiBold"/>
+              </a:rPr>
+              <a:t>, más ≈300 € de ejecuciones de evaluación</a:t>
+            </a:r>
+          </a:p>
+        </p:txBody>
+      </p:sp>
+      <p:sp>
+        <p:nvSpPr>
+          <p:cNvPr id="108" name="TextBox 107"/>
+          <p:cNvSpPr txBox="1"/>
+          <p:nvPr/>
+        </p:nvSpPr>
+        <p:spPr>
+          <a:xfrm>
+            <a:off x="609600" y="5505450"/>
+            <a:ext cx="11048162" cy="504825"/>
+          </a:xfrm>
+          <a:prstGeom prst="rect">
+            <a:avLst/>
+          </a:prstGeom>
+          <a:noFill/>
+        </p:spPr>
+        <p:txBody>
+          <a:bodyPr wrap="square" lIns="0" tIns="0" rIns="0" bIns="0" anchor="t">
+            <a:noAutofit/>
+          </a:bodyPr>
+          <a:lstStyle/>
+          <a:p>
+            <a:pPr algn="l">
+              <a:lnSpc>
+                <a:spcPts val="1350"/>
+              </a:lnSpc>
+              <a:spcBef>
+                <a:spcPts val="0"/>
+              </a:spcBef>
+              <a:spcAft>
+                <a:spcPts val="0"/>
+              </a:spcAft>
+            </a:pPr>
+            <a:r>
+              <a:rPr sz="1050" b="0" i="0">
+                <a:solidFill>
+                  <a:srgbClr val="7D7869"/>
+                </a:solidFill>
+                <a:latin typeface="Inter"/>
+                <a:ea typeface="Inter"/>
+                <a:cs typeface="Inter"/>
+              </a:rPr>
+              <a:t>Precios oficiales por millón de tokens (entrada/salida): Haiku 4.5 1/5 $ · Sonnet 5 2/10 $ · Opus 5 5/25 $. Multiplicadores sobre el coste medido por fase (2,98 $ por novela de 10 capítulos): v2 A investigación ×3, trama ×3, escritura ×3, juez ×2; v2 B investigación ×5, trama ×9, escritura ×3, juez ×6 (Opus con ×1,2 por tokenizador). Estimación, no medición.</a:t>
             </a:r>
           </a:p>
         </p:txBody>
       </p:sp>
       <p:pic>
         <p:nvPicPr>
-          <p:cNvPr id="8" name="Picture 7" descr="r058.png"/>
+          <p:cNvPr id="109" name="Picture 108" descr="r003.png"/>
           <p:cNvPicPr>
             <a:picLocks noChangeAspect="1"/>
           </p:cNvPicPr>
@@ -47943,86 +51839,17 @@
         </p:blipFill>
         <p:spPr>
           <a:xfrm>
-            <a:off x="609600" y="1485900"/>
-            <a:ext cx="247650" cy="247650"/>
+            <a:off x="381000" y="6343650"/>
+            <a:ext cx="11430000" cy="76200"/>
           </a:xfrm>
           <a:prstGeom prst="rect">
             <a:avLst/>
           </a:prstGeom>
         </p:spPr>
       </p:pic>
-      <p:sp>
-        <p:nvSpPr>
-          <p:cNvPr id="9" name="TextBox 8"/>
-          <p:cNvSpPr txBox="1"/>
-          <p:nvPr/>
-        </p:nvSpPr>
-        <p:spPr>
-          <a:xfrm>
-            <a:off x="990600" y="1495425"/>
-            <a:ext cx="4877257" cy="409575"/>
-          </a:xfrm>
-          <a:prstGeom prst="rect">
-            <a:avLst/>
-          </a:prstGeom>
-          <a:noFill/>
-        </p:spPr>
-        <p:txBody>
-          <a:bodyPr wrap="square" lIns="0" tIns="0" rIns="0" bIns="0" anchor="t">
-            <a:noAutofit/>
-          </a:bodyPr>
-          <a:lstStyle/>
-          <a:p>
-            <a:pPr algn="l">
-              <a:lnSpc>
-                <a:spcPts val="1725"/>
-              </a:lnSpc>
-              <a:spcBef>
-                <a:spcPts val="0"/>
-              </a:spcBef>
-              <a:spcAft>
-                <a:spcPts val="0"/>
-              </a:spcAft>
-            </a:pPr>
-            <a:r>
-              <a:rPr sz="1300" b="0" i="0">
-                <a:solidFill>
-                  <a:srgbClr val="1C2433"/>
-                </a:solidFill>
-                <a:latin typeface="Inter"/>
-                <a:ea typeface="Inter"/>
-                <a:cs typeface="Inter"/>
-              </a:rPr>
-              <a:t>Hoy el modelo se usa a través de una sesión de Claude Code: producción necesita </a:t>
-            </a:r>
-            <a:r>
-              <a:rPr sz="1300" b="0" i="0">
-                <a:solidFill>
-                  <a:srgbClr val="1C2433"/>
-                </a:solidFill>
-                <a:latin typeface="Inter SemiBold"/>
-                <a:ea typeface="Inter SemiBold"/>
-                <a:cs typeface="Inter SemiBold"/>
-              </a:rPr>
-              <a:t>API propia</a:t>
-            </a:r>
-            <a:r>
-              <a:rPr sz="1300" b="0" i="0">
-                <a:solidFill>
-                  <a:srgbClr val="1C2433"/>
-                </a:solidFill>
-                <a:latin typeface="Inter"/>
-                <a:ea typeface="Inter"/>
-                <a:cs typeface="Inter"/>
-              </a:rPr>
-              <a:t> con límites de throughput</a:t>
-            </a:r>
-          </a:p>
-        </p:txBody>
-      </p:sp>
       <p:pic>
         <p:nvPicPr>
-          <p:cNvPr id="10" name="Picture 9" descr="r059.png"/>
+          <p:cNvPr id="110" name="Picture 109" descr="r004.png"/>
           <p:cNvPicPr>
             <a:picLocks noChangeAspect="1"/>
           </p:cNvPicPr>
@@ -48036,8 +51863,8 @@
         </p:blipFill>
         <p:spPr>
           <a:xfrm>
-            <a:off x="609600" y="2057400"/>
-            <a:ext cx="247650" cy="247650"/>
+            <a:off x="381000" y="6505575"/>
+            <a:ext cx="171450" cy="190500"/>
           </a:xfrm>
           <a:prstGeom prst="rect">
             <a:avLst/>
@@ -48046,121 +51873,180 @@
       </p:pic>
       <p:sp>
         <p:nvSpPr>
-          <p:cNvPr id="11" name="TextBox 10"/>
-          <p:cNvSpPr txBox="1"/>
-          <p:nvPr/>
-        </p:nvSpPr>
-        <p:spPr>
-          <a:xfrm>
-            <a:off x="990600" y="2066925"/>
-            <a:ext cx="4877257" cy="409575"/>
-          </a:xfrm>
-          <a:prstGeom prst="rect">
-            <a:avLst/>
-          </a:prstGeom>
-          <a:noFill/>
-        </p:spPr>
-        <p:txBody>
-          <a:bodyPr wrap="square" lIns="0" tIns="0" rIns="0" bIns="0" anchor="t">
+          <p:cNvPr id="111" name="TextBox 110"/>
+          <p:cNvSpPr txBox="1"/>
+          <p:nvPr/>
+        </p:nvSpPr>
+        <p:spPr>
+          <a:xfrm>
+            <a:off x="628650" y="6504384"/>
+            <a:ext cx="666048" cy="180975"/>
+          </a:xfrm>
+          <a:prstGeom prst="rect">
+            <a:avLst/>
+          </a:prstGeom>
+          <a:noFill/>
+        </p:spPr>
+        <p:txBody>
+          <a:bodyPr wrap="none" lIns="0" tIns="0" rIns="0" bIns="0" anchor="t">
             <a:noAutofit/>
           </a:bodyPr>
           <a:lstStyle/>
           <a:p>
             <a:pPr algn="l">
               <a:lnSpc>
-                <a:spcPts val="1725"/>
-              </a:lnSpc>
-              <a:spcBef>
-                <a:spcPts val="0"/>
-              </a:spcBef>
-              <a:spcAft>
-                <a:spcPts val="0"/>
-              </a:spcAft>
-            </a:pPr>
-            <a:r>
-              <a:rPr sz="1300" b="0" i="0">
+                <a:spcPts val="1518"/>
+              </a:lnSpc>
+              <a:spcBef>
+                <a:spcPts val="0"/>
+              </a:spcBef>
+              <a:spcAft>
+                <a:spcPts val="0"/>
+              </a:spcAft>
+            </a:pPr>
+            <a:r>
+              <a:rPr sz="1100" b="0" i="0">
                 <a:solidFill>
                   <a:srgbClr val="1C2433"/>
+                </a:solidFill>
+                <a:latin typeface="Fraunces SemiBold"/>
+                <a:ea typeface="Fraunces SemiBold"/>
+                <a:cs typeface="Fraunces SemiBold"/>
+              </a:rPr>
+              <a:t>Qapítulo</a:t>
+            </a:r>
+          </a:p>
+        </p:txBody>
+      </p:sp>
+      <p:sp>
+        <p:nvSpPr>
+          <p:cNvPr id="112" name="TextBox 111"/>
+          <p:cNvSpPr txBox="1"/>
+          <p:nvPr/>
+        </p:nvSpPr>
+        <p:spPr>
+          <a:xfrm>
+            <a:off x="1308646" y="6517184"/>
+            <a:ext cx="1661136" cy="152400"/>
+          </a:xfrm>
+          <a:prstGeom prst="rect">
+            <a:avLst/>
+          </a:prstGeom>
+          <a:noFill/>
+        </p:spPr>
+        <p:txBody>
+          <a:bodyPr wrap="none" lIns="0" tIns="0" rIns="0" bIns="0" anchor="t">
+            <a:noAutofit/>
+          </a:bodyPr>
+          <a:lstStyle/>
+          <a:p>
+            <a:pPr algn="l">
+              <a:lnSpc>
+                <a:spcPts val="1316"/>
+              </a:lnSpc>
+              <a:spcBef>
+                <a:spcPts val="0"/>
+              </a:spcBef>
+              <a:spcAft>
+                <a:spcPts val="0"/>
+              </a:spcAft>
+            </a:pPr>
+            <a:r>
+              <a:rPr sz="1000" b="0" i="0">
+                <a:solidFill>
+                  <a:srgbClr val="7D7869"/>
                 </a:solidFill>
                 <a:latin typeface="Inter"/>
                 <a:ea typeface="Inter"/>
                 <a:cs typeface="Inter"/>
               </a:rPr>
-              <a:t>El juez y el writer son el mismo modelo: sesgo; se compensa con revisión humana y el tope de continuidad</a:t>
-            </a:r>
-          </a:p>
-        </p:txBody>
-      </p:sp>
-      <p:pic>
-        <p:nvPicPr>
-          <p:cNvPr id="12" name="Picture 11" descr="r058.png"/>
-          <p:cNvPicPr>
-            <a:picLocks noChangeAspect="1"/>
-          </p:cNvPicPr>
-          <p:nvPr/>
-        </p:nvPicPr>
-        <p:blipFill>
-          <a:blip r:embed="rId3"/>
-          <a:stretch>
-            <a:fillRect/>
-          </a:stretch>
-        </p:blipFill>
-        <p:spPr>
-          <a:xfrm>
-            <a:off x="609600" y="2628900"/>
-            <a:ext cx="247650" cy="247650"/>
-          </a:xfrm>
-          <a:prstGeom prst="rect">
-            <a:avLst/>
-          </a:prstGeom>
-        </p:spPr>
-      </p:pic>
-      <p:sp>
-        <p:nvSpPr>
-          <p:cNvPr id="13" name="TextBox 12"/>
-          <p:cNvSpPr txBox="1"/>
-          <p:nvPr/>
-        </p:nvSpPr>
-        <p:spPr>
-          <a:xfrm>
-            <a:off x="990600" y="2638425"/>
-            <a:ext cx="4877257" cy="419100"/>
-          </a:xfrm>
-          <a:prstGeom prst="rect">
-            <a:avLst/>
-          </a:prstGeom>
-          <a:noFill/>
-        </p:spPr>
-        <p:txBody>
-          <a:bodyPr wrap="square" lIns="0" tIns="0" rIns="0" bIns="0" anchor="t">
-            <a:noAutofit/>
-          </a:bodyPr>
-          <a:lstStyle/>
-          <a:p>
-            <a:pPr algn="l">
-              <a:lnSpc>
-                <a:spcPts val="1725"/>
-              </a:lnSpc>
-              <a:spcBef>
-                <a:spcPts val="0"/>
-              </a:spcBef>
-              <a:spcAft>
-                <a:spcPts val="0"/>
-              </a:spcAft>
-            </a:pPr>
-            <a:r>
-              <a:rPr sz="1300" b="0" i="0">
-                <a:solidFill>
-                  <a:srgbClr val="1C2433"/>
+              <a:t>· una iniciativa de Qaracter</a:t>
+            </a:r>
+          </a:p>
+        </p:txBody>
+      </p:sp>
+      <p:sp>
+        <p:nvSpPr>
+          <p:cNvPr id="113" name="TextBox 112"/>
+          <p:cNvSpPr txBox="1"/>
+          <p:nvPr/>
+        </p:nvSpPr>
+        <p:spPr>
+          <a:xfrm>
+            <a:off x="5183841" y="6517184"/>
+            <a:ext cx="3752386" cy="152400"/>
+          </a:xfrm>
+          <a:prstGeom prst="rect">
+            <a:avLst/>
+          </a:prstGeom>
+          <a:noFill/>
+        </p:spPr>
+        <p:txBody>
+          <a:bodyPr wrap="none" lIns="0" tIns="0" rIns="0" bIns="0" anchor="t">
+            <a:noAutofit/>
+          </a:bodyPr>
+          <a:lstStyle/>
+          <a:p>
+            <a:pPr algn="ctr">
+              <a:lnSpc>
+                <a:spcPts val="1316"/>
+              </a:lnSpc>
+              <a:spcBef>
+                <a:spcPts val="0"/>
+              </a:spcBef>
+              <a:spcAft>
+                <a:spcPts val="0"/>
+              </a:spcAft>
+            </a:pPr>
+            <a:r>
+              <a:rPr sz="1000" b="0" i="0">
+                <a:solidFill>
+                  <a:srgbClr val="7D7869"/>
                 </a:solidFill>
                 <a:latin typeface="Inter"/>
                 <a:ea typeface="Inter"/>
                 <a:cs typeface="Inter"/>
               </a:rPr>
-              <a:t>Sin el toolchain de Lean, la cronología se evalúa en Python: la instalación de producción debe llevar </a:t>
-            </a:r>
-            <a:r>
-              <a:rPr sz="1150" b="0" i="0">
+              <a:t>Novela Relicario · Propuesta técnico-comercial para Relicario</a:t>
+            </a:r>
+          </a:p>
+        </p:txBody>
+      </p:sp>
+      <p:sp>
+        <p:nvSpPr>
+          <p:cNvPr id="114" name="TextBox 113"/>
+          <p:cNvSpPr txBox="1"/>
+          <p:nvPr/>
+        </p:nvSpPr>
+        <p:spPr>
+          <a:xfrm>
+            <a:off x="11250811" y="6510784"/>
+            <a:ext cx="620697" cy="171450"/>
+          </a:xfrm>
+          <a:prstGeom prst="rect">
+            <a:avLst/>
+          </a:prstGeom>
+          <a:noFill/>
+        </p:spPr>
+        <p:txBody>
+          <a:bodyPr wrap="none" lIns="0" tIns="0" rIns="0" bIns="0" anchor="t">
+            <a:noAutofit/>
+          </a:bodyPr>
+          <a:lstStyle/>
+          <a:p>
+            <a:pPr algn="l">
+              <a:lnSpc>
+                <a:spcPts val="1417"/>
+              </a:lnSpc>
+              <a:spcBef>
+                <a:spcPts val="0"/>
+              </a:spcBef>
+              <a:spcAft>
+                <a:spcPts val="0"/>
+              </a:spcAft>
+            </a:pPr>
+            <a:r>
+              <a:rPr sz="1050" b="0" i="0">
                 <a:solidFill>
                   <a:srgbClr val="1C2433"/>
                 </a:solidFill>
@@ -48168,965 +52054,7 @@
                 <a:ea typeface="JetBrains Mono Medium"/>
                 <a:cs typeface="JetBrains Mono Medium"/>
               </a:rPr>
-              <a:t>lake</a:t>
-            </a:r>
-          </a:p>
-        </p:txBody>
-      </p:sp>
-      <p:pic>
-        <p:nvPicPr>
-          <p:cNvPr id="14" name="Picture 13" descr="r058.png"/>
-          <p:cNvPicPr>
-            <a:picLocks noChangeAspect="1"/>
-          </p:cNvPicPr>
-          <p:nvPr/>
-        </p:nvPicPr>
-        <p:blipFill>
-          <a:blip r:embed="rId3"/>
-          <a:stretch>
-            <a:fillRect/>
-          </a:stretch>
-        </p:blipFill>
-        <p:spPr>
-          <a:xfrm>
-            <a:off x="609600" y="3200400"/>
-            <a:ext cx="247650" cy="247650"/>
-          </a:xfrm>
-          <a:prstGeom prst="rect">
-            <a:avLst/>
-          </a:prstGeom>
-        </p:spPr>
-      </p:pic>
-      <p:sp>
-        <p:nvSpPr>
-          <p:cNvPr id="15" name="TextBox 14"/>
-          <p:cNvSpPr txBox="1"/>
-          <p:nvPr/>
-        </p:nvSpPr>
-        <p:spPr>
-          <a:xfrm>
-            <a:off x="990600" y="3209925"/>
-            <a:ext cx="4877257" cy="409575"/>
-          </a:xfrm>
-          <a:prstGeom prst="rect">
-            <a:avLst/>
-          </a:prstGeom>
-          <a:noFill/>
-        </p:spPr>
-        <p:txBody>
-          <a:bodyPr wrap="square" lIns="0" tIns="0" rIns="0" bIns="0" anchor="t">
-            <a:noAutofit/>
-          </a:bodyPr>
-          <a:lstStyle/>
-          <a:p>
-            <a:pPr algn="l">
-              <a:lnSpc>
-                <a:spcPts val="1725"/>
-              </a:lnSpc>
-              <a:spcBef>
-                <a:spcPts val="0"/>
-              </a:spcBef>
-              <a:spcAft>
-                <a:spcPts val="0"/>
-              </a:spcAft>
-            </a:pPr>
-            <a:r>
-              <a:rPr sz="1300" b="0" i="0">
-                <a:solidFill>
-                  <a:srgbClr val="1C2433"/>
-                </a:solidFill>
-                <a:latin typeface="Inter"/>
-                <a:ea typeface="Inter"/>
-                <a:cs typeface="Inter"/>
-              </a:rPr>
-              <a:t>El coste de tokens es una estimación en cliente del SDK, no una factura</a:t>
-            </a:r>
-          </a:p>
-        </p:txBody>
-      </p:sp>
-      <p:pic>
-        <p:nvPicPr>
-          <p:cNvPr id="16" name="Picture 15" descr="r058.png"/>
-          <p:cNvPicPr>
-            <a:picLocks noChangeAspect="1"/>
-          </p:cNvPicPr>
-          <p:nvPr/>
-        </p:nvPicPr>
-        <p:blipFill>
-          <a:blip r:embed="rId3"/>
-          <a:stretch>
-            <a:fillRect/>
-          </a:stretch>
-        </p:blipFill>
-        <p:spPr>
-          <a:xfrm>
-            <a:off x="609600" y="3771900"/>
-            <a:ext cx="247650" cy="247650"/>
-          </a:xfrm>
-          <a:prstGeom prst="rect">
-            <a:avLst/>
-          </a:prstGeom>
-        </p:spPr>
-      </p:pic>
-      <p:sp>
-        <p:nvSpPr>
-          <p:cNvPr id="17" name="TextBox 16"/>
-          <p:cNvSpPr txBox="1"/>
-          <p:nvPr/>
-        </p:nvSpPr>
-        <p:spPr>
-          <a:xfrm>
-            <a:off x="990600" y="3781425"/>
-            <a:ext cx="4877257" cy="409575"/>
-          </a:xfrm>
-          <a:prstGeom prst="rect">
-            <a:avLst/>
-          </a:prstGeom>
-          <a:noFill/>
-        </p:spPr>
-        <p:txBody>
-          <a:bodyPr wrap="square" lIns="0" tIns="0" rIns="0" bIns="0" anchor="t">
-            <a:noAutofit/>
-          </a:bodyPr>
-          <a:lstStyle/>
-          <a:p>
-            <a:pPr algn="l">
-              <a:lnSpc>
-                <a:spcPts val="1725"/>
-              </a:lnSpc>
-              <a:spcBef>
-                <a:spcPts val="0"/>
-              </a:spcBef>
-              <a:spcAft>
-                <a:spcPts val="0"/>
-              </a:spcAft>
-            </a:pPr>
-            <a:r>
-              <a:rPr sz="1300" b="0" i="0">
-                <a:solidFill>
-                  <a:srgbClr val="1C2433"/>
-                </a:solidFill>
-                <a:latin typeface="Inter"/>
-                <a:ea typeface="Inter"/>
-                <a:cs typeface="Inter"/>
-              </a:rPr>
-              <a:t>Las fechas vitales de los personajes históricos que no están en el corpus </a:t>
-            </a:r>
-            <a:r>
-              <a:rPr sz="1300" b="0" i="0">
-                <a:solidFill>
-                  <a:srgbClr val="1C2433"/>
-                </a:solidFill>
-                <a:latin typeface="Inter SemiBold"/>
-                <a:ea typeface="Inter SemiBold"/>
-                <a:cs typeface="Inter SemiBold"/>
-              </a:rPr>
-              <a:t>las pone el arquitecto sin fuente</a:t>
-            </a:r>
-            <a:r>
-              <a:rPr sz="1300" b="0" i="0">
-                <a:solidFill>
-                  <a:srgbClr val="1C2433"/>
-                </a:solidFill>
-                <a:latin typeface="Inter"/>
-                <a:ea typeface="Inter"/>
-                <a:cs typeface="Inter"/>
-              </a:rPr>
-              <a:t> (RT-09)</a:t>
-            </a:r>
-          </a:p>
-        </p:txBody>
-      </p:sp>
-      <p:sp>
-        <p:nvSpPr>
-          <p:cNvPr id="18" name="TextBox 17"/>
-          <p:cNvSpPr txBox="1"/>
-          <p:nvPr/>
-        </p:nvSpPr>
-        <p:spPr>
-          <a:xfrm>
-            <a:off x="6362700" y="1257300"/>
-            <a:ext cx="1559445" cy="152400"/>
-          </a:xfrm>
-          <a:prstGeom prst="rect">
-            <a:avLst/>
-          </a:prstGeom>
-          <a:noFill/>
-        </p:spPr>
-        <p:txBody>
-          <a:bodyPr wrap="none" lIns="0" tIns="0" rIns="0" bIns="0" anchor="t">
-            <a:noAutofit/>
-          </a:bodyPr>
-          <a:lstStyle/>
-          <a:p>
-            <a:pPr algn="l">
-              <a:lnSpc>
-                <a:spcPts val="1200"/>
-              </a:lnSpc>
-              <a:spcBef>
-                <a:spcPts val="0"/>
-              </a:spcBef>
-              <a:spcAft>
-                <a:spcPts val="0"/>
-              </a:spcAft>
-            </a:pPr>
-            <a:r>
-              <a:rPr sz="1000" b="0" i="0" spc="136">
-                <a:solidFill>
-                  <a:srgbClr val="7D7869"/>
-                </a:solidFill>
-                <a:latin typeface="Inter SemiBold"/>
-                <a:ea typeface="Inter SemiBold"/>
-                <a:cs typeface="Inter SemiBold"/>
-              </a:rPr>
-              <a:t>SIGUIENTES PASOS</a:t>
-            </a:r>
-          </a:p>
-        </p:txBody>
-      </p:sp>
-      <p:sp>
-        <p:nvSpPr>
-          <p:cNvPr id="19" name="TextBox 18"/>
-          <p:cNvSpPr txBox="1"/>
-          <p:nvPr/>
-        </p:nvSpPr>
-        <p:spPr>
-          <a:xfrm>
-            <a:off x="6362700" y="1447800"/>
-            <a:ext cx="168116" cy="323850"/>
-          </a:xfrm>
-          <a:prstGeom prst="rect">
-            <a:avLst/>
-          </a:prstGeom>
-          <a:noFill/>
-        </p:spPr>
-        <p:txBody>
-          <a:bodyPr wrap="none" lIns="0" tIns="0" rIns="0" bIns="0" anchor="t">
-            <a:noAutofit/>
-          </a:bodyPr>
-          <a:lstStyle/>
-          <a:p>
-            <a:pPr algn="l">
-              <a:lnSpc>
-                <a:spcPts val="1950"/>
-              </a:lnSpc>
-              <a:spcBef>
-                <a:spcPts val="0"/>
-              </a:spcBef>
-              <a:spcAft>
-                <a:spcPts val="0"/>
-              </a:spcAft>
-            </a:pPr>
-            <a:r>
-              <a:rPr sz="2100" b="0" i="0">
-                <a:solidFill>
-                  <a:srgbClr val="9A7A2E"/>
-                </a:solidFill>
-                <a:latin typeface="Fraunces SemiBold"/>
-                <a:ea typeface="Fraunces SemiBold"/>
-                <a:cs typeface="Fraunces SemiBold"/>
-              </a:rPr>
-              <a:t>1</a:t>
-            </a:r>
-          </a:p>
-        </p:txBody>
-      </p:sp>
-      <p:sp>
-        <p:nvSpPr>
-          <p:cNvPr id="20" name="TextBox 19"/>
-          <p:cNvSpPr txBox="1"/>
-          <p:nvPr/>
-        </p:nvSpPr>
-        <p:spPr>
-          <a:xfrm>
-            <a:off x="6743700" y="1495425"/>
-            <a:ext cx="4194441" cy="190500"/>
-          </a:xfrm>
-          <a:prstGeom prst="rect">
-            <a:avLst/>
-          </a:prstGeom>
-          <a:noFill/>
-        </p:spPr>
-        <p:txBody>
-          <a:bodyPr wrap="none" lIns="0" tIns="0" rIns="0" bIns="0" anchor="t">
-            <a:noAutofit/>
-          </a:bodyPr>
-          <a:lstStyle/>
-          <a:p>
-            <a:pPr algn="l">
-              <a:lnSpc>
-                <a:spcPts val="1725"/>
-              </a:lnSpc>
-              <a:spcBef>
-                <a:spcPts val="0"/>
-              </a:spcBef>
-              <a:spcAft>
-                <a:spcPts val="0"/>
-              </a:spcAft>
-            </a:pPr>
-            <a:r>
-              <a:rPr sz="1300" b="0" i="0">
-                <a:solidFill>
-                  <a:srgbClr val="1C2433"/>
-                </a:solidFill>
-                <a:latin typeface="Inter"/>
-                <a:ea typeface="Inter"/>
-                <a:cs typeface="Inter"/>
-              </a:rPr>
-              <a:t>Piloto con </a:t>
-            </a:r>
-            <a:r>
-              <a:rPr sz="1300" b="0" i="0">
-                <a:solidFill>
-                  <a:srgbClr val="1C2433"/>
-                </a:solidFill>
-                <a:latin typeface="Inter SemiBold"/>
-                <a:ea typeface="Inter SemiBold"/>
-                <a:cs typeface="Inter SemiBold"/>
-              </a:rPr>
-              <a:t>50 novelas reales</a:t>
-            </a:r>
-            <a:r>
-              <a:rPr sz="1300" b="0" i="0">
-                <a:solidFill>
-                  <a:srgbClr val="1C2433"/>
-                </a:solidFill>
-                <a:latin typeface="Inter"/>
-                <a:ea typeface="Inter"/>
-                <a:cs typeface="Inter"/>
-              </a:rPr>
-              <a:t> de clientes de Relicario</a:t>
-            </a:r>
-          </a:p>
-        </p:txBody>
-      </p:sp>
-      <p:sp>
-        <p:nvSpPr>
-          <p:cNvPr id="21" name="TextBox 20"/>
-          <p:cNvSpPr txBox="1"/>
-          <p:nvPr/>
-        </p:nvSpPr>
-        <p:spPr>
-          <a:xfrm>
-            <a:off x="6362700" y="1828800"/>
-            <a:ext cx="209598" cy="323850"/>
-          </a:xfrm>
-          <a:prstGeom prst="rect">
-            <a:avLst/>
-          </a:prstGeom>
-          <a:noFill/>
-        </p:spPr>
-        <p:txBody>
-          <a:bodyPr wrap="none" lIns="0" tIns="0" rIns="0" bIns="0" anchor="t">
-            <a:noAutofit/>
-          </a:bodyPr>
-          <a:lstStyle/>
-          <a:p>
-            <a:pPr algn="l">
-              <a:lnSpc>
-                <a:spcPts val="1950"/>
-              </a:lnSpc>
-              <a:spcBef>
-                <a:spcPts val="0"/>
-              </a:spcBef>
-              <a:spcAft>
-                <a:spcPts val="0"/>
-              </a:spcAft>
-            </a:pPr>
-            <a:r>
-              <a:rPr sz="2100" b="0" i="0">
-                <a:solidFill>
-                  <a:srgbClr val="9A7A2E"/>
-                </a:solidFill>
-                <a:latin typeface="Fraunces SemiBold"/>
-                <a:ea typeface="Fraunces SemiBold"/>
-                <a:cs typeface="Fraunces SemiBold"/>
-              </a:rPr>
-              <a:t>2</a:t>
-            </a:r>
-          </a:p>
-        </p:txBody>
-      </p:sp>
-      <p:sp>
-        <p:nvSpPr>
-          <p:cNvPr id="22" name="TextBox 21"/>
-          <p:cNvSpPr txBox="1"/>
-          <p:nvPr/>
-        </p:nvSpPr>
-        <p:spPr>
-          <a:xfrm>
-            <a:off x="6743700" y="1876425"/>
-            <a:ext cx="4877257" cy="628650"/>
-          </a:xfrm>
-          <a:prstGeom prst="rect">
-            <a:avLst/>
-          </a:prstGeom>
-          <a:noFill/>
-        </p:spPr>
-        <p:txBody>
-          <a:bodyPr wrap="square" lIns="0" tIns="0" rIns="0" bIns="0" anchor="t">
-            <a:noAutofit/>
-          </a:bodyPr>
-          <a:lstStyle/>
-          <a:p>
-            <a:pPr algn="l">
-              <a:lnSpc>
-                <a:spcPts val="1725"/>
-              </a:lnSpc>
-              <a:spcBef>
-                <a:spcPts val="0"/>
-              </a:spcBef>
-              <a:spcAft>
-                <a:spcPts val="0"/>
-              </a:spcAft>
-            </a:pPr>
-            <a:r>
-              <a:rPr sz="1300" b="0" i="0">
-                <a:solidFill>
-                  <a:srgbClr val="1C2433"/>
-                </a:solidFill>
-                <a:latin typeface="Inter"/>
-                <a:ea typeface="Inter"/>
-                <a:cs typeface="Inter"/>
-              </a:rPr>
-              <a:t>Fechas vitales de los personajes históricos </a:t>
-            </a:r>
-            <a:r>
-              <a:rPr sz="1300" b="0" i="0">
-                <a:solidFill>
-                  <a:srgbClr val="1C2433"/>
-                </a:solidFill>
-                <a:latin typeface="Inter SemiBold"/>
-                <a:ea typeface="Inter SemiBold"/>
-                <a:cs typeface="Inter SemiBold"/>
-              </a:rPr>
-              <a:t>solo desde el corpus sellado</a:t>
-            </a:r>
-            <a:r>
-              <a:rPr sz="1300" b="0" i="0">
-                <a:solidFill>
-                  <a:srgbClr val="1C2433"/>
-                </a:solidFill>
-                <a:latin typeface="Inter"/>
-                <a:ea typeface="Inter"/>
-                <a:cs typeface="Inter"/>
-              </a:rPr>
-              <a:t>: la mitigación determinista de RT-09 va primero, porque «determinista antes que modelo»</a:t>
-            </a:r>
-          </a:p>
-        </p:txBody>
-      </p:sp>
-      <p:sp>
-        <p:nvSpPr>
-          <p:cNvPr id="23" name="TextBox 22"/>
-          <p:cNvSpPr txBox="1"/>
-          <p:nvPr/>
-        </p:nvSpPr>
-        <p:spPr>
-          <a:xfrm>
-            <a:off x="6362700" y="2619375"/>
-            <a:ext cx="194893" cy="323850"/>
-          </a:xfrm>
-          <a:prstGeom prst="rect">
-            <a:avLst/>
-          </a:prstGeom>
-          <a:noFill/>
-        </p:spPr>
-        <p:txBody>
-          <a:bodyPr wrap="none" lIns="0" tIns="0" rIns="0" bIns="0" anchor="t">
-            <a:noAutofit/>
-          </a:bodyPr>
-          <a:lstStyle/>
-          <a:p>
-            <a:pPr algn="l">
-              <a:lnSpc>
-                <a:spcPts val="1950"/>
-              </a:lnSpc>
-              <a:spcBef>
-                <a:spcPts val="0"/>
-              </a:spcBef>
-              <a:spcAft>
-                <a:spcPts val="0"/>
-              </a:spcAft>
-            </a:pPr>
-            <a:r>
-              <a:rPr sz="2100" b="0" i="0">
-                <a:solidFill>
-                  <a:srgbClr val="9A7A2E"/>
-                </a:solidFill>
-                <a:latin typeface="Fraunces SemiBold"/>
-                <a:ea typeface="Fraunces SemiBold"/>
-                <a:cs typeface="Fraunces SemiBold"/>
-              </a:rPr>
-              <a:t>3</a:t>
-            </a:r>
-          </a:p>
-        </p:txBody>
-      </p:sp>
-      <p:sp>
-        <p:nvSpPr>
-          <p:cNvPr id="24" name="TextBox 23"/>
-          <p:cNvSpPr txBox="1"/>
-          <p:nvPr/>
-        </p:nvSpPr>
-        <p:spPr>
-          <a:xfrm>
-            <a:off x="6743700" y="2667000"/>
-            <a:ext cx="4877257" cy="1066800"/>
-          </a:xfrm>
-          <a:prstGeom prst="rect">
-            <a:avLst/>
-          </a:prstGeom>
-          <a:noFill/>
-        </p:spPr>
-        <p:txBody>
-          <a:bodyPr wrap="square" lIns="0" tIns="0" rIns="0" bIns="0" anchor="t">
-            <a:noAutofit/>
-          </a:bodyPr>
-          <a:lstStyle/>
-          <a:p>
-            <a:pPr algn="l">
-              <a:lnSpc>
-                <a:spcPts val="1725"/>
-              </a:lnSpc>
-              <a:spcBef>
-                <a:spcPts val="0"/>
-              </a:spcBef>
-              <a:spcAft>
-                <a:spcPts val="0"/>
-              </a:spcAft>
-            </a:pPr>
-            <a:r>
-              <a:rPr sz="1300" b="0" i="0">
-                <a:solidFill>
-                  <a:srgbClr val="1C2433"/>
-                </a:solidFill>
-                <a:latin typeface="Inter"/>
-                <a:ea typeface="Inter"/>
-                <a:cs typeface="Inter"/>
-              </a:rPr>
-              <a:t>Un </a:t>
-            </a:r>
-            <a:r>
-              <a:rPr sz="1300" b="0" i="0">
-                <a:solidFill>
-                  <a:srgbClr val="1C2433"/>
-                </a:solidFill>
-                <a:latin typeface="Inter SemiBold"/>
-                <a:ea typeface="Inter SemiBold"/>
-                <a:cs typeface="Inter SemiBold"/>
-              </a:rPr>
-              <a:t>revisor de canon y escaleta</a:t>
-            </a:r>
-            <a:r>
-              <a:rPr sz="1300" b="0" i="0">
-                <a:solidFill>
-                  <a:srgbClr val="1C2433"/>
-                </a:solidFill>
-                <a:latin typeface="Inter"/>
-                <a:ea typeface="Inter"/>
-                <a:cs typeface="Inter"/>
-              </a:rPr>
-              <a:t>, como nodo antes del gate de Plotting y no como herramienta, que mire trama, arcos y fechas; y el arquitecto y el juez en un modelo mayor. Opcional: una «edición premium» con precio aparte, a definir con Relicario, en vez de subir el precio base</a:t>
-            </a:r>
-          </a:p>
-        </p:txBody>
-      </p:sp>
-      <p:sp>
-        <p:nvSpPr>
-          <p:cNvPr id="25" name="TextBox 24"/>
-          <p:cNvSpPr txBox="1"/>
-          <p:nvPr/>
-        </p:nvSpPr>
-        <p:spPr>
-          <a:xfrm>
-            <a:off x="6362700" y="3848100"/>
-            <a:ext cx="212538" cy="323850"/>
-          </a:xfrm>
-          <a:prstGeom prst="rect">
-            <a:avLst/>
-          </a:prstGeom>
-          <a:noFill/>
-        </p:spPr>
-        <p:txBody>
-          <a:bodyPr wrap="none" lIns="0" tIns="0" rIns="0" bIns="0" anchor="t">
-            <a:noAutofit/>
-          </a:bodyPr>
-          <a:lstStyle/>
-          <a:p>
-            <a:pPr algn="l">
-              <a:lnSpc>
-                <a:spcPts val="1950"/>
-              </a:lnSpc>
-              <a:spcBef>
-                <a:spcPts val="0"/>
-              </a:spcBef>
-              <a:spcAft>
-                <a:spcPts val="0"/>
-              </a:spcAft>
-            </a:pPr>
-            <a:r>
-              <a:rPr sz="2100" b="0" i="0">
-                <a:solidFill>
-                  <a:srgbClr val="9A7A2E"/>
-                </a:solidFill>
-                <a:latin typeface="Fraunces SemiBold"/>
-                <a:ea typeface="Fraunces SemiBold"/>
-                <a:cs typeface="Fraunces SemiBold"/>
-              </a:rPr>
-              <a:t>4</a:t>
-            </a:r>
-          </a:p>
-        </p:txBody>
-      </p:sp>
-      <p:sp>
-        <p:nvSpPr>
-          <p:cNvPr id="26" name="TextBox 25"/>
-          <p:cNvSpPr txBox="1"/>
-          <p:nvPr/>
-        </p:nvSpPr>
-        <p:spPr>
-          <a:xfrm>
-            <a:off x="6743700" y="3895725"/>
-            <a:ext cx="2585645" cy="190500"/>
-          </a:xfrm>
-          <a:prstGeom prst="rect">
-            <a:avLst/>
-          </a:prstGeom>
-          <a:noFill/>
-        </p:spPr>
-        <p:txBody>
-          <a:bodyPr wrap="none" lIns="0" tIns="0" rIns="0" bIns="0" anchor="t">
-            <a:noAutofit/>
-          </a:bodyPr>
-          <a:lstStyle/>
-          <a:p>
-            <a:pPr algn="l">
-              <a:lnSpc>
-                <a:spcPts val="1725"/>
-              </a:lnSpc>
-              <a:spcBef>
-                <a:spcPts val="0"/>
-              </a:spcBef>
-              <a:spcAft>
-                <a:spcPts val="0"/>
-              </a:spcAft>
-            </a:pPr>
-            <a:r>
-              <a:rPr sz="1300" b="0" i="0">
-                <a:solidFill>
-                  <a:srgbClr val="1C2433"/>
-                </a:solidFill>
-                <a:latin typeface="Inter"/>
-                <a:ea typeface="Inter"/>
-                <a:cs typeface="Inter"/>
-              </a:rPr>
-              <a:t>Migrar a una </a:t>
-            </a:r>
-            <a:r>
-              <a:rPr sz="1300" b="0" i="0">
-                <a:solidFill>
-                  <a:srgbClr val="1C2433"/>
-                </a:solidFill>
-                <a:latin typeface="Inter SemiBold"/>
-                <a:ea typeface="Inter SemiBold"/>
-                <a:cs typeface="Inter SemiBold"/>
-              </a:rPr>
-              <a:t>API propia</a:t>
-            </a:r>
-            <a:r>
-              <a:rPr sz="1300" b="0" i="0">
-                <a:solidFill>
-                  <a:srgbClr val="1C2433"/>
-                </a:solidFill>
-                <a:latin typeface="Inter"/>
-                <a:ea typeface="Inter"/>
-                <a:cs typeface="Inter"/>
-              </a:rPr>
-              <a:t> (RT-08)</a:t>
-            </a:r>
-          </a:p>
-        </p:txBody>
-      </p:sp>
-      <p:sp>
-        <p:nvSpPr>
-          <p:cNvPr id="27" name="TextBox 26"/>
-          <p:cNvSpPr txBox="1"/>
-          <p:nvPr/>
-        </p:nvSpPr>
-        <p:spPr>
-          <a:xfrm>
-            <a:off x="609600" y="5372100"/>
-            <a:ext cx="6482108" cy="180975"/>
-          </a:xfrm>
-          <a:prstGeom prst="rect">
-            <a:avLst/>
-          </a:prstGeom>
-          <a:noFill/>
-        </p:spPr>
-        <p:txBody>
-          <a:bodyPr wrap="none" lIns="0" tIns="0" rIns="0" bIns="0" anchor="t">
-            <a:noAutofit/>
-          </a:bodyPr>
-          <a:lstStyle/>
-          <a:p>
-            <a:pPr algn="l">
-              <a:lnSpc>
-                <a:spcPts val="1425"/>
-              </a:lnSpc>
-              <a:spcBef>
-                <a:spcPts val="0"/>
-              </a:spcBef>
-              <a:spcAft>
-                <a:spcPts val="0"/>
-              </a:spcAft>
-            </a:pPr>
-            <a:r>
-              <a:rPr sz="1100" b="0" i="0">
-                <a:solidFill>
-                  <a:srgbClr val="7D7869"/>
-                </a:solidFill>
-                <a:latin typeface="Inter"/>
-                <a:ea typeface="Inter"/>
-                <a:cs typeface="Inter"/>
-              </a:rPr>
-              <a:t>Los tokens son ~20 % del coste unitario: aun triplicándolos, el margen se queda en el 57 %.</a:t>
-            </a:r>
-          </a:p>
-        </p:txBody>
-      </p:sp>
-      <p:pic>
-        <p:nvPicPr>
-          <p:cNvPr id="28" name="Picture 27" descr="r003.png"/>
-          <p:cNvPicPr>
-            <a:picLocks noChangeAspect="1"/>
-          </p:cNvPicPr>
-          <p:nvPr/>
-        </p:nvPicPr>
-        <p:blipFill>
-          <a:blip r:embed="rId5"/>
-          <a:stretch>
-            <a:fillRect/>
-          </a:stretch>
-        </p:blipFill>
-        <p:spPr>
-          <a:xfrm>
-            <a:off x="381000" y="6343650"/>
-            <a:ext cx="11430000" cy="76200"/>
-          </a:xfrm>
-          <a:prstGeom prst="rect">
-            <a:avLst/>
-          </a:prstGeom>
-        </p:spPr>
-      </p:pic>
-      <p:pic>
-        <p:nvPicPr>
-          <p:cNvPr id="29" name="Picture 28" descr="r004.png"/>
-          <p:cNvPicPr>
-            <a:picLocks noChangeAspect="1"/>
-          </p:cNvPicPr>
-          <p:nvPr/>
-        </p:nvPicPr>
-        <p:blipFill>
-          <a:blip r:embed="rId6"/>
-          <a:stretch>
-            <a:fillRect/>
-          </a:stretch>
-        </p:blipFill>
-        <p:spPr>
-          <a:xfrm>
-            <a:off x="381000" y="6505575"/>
-            <a:ext cx="171450" cy="190500"/>
-          </a:xfrm>
-          <a:prstGeom prst="rect">
-            <a:avLst/>
-          </a:prstGeom>
-        </p:spPr>
-      </p:pic>
-      <p:sp>
-        <p:nvSpPr>
-          <p:cNvPr id="30" name="TextBox 29"/>
-          <p:cNvSpPr txBox="1"/>
-          <p:nvPr/>
-        </p:nvSpPr>
-        <p:spPr>
-          <a:xfrm>
-            <a:off x="628650" y="6504384"/>
-            <a:ext cx="666048" cy="180975"/>
-          </a:xfrm>
-          <a:prstGeom prst="rect">
-            <a:avLst/>
-          </a:prstGeom>
-          <a:noFill/>
-        </p:spPr>
-        <p:txBody>
-          <a:bodyPr wrap="none" lIns="0" tIns="0" rIns="0" bIns="0" anchor="t">
-            <a:noAutofit/>
-          </a:bodyPr>
-          <a:lstStyle/>
-          <a:p>
-            <a:pPr algn="l">
-              <a:lnSpc>
-                <a:spcPts val="1518"/>
-              </a:lnSpc>
-              <a:spcBef>
-                <a:spcPts val="0"/>
-              </a:spcBef>
-              <a:spcAft>
-                <a:spcPts val="0"/>
-              </a:spcAft>
-            </a:pPr>
-            <a:r>
-              <a:rPr sz="1100" b="0" i="0">
-                <a:solidFill>
-                  <a:srgbClr val="1C2433"/>
-                </a:solidFill>
-                <a:latin typeface="Fraunces SemiBold"/>
-                <a:ea typeface="Fraunces SemiBold"/>
-                <a:cs typeface="Fraunces SemiBold"/>
-              </a:rPr>
-              <a:t>Qapítulo</a:t>
-            </a:r>
-          </a:p>
-        </p:txBody>
-      </p:sp>
-      <p:sp>
-        <p:nvSpPr>
-          <p:cNvPr id="31" name="TextBox 30"/>
-          <p:cNvSpPr txBox="1"/>
-          <p:nvPr/>
-        </p:nvSpPr>
-        <p:spPr>
-          <a:xfrm>
-            <a:off x="1308646" y="6517184"/>
-            <a:ext cx="1661136" cy="152400"/>
-          </a:xfrm>
-          <a:prstGeom prst="rect">
-            <a:avLst/>
-          </a:prstGeom>
-          <a:noFill/>
-        </p:spPr>
-        <p:txBody>
-          <a:bodyPr wrap="none" lIns="0" tIns="0" rIns="0" bIns="0" anchor="t">
-            <a:noAutofit/>
-          </a:bodyPr>
-          <a:lstStyle/>
-          <a:p>
-            <a:pPr algn="l">
-              <a:lnSpc>
-                <a:spcPts val="1316"/>
-              </a:lnSpc>
-              <a:spcBef>
-                <a:spcPts val="0"/>
-              </a:spcBef>
-              <a:spcAft>
-                <a:spcPts val="0"/>
-              </a:spcAft>
-            </a:pPr>
-            <a:r>
-              <a:rPr sz="1000" b="0" i="0">
-                <a:solidFill>
-                  <a:srgbClr val="7D7869"/>
-                </a:solidFill>
-                <a:latin typeface="Inter"/>
-                <a:ea typeface="Inter"/>
-                <a:cs typeface="Inter"/>
-              </a:rPr>
-              <a:t>· una iniciativa de Qaracter</a:t>
-            </a:r>
-          </a:p>
-        </p:txBody>
-      </p:sp>
-      <p:sp>
-        <p:nvSpPr>
-          <p:cNvPr id="32" name="TextBox 31"/>
-          <p:cNvSpPr txBox="1"/>
-          <p:nvPr/>
-        </p:nvSpPr>
-        <p:spPr>
-          <a:xfrm>
-            <a:off x="5183841" y="6517184"/>
-            <a:ext cx="3752386" cy="152400"/>
-          </a:xfrm>
-          <a:prstGeom prst="rect">
-            <a:avLst/>
-          </a:prstGeom>
-          <a:noFill/>
-        </p:spPr>
-        <p:txBody>
-          <a:bodyPr wrap="none" lIns="0" tIns="0" rIns="0" bIns="0" anchor="t">
-            <a:noAutofit/>
-          </a:bodyPr>
-          <a:lstStyle/>
-          <a:p>
-            <a:pPr algn="ctr">
-              <a:lnSpc>
-                <a:spcPts val="1316"/>
-              </a:lnSpc>
-              <a:spcBef>
-                <a:spcPts val="0"/>
-              </a:spcBef>
-              <a:spcAft>
-                <a:spcPts val="0"/>
-              </a:spcAft>
-            </a:pPr>
-            <a:r>
-              <a:rPr sz="1000" b="0" i="0">
-                <a:solidFill>
-                  <a:srgbClr val="7D7869"/>
-                </a:solidFill>
-                <a:latin typeface="Inter"/>
-                <a:ea typeface="Inter"/>
-                <a:cs typeface="Inter"/>
-              </a:rPr>
-              <a:t>Novela Relicario · Propuesta técnico-comercial para Relicario</a:t>
-            </a:r>
-          </a:p>
-        </p:txBody>
-      </p:sp>
-      <p:sp>
-        <p:nvSpPr>
-          <p:cNvPr id="33" name="TextBox 32"/>
-          <p:cNvSpPr txBox="1"/>
-          <p:nvPr/>
-        </p:nvSpPr>
-        <p:spPr>
-          <a:xfrm>
-            <a:off x="11250811" y="6510784"/>
-            <a:ext cx="620697" cy="171450"/>
-          </a:xfrm>
-          <a:prstGeom prst="rect">
-            <a:avLst/>
-          </a:prstGeom>
-          <a:noFill/>
-        </p:spPr>
-        <p:txBody>
-          <a:bodyPr wrap="none" lIns="0" tIns="0" rIns="0" bIns="0" anchor="t">
-            <a:noAutofit/>
-          </a:bodyPr>
-          <a:lstStyle/>
-          <a:p>
-            <a:pPr algn="l">
-              <a:lnSpc>
-                <a:spcPts val="1417"/>
-              </a:lnSpc>
-              <a:spcBef>
-                <a:spcPts val="0"/>
-              </a:spcBef>
-              <a:spcAft>
-                <a:spcPts val="0"/>
-              </a:spcAft>
-            </a:pPr>
-            <a:r>
-              <a:rPr sz="1050" b="0" i="0">
-                <a:solidFill>
-                  <a:srgbClr val="1C2433"/>
-                </a:solidFill>
-                <a:latin typeface="JetBrains Mono Medium"/>
-                <a:ea typeface="JetBrains Mono Medium"/>
-                <a:cs typeface="JetBrains Mono Medium"/>
-              </a:rPr>
-              <a:t>21 / 22</a:t>
+              <a:t>21 / 23</a:t>
             </a:r>
           </a:p>
         </p:txBody>
@@ -49140,6 +52068,1363 @@
 </file>
 
 <file path=ppt/slides/slide22.xml><?xml version="1.0" encoding="utf-8"?>
+<p:sld xmlns:a="http://schemas.openxmlformats.org/drawingml/2006/main" xmlns:r="http://schemas.openxmlformats.org/officeDocument/2006/relationships" xmlns:p="http://schemas.openxmlformats.org/presentationml/2006/main">
+  <p:cSld>
+    <p:bg>
+      <p:bgPr>
+        <a:solidFill>
+          <a:srgbClr val="F5EFE3"/>
+        </a:solidFill>
+        <a:effectLst/>
+      </p:bgPr>
+    </p:bg>
+    <p:spTree>
+      <p:nvGrpSpPr>
+        <p:cNvPr id="1" name=""/>
+        <p:cNvGrpSpPr/>
+        <p:nvPr/>
+      </p:nvGrpSpPr>
+      <p:grpSpPr>
+        <a:xfrm>
+          <a:off x="0" y="0"/>
+          <a:ext cx="0" cy="0"/>
+          <a:chOff x="0" y="0"/>
+          <a:chExt cx="0" cy="0"/>
+        </a:xfrm>
+      </p:grpSpPr>
+      <p:sp>
+        <p:nvSpPr>
+          <p:cNvPr id="2" name="TextBox 1"/>
+          <p:cNvSpPr txBox="1"/>
+          <p:nvPr/>
+        </p:nvSpPr>
+        <p:spPr>
+          <a:xfrm>
+            <a:off x="2140000" y="323850"/>
+            <a:ext cx="579215" cy="142875"/>
+          </a:xfrm>
+          <a:prstGeom prst="rect">
+            <a:avLst/>
+          </a:prstGeom>
+          <a:noFill/>
+        </p:spPr>
+        <p:txBody>
+          <a:bodyPr wrap="none" lIns="0" tIns="0" rIns="0" bIns="0" anchor="t">
+            <a:noAutofit/>
+          </a:bodyPr>
+          <a:lstStyle/>
+          <a:p>
+            <a:pPr algn="l">
+              <a:lnSpc>
+                <a:spcPts val="1200"/>
+              </a:lnSpc>
+              <a:spcBef>
+                <a:spcPts val="0"/>
+              </a:spcBef>
+              <a:spcAft>
+                <a:spcPts val="0"/>
+              </a:spcAft>
+            </a:pPr>
+            <a:r>
+              <a:rPr sz="950" b="0" i="0" spc="131">
+                <a:solidFill>
+                  <a:srgbClr val="7D7869"/>
+                </a:solidFill>
+                <a:latin typeface="Inter SemiBold"/>
+                <a:ea typeface="Inter SemiBold"/>
+                <a:cs typeface="Inter SemiBold"/>
+              </a:rPr>
+              <a:t>CIERRE</a:t>
+            </a:r>
+          </a:p>
+        </p:txBody>
+      </p:sp>
+      <p:sp>
+        <p:nvSpPr>
+          <p:cNvPr id="3" name="TextBox 2"/>
+          <p:cNvSpPr txBox="1"/>
+          <p:nvPr/>
+        </p:nvSpPr>
+        <p:spPr>
+          <a:xfrm>
+            <a:off x="609600" y="323850"/>
+            <a:ext cx="1114604" cy="142875"/>
+          </a:xfrm>
+          <a:prstGeom prst="rect">
+            <a:avLst/>
+          </a:prstGeom>
+          <a:noFill/>
+        </p:spPr>
+        <p:txBody>
+          <a:bodyPr wrap="none" lIns="0" tIns="0" rIns="0" bIns="0" anchor="t">
+            <a:noAutofit/>
+          </a:bodyPr>
+          <a:lstStyle/>
+          <a:p>
+            <a:pPr algn="l">
+              <a:lnSpc>
+                <a:spcPts val="1200"/>
+              </a:lnSpc>
+              <a:spcBef>
+                <a:spcPts val="0"/>
+              </a:spcBef>
+              <a:spcAft>
+                <a:spcPts val="0"/>
+              </a:spcAft>
+            </a:pPr>
+            <a:r>
+              <a:rPr sz="950" b="0" i="0" spc="131">
+                <a:solidFill>
+                  <a:srgbClr val="1C2433"/>
+                </a:solidFill>
+                <a:latin typeface="Inter SemiBold"/>
+                <a:ea typeface="Inter SemiBold"/>
+                <a:cs typeface="Inter SemiBold"/>
+              </a:rPr>
+              <a:t>CAPÍTULO VIII</a:t>
+            </a:r>
+          </a:p>
+        </p:txBody>
+      </p:sp>
+      <p:sp>
+        <p:nvSpPr>
+          <p:cNvPr id="4" name="Rectangle 3"/>
+          <p:cNvSpPr/>
+          <p:nvPr/>
+        </p:nvSpPr>
+        <p:spPr>
+          <a:xfrm>
+            <a:off x="1759000" y="395288"/>
+            <a:ext cx="266700" cy="9525"/>
+          </a:xfrm>
+          <a:prstGeom prst="rect">
+            <a:avLst/>
+          </a:prstGeom>
+          <a:noFill/>
+          <a:ln>
+            <a:noFill/>
+          </a:ln>
+        </p:spPr>
+        <p:txBody>
+          <a:bodyPr rtlCol="0" anchor="ctr"/>
+          <a:lstStyle/>
+          <a:p>
+            <a:endParaRPr/>
+          </a:p>
+        </p:txBody>
+      </p:sp>
+      <p:cxnSp>
+        <p:nvCxnSpPr>
+          <p:cNvPr id="5" name="Connector 4"/>
+          <p:cNvCxnSpPr/>
+          <p:nvPr/>
+        </p:nvCxnSpPr>
+        <p:spPr>
+          <a:xfrm>
+            <a:off x="1759000" y="400050"/>
+            <a:ext cx="266700" cy="0"/>
+          </a:xfrm>
+          <a:prstGeom prst="line">
+            <a:avLst/>
+          </a:prstGeom>
+          <a:ln w="9525">
+            <a:solidFill>
+              <a:srgbClr val="C9A34E"/>
+            </a:solidFill>
+          </a:ln>
+        </p:spPr>
+      </p:cxnSp>
+      <p:sp>
+        <p:nvSpPr>
+          <p:cNvPr id="6" name="TextBox 5"/>
+          <p:cNvSpPr txBox="1"/>
+          <p:nvPr/>
+        </p:nvSpPr>
+        <p:spPr>
+          <a:xfrm>
+            <a:off x="609600" y="561975"/>
+            <a:ext cx="9720441" cy="419100"/>
+          </a:xfrm>
+          <a:prstGeom prst="rect">
+            <a:avLst/>
+          </a:prstGeom>
+          <a:noFill/>
+        </p:spPr>
+        <p:txBody>
+          <a:bodyPr wrap="none" lIns="0" tIns="0" rIns="0" bIns="0" anchor="t">
+            <a:noAutofit/>
+          </a:bodyPr>
+          <a:lstStyle/>
+          <a:p>
+            <a:pPr algn="l">
+              <a:lnSpc>
+                <a:spcPts val="3150"/>
+              </a:lnSpc>
+              <a:spcBef>
+                <a:spcPts val="0"/>
+              </a:spcBef>
+              <a:spcAft>
+                <a:spcPts val="0"/>
+              </a:spcAft>
+            </a:pPr>
+            <a:r>
+              <a:rPr sz="2700" b="0" i="0" spc="-27">
+                <a:solidFill>
+                  <a:srgbClr val="1C2433"/>
+                </a:solidFill>
+                <a:latin typeface="Fraunces SemiBold"/>
+                <a:ea typeface="Fraunces SemiBold"/>
+                <a:cs typeface="Fraunces SemiBold"/>
+              </a:rPr>
+              <a:t>Lo que queda por hacer antes de vender la primera novela</a:t>
+            </a:r>
+          </a:p>
+        </p:txBody>
+      </p:sp>
+      <p:sp>
+        <p:nvSpPr>
+          <p:cNvPr id="7" name="TextBox 6"/>
+          <p:cNvSpPr txBox="1"/>
+          <p:nvPr/>
+        </p:nvSpPr>
+        <p:spPr>
+          <a:xfrm>
+            <a:off x="609600" y="1257300"/>
+            <a:ext cx="725019" cy="152400"/>
+          </a:xfrm>
+          <a:prstGeom prst="rect">
+            <a:avLst/>
+          </a:prstGeom>
+          <a:noFill/>
+        </p:spPr>
+        <p:txBody>
+          <a:bodyPr wrap="none" lIns="0" tIns="0" rIns="0" bIns="0" anchor="t">
+            <a:noAutofit/>
+          </a:bodyPr>
+          <a:lstStyle/>
+          <a:p>
+            <a:pPr algn="l">
+              <a:lnSpc>
+                <a:spcPts val="1200"/>
+              </a:lnSpc>
+              <a:spcBef>
+                <a:spcPts val="0"/>
+              </a:spcBef>
+              <a:spcAft>
+                <a:spcPts val="0"/>
+              </a:spcAft>
+            </a:pPr>
+            <a:r>
+              <a:rPr sz="1000" b="0" i="0" spc="136">
+                <a:solidFill>
+                  <a:srgbClr val="B23A2B"/>
+                </a:solidFill>
+                <a:latin typeface="Inter SemiBold"/>
+                <a:ea typeface="Inter SemiBold"/>
+                <a:cs typeface="Inter SemiBold"/>
+              </a:rPr>
+              <a:t>RIESGOS</a:t>
+            </a:r>
+          </a:p>
+        </p:txBody>
+      </p:sp>
+      <p:pic>
+        <p:nvPicPr>
+          <p:cNvPr id="8" name="Picture 7" descr="r060.png"/>
+          <p:cNvPicPr>
+            <a:picLocks noChangeAspect="1"/>
+          </p:cNvPicPr>
+          <p:nvPr/>
+        </p:nvPicPr>
+        <p:blipFill>
+          <a:blip r:embed="rId3"/>
+          <a:stretch>
+            <a:fillRect/>
+          </a:stretch>
+        </p:blipFill>
+        <p:spPr>
+          <a:xfrm>
+            <a:off x="609600" y="1485900"/>
+            <a:ext cx="247650" cy="247650"/>
+          </a:xfrm>
+          <a:prstGeom prst="rect">
+            <a:avLst/>
+          </a:prstGeom>
+        </p:spPr>
+      </p:pic>
+      <p:sp>
+        <p:nvSpPr>
+          <p:cNvPr id="9" name="TextBox 8"/>
+          <p:cNvSpPr txBox="1"/>
+          <p:nvPr/>
+        </p:nvSpPr>
+        <p:spPr>
+          <a:xfrm>
+            <a:off x="990600" y="1495425"/>
+            <a:ext cx="4877257" cy="409575"/>
+          </a:xfrm>
+          <a:prstGeom prst="rect">
+            <a:avLst/>
+          </a:prstGeom>
+          <a:noFill/>
+        </p:spPr>
+        <p:txBody>
+          <a:bodyPr wrap="square" lIns="0" tIns="0" rIns="0" bIns="0" anchor="t">
+            <a:noAutofit/>
+          </a:bodyPr>
+          <a:lstStyle/>
+          <a:p>
+            <a:pPr algn="l">
+              <a:lnSpc>
+                <a:spcPts val="1725"/>
+              </a:lnSpc>
+              <a:spcBef>
+                <a:spcPts val="0"/>
+              </a:spcBef>
+              <a:spcAft>
+                <a:spcPts val="0"/>
+              </a:spcAft>
+            </a:pPr>
+            <a:r>
+              <a:rPr sz="1300" b="0" i="0">
+                <a:solidFill>
+                  <a:srgbClr val="1C2433"/>
+                </a:solidFill>
+                <a:latin typeface="Inter"/>
+                <a:ea typeface="Inter"/>
+                <a:cs typeface="Inter"/>
+              </a:rPr>
+              <a:t>Hoy el modelo se usa a través de una sesión de Claude Code: producción necesita </a:t>
+            </a:r>
+            <a:r>
+              <a:rPr sz="1300" b="0" i="0">
+                <a:solidFill>
+                  <a:srgbClr val="1C2433"/>
+                </a:solidFill>
+                <a:latin typeface="Inter SemiBold"/>
+                <a:ea typeface="Inter SemiBold"/>
+                <a:cs typeface="Inter SemiBold"/>
+              </a:rPr>
+              <a:t>API propia</a:t>
+            </a:r>
+            <a:r>
+              <a:rPr sz="1300" b="0" i="0">
+                <a:solidFill>
+                  <a:srgbClr val="1C2433"/>
+                </a:solidFill>
+                <a:latin typeface="Inter"/>
+                <a:ea typeface="Inter"/>
+                <a:cs typeface="Inter"/>
+              </a:rPr>
+              <a:t> con límites de throughput</a:t>
+            </a:r>
+          </a:p>
+        </p:txBody>
+      </p:sp>
+      <p:pic>
+        <p:nvPicPr>
+          <p:cNvPr id="10" name="Picture 9" descr="r060.png"/>
+          <p:cNvPicPr>
+            <a:picLocks noChangeAspect="1"/>
+          </p:cNvPicPr>
+          <p:nvPr/>
+        </p:nvPicPr>
+        <p:blipFill>
+          <a:blip r:embed="rId3"/>
+          <a:stretch>
+            <a:fillRect/>
+          </a:stretch>
+        </p:blipFill>
+        <p:spPr>
+          <a:xfrm>
+            <a:off x="609600" y="2057400"/>
+            <a:ext cx="247650" cy="247650"/>
+          </a:xfrm>
+          <a:prstGeom prst="rect">
+            <a:avLst/>
+          </a:prstGeom>
+        </p:spPr>
+      </p:pic>
+      <p:sp>
+        <p:nvSpPr>
+          <p:cNvPr id="11" name="TextBox 10"/>
+          <p:cNvSpPr txBox="1"/>
+          <p:nvPr/>
+        </p:nvSpPr>
+        <p:spPr>
+          <a:xfrm>
+            <a:off x="990600" y="2066925"/>
+            <a:ext cx="4877257" cy="409575"/>
+          </a:xfrm>
+          <a:prstGeom prst="rect">
+            <a:avLst/>
+          </a:prstGeom>
+          <a:noFill/>
+        </p:spPr>
+        <p:txBody>
+          <a:bodyPr wrap="square" lIns="0" tIns="0" rIns="0" bIns="0" anchor="t">
+            <a:noAutofit/>
+          </a:bodyPr>
+          <a:lstStyle/>
+          <a:p>
+            <a:pPr algn="l">
+              <a:lnSpc>
+                <a:spcPts val="1725"/>
+              </a:lnSpc>
+              <a:spcBef>
+                <a:spcPts val="0"/>
+              </a:spcBef>
+              <a:spcAft>
+                <a:spcPts val="0"/>
+              </a:spcAft>
+            </a:pPr>
+            <a:r>
+              <a:rPr sz="1300" b="0" i="0">
+                <a:solidFill>
+                  <a:srgbClr val="1C2433"/>
+                </a:solidFill>
+                <a:latin typeface="Inter"/>
+                <a:ea typeface="Inter"/>
+                <a:cs typeface="Inter"/>
+              </a:rPr>
+              <a:t>El juez y el writer son el mismo modelo: sesgo; se compensa con revisión humana y el tope de continuidad</a:t>
+            </a:r>
+          </a:p>
+        </p:txBody>
+      </p:sp>
+      <p:pic>
+        <p:nvPicPr>
+          <p:cNvPr id="12" name="Picture 11" descr="r060.png"/>
+          <p:cNvPicPr>
+            <a:picLocks noChangeAspect="1"/>
+          </p:cNvPicPr>
+          <p:nvPr/>
+        </p:nvPicPr>
+        <p:blipFill>
+          <a:blip r:embed="rId3"/>
+          <a:stretch>
+            <a:fillRect/>
+          </a:stretch>
+        </p:blipFill>
+        <p:spPr>
+          <a:xfrm>
+            <a:off x="609600" y="2628900"/>
+            <a:ext cx="247650" cy="247650"/>
+          </a:xfrm>
+          <a:prstGeom prst="rect">
+            <a:avLst/>
+          </a:prstGeom>
+        </p:spPr>
+      </p:pic>
+      <p:sp>
+        <p:nvSpPr>
+          <p:cNvPr id="13" name="TextBox 12"/>
+          <p:cNvSpPr txBox="1"/>
+          <p:nvPr/>
+        </p:nvSpPr>
+        <p:spPr>
+          <a:xfrm>
+            <a:off x="990600" y="2638425"/>
+            <a:ext cx="4877257" cy="419100"/>
+          </a:xfrm>
+          <a:prstGeom prst="rect">
+            <a:avLst/>
+          </a:prstGeom>
+          <a:noFill/>
+        </p:spPr>
+        <p:txBody>
+          <a:bodyPr wrap="square" lIns="0" tIns="0" rIns="0" bIns="0" anchor="t">
+            <a:noAutofit/>
+          </a:bodyPr>
+          <a:lstStyle/>
+          <a:p>
+            <a:pPr algn="l">
+              <a:lnSpc>
+                <a:spcPts val="1725"/>
+              </a:lnSpc>
+              <a:spcBef>
+                <a:spcPts val="0"/>
+              </a:spcBef>
+              <a:spcAft>
+                <a:spcPts val="0"/>
+              </a:spcAft>
+            </a:pPr>
+            <a:r>
+              <a:rPr sz="1300" b="0" i="0">
+                <a:solidFill>
+                  <a:srgbClr val="1C2433"/>
+                </a:solidFill>
+                <a:latin typeface="Inter"/>
+                <a:ea typeface="Inter"/>
+                <a:cs typeface="Inter"/>
+              </a:rPr>
+              <a:t>Sin el toolchain de Lean, la cronología se evalúa en Python: la instalación de producción debe llevar </a:t>
+            </a:r>
+            <a:r>
+              <a:rPr sz="1150" b="0" i="0">
+                <a:solidFill>
+                  <a:srgbClr val="1C2433"/>
+                </a:solidFill>
+                <a:latin typeface="JetBrains Mono Medium"/>
+                <a:ea typeface="JetBrains Mono Medium"/>
+                <a:cs typeface="JetBrains Mono Medium"/>
+              </a:rPr>
+              <a:t>lake</a:t>
+            </a:r>
+          </a:p>
+        </p:txBody>
+      </p:sp>
+      <p:pic>
+        <p:nvPicPr>
+          <p:cNvPr id="14" name="Picture 13" descr="r060.png"/>
+          <p:cNvPicPr>
+            <a:picLocks noChangeAspect="1"/>
+          </p:cNvPicPr>
+          <p:nvPr/>
+        </p:nvPicPr>
+        <p:blipFill>
+          <a:blip r:embed="rId3"/>
+          <a:stretch>
+            <a:fillRect/>
+          </a:stretch>
+        </p:blipFill>
+        <p:spPr>
+          <a:xfrm>
+            <a:off x="609600" y="3200400"/>
+            <a:ext cx="247650" cy="247650"/>
+          </a:xfrm>
+          <a:prstGeom prst="rect">
+            <a:avLst/>
+          </a:prstGeom>
+        </p:spPr>
+      </p:pic>
+      <p:sp>
+        <p:nvSpPr>
+          <p:cNvPr id="15" name="TextBox 14"/>
+          <p:cNvSpPr txBox="1"/>
+          <p:nvPr/>
+        </p:nvSpPr>
+        <p:spPr>
+          <a:xfrm>
+            <a:off x="990600" y="3209925"/>
+            <a:ext cx="4877257" cy="409575"/>
+          </a:xfrm>
+          <a:prstGeom prst="rect">
+            <a:avLst/>
+          </a:prstGeom>
+          <a:noFill/>
+        </p:spPr>
+        <p:txBody>
+          <a:bodyPr wrap="square" lIns="0" tIns="0" rIns="0" bIns="0" anchor="t">
+            <a:noAutofit/>
+          </a:bodyPr>
+          <a:lstStyle/>
+          <a:p>
+            <a:pPr algn="l">
+              <a:lnSpc>
+                <a:spcPts val="1725"/>
+              </a:lnSpc>
+              <a:spcBef>
+                <a:spcPts val="0"/>
+              </a:spcBef>
+              <a:spcAft>
+                <a:spcPts val="0"/>
+              </a:spcAft>
+            </a:pPr>
+            <a:r>
+              <a:rPr sz="1300" b="0" i="0">
+                <a:solidFill>
+                  <a:srgbClr val="1C2433"/>
+                </a:solidFill>
+                <a:latin typeface="Inter"/>
+                <a:ea typeface="Inter"/>
+                <a:cs typeface="Inter"/>
+              </a:rPr>
+              <a:t>El coste de tokens es una estimación en cliente del SDK, no una factura</a:t>
+            </a:r>
+          </a:p>
+        </p:txBody>
+      </p:sp>
+      <p:pic>
+        <p:nvPicPr>
+          <p:cNvPr id="16" name="Picture 15" descr="r060.png"/>
+          <p:cNvPicPr>
+            <a:picLocks noChangeAspect="1"/>
+          </p:cNvPicPr>
+          <p:nvPr/>
+        </p:nvPicPr>
+        <p:blipFill>
+          <a:blip r:embed="rId3"/>
+          <a:stretch>
+            <a:fillRect/>
+          </a:stretch>
+        </p:blipFill>
+        <p:spPr>
+          <a:xfrm>
+            <a:off x="609600" y="3771900"/>
+            <a:ext cx="247650" cy="247650"/>
+          </a:xfrm>
+          <a:prstGeom prst="rect">
+            <a:avLst/>
+          </a:prstGeom>
+        </p:spPr>
+      </p:pic>
+      <p:sp>
+        <p:nvSpPr>
+          <p:cNvPr id="17" name="TextBox 16"/>
+          <p:cNvSpPr txBox="1"/>
+          <p:nvPr/>
+        </p:nvSpPr>
+        <p:spPr>
+          <a:xfrm>
+            <a:off x="990600" y="3781425"/>
+            <a:ext cx="4877257" cy="409575"/>
+          </a:xfrm>
+          <a:prstGeom prst="rect">
+            <a:avLst/>
+          </a:prstGeom>
+          <a:noFill/>
+        </p:spPr>
+        <p:txBody>
+          <a:bodyPr wrap="square" lIns="0" tIns="0" rIns="0" bIns="0" anchor="t">
+            <a:noAutofit/>
+          </a:bodyPr>
+          <a:lstStyle/>
+          <a:p>
+            <a:pPr algn="l">
+              <a:lnSpc>
+                <a:spcPts val="1725"/>
+              </a:lnSpc>
+              <a:spcBef>
+                <a:spcPts val="0"/>
+              </a:spcBef>
+              <a:spcAft>
+                <a:spcPts val="0"/>
+              </a:spcAft>
+            </a:pPr>
+            <a:r>
+              <a:rPr sz="1300" b="0" i="0">
+                <a:solidFill>
+                  <a:srgbClr val="1C2433"/>
+                </a:solidFill>
+                <a:latin typeface="Inter"/>
+                <a:ea typeface="Inter"/>
+                <a:cs typeface="Inter"/>
+              </a:rPr>
+              <a:t>Las fechas vitales de los personajes históricos que no están en el corpus </a:t>
+            </a:r>
+            <a:r>
+              <a:rPr sz="1300" b="0" i="0">
+                <a:solidFill>
+                  <a:srgbClr val="1C2433"/>
+                </a:solidFill>
+                <a:latin typeface="Inter SemiBold"/>
+                <a:ea typeface="Inter SemiBold"/>
+                <a:cs typeface="Inter SemiBold"/>
+              </a:rPr>
+              <a:t>las pone el arquitecto sin fuente</a:t>
+            </a:r>
+            <a:r>
+              <a:rPr sz="1300" b="0" i="0">
+                <a:solidFill>
+                  <a:srgbClr val="1C2433"/>
+                </a:solidFill>
+                <a:latin typeface="Inter"/>
+                <a:ea typeface="Inter"/>
+                <a:cs typeface="Inter"/>
+              </a:rPr>
+              <a:t> (RT-09)</a:t>
+            </a:r>
+          </a:p>
+        </p:txBody>
+      </p:sp>
+      <p:sp>
+        <p:nvSpPr>
+          <p:cNvPr id="18" name="TextBox 17"/>
+          <p:cNvSpPr txBox="1"/>
+          <p:nvPr/>
+        </p:nvSpPr>
+        <p:spPr>
+          <a:xfrm>
+            <a:off x="6362700" y="1257300"/>
+            <a:ext cx="1559445" cy="152400"/>
+          </a:xfrm>
+          <a:prstGeom prst="rect">
+            <a:avLst/>
+          </a:prstGeom>
+          <a:noFill/>
+        </p:spPr>
+        <p:txBody>
+          <a:bodyPr wrap="none" lIns="0" tIns="0" rIns="0" bIns="0" anchor="t">
+            <a:noAutofit/>
+          </a:bodyPr>
+          <a:lstStyle/>
+          <a:p>
+            <a:pPr algn="l">
+              <a:lnSpc>
+                <a:spcPts val="1200"/>
+              </a:lnSpc>
+              <a:spcBef>
+                <a:spcPts val="0"/>
+              </a:spcBef>
+              <a:spcAft>
+                <a:spcPts val="0"/>
+              </a:spcAft>
+            </a:pPr>
+            <a:r>
+              <a:rPr sz="1000" b="0" i="0" spc="136">
+                <a:solidFill>
+                  <a:srgbClr val="7D7869"/>
+                </a:solidFill>
+                <a:latin typeface="Inter SemiBold"/>
+                <a:ea typeface="Inter SemiBold"/>
+                <a:cs typeface="Inter SemiBold"/>
+              </a:rPr>
+              <a:t>SIGUIENTES PASOS</a:t>
+            </a:r>
+          </a:p>
+        </p:txBody>
+      </p:sp>
+      <p:sp>
+        <p:nvSpPr>
+          <p:cNvPr id="19" name="TextBox 18"/>
+          <p:cNvSpPr txBox="1"/>
+          <p:nvPr/>
+        </p:nvSpPr>
+        <p:spPr>
+          <a:xfrm>
+            <a:off x="6362700" y="1447800"/>
+            <a:ext cx="168116" cy="323850"/>
+          </a:xfrm>
+          <a:prstGeom prst="rect">
+            <a:avLst/>
+          </a:prstGeom>
+          <a:noFill/>
+        </p:spPr>
+        <p:txBody>
+          <a:bodyPr wrap="none" lIns="0" tIns="0" rIns="0" bIns="0" anchor="t">
+            <a:noAutofit/>
+          </a:bodyPr>
+          <a:lstStyle/>
+          <a:p>
+            <a:pPr algn="l">
+              <a:lnSpc>
+                <a:spcPts val="1950"/>
+              </a:lnSpc>
+              <a:spcBef>
+                <a:spcPts val="0"/>
+              </a:spcBef>
+              <a:spcAft>
+                <a:spcPts val="0"/>
+              </a:spcAft>
+            </a:pPr>
+            <a:r>
+              <a:rPr sz="2100" b="0" i="0">
+                <a:solidFill>
+                  <a:srgbClr val="9A7A2E"/>
+                </a:solidFill>
+                <a:latin typeface="Fraunces SemiBold"/>
+                <a:ea typeface="Fraunces SemiBold"/>
+                <a:cs typeface="Fraunces SemiBold"/>
+              </a:rPr>
+              <a:t>1</a:t>
+            </a:r>
+          </a:p>
+        </p:txBody>
+      </p:sp>
+      <p:sp>
+        <p:nvSpPr>
+          <p:cNvPr id="20" name="TextBox 19"/>
+          <p:cNvSpPr txBox="1"/>
+          <p:nvPr/>
+        </p:nvSpPr>
+        <p:spPr>
+          <a:xfrm>
+            <a:off x="6743700" y="1495425"/>
+            <a:ext cx="4194441" cy="190500"/>
+          </a:xfrm>
+          <a:prstGeom prst="rect">
+            <a:avLst/>
+          </a:prstGeom>
+          <a:noFill/>
+        </p:spPr>
+        <p:txBody>
+          <a:bodyPr wrap="none" lIns="0" tIns="0" rIns="0" bIns="0" anchor="t">
+            <a:noAutofit/>
+          </a:bodyPr>
+          <a:lstStyle/>
+          <a:p>
+            <a:pPr algn="l">
+              <a:lnSpc>
+                <a:spcPts val="1725"/>
+              </a:lnSpc>
+              <a:spcBef>
+                <a:spcPts val="0"/>
+              </a:spcBef>
+              <a:spcAft>
+                <a:spcPts val="0"/>
+              </a:spcAft>
+            </a:pPr>
+            <a:r>
+              <a:rPr sz="1300" b="0" i="0">
+                <a:solidFill>
+                  <a:srgbClr val="1C2433"/>
+                </a:solidFill>
+                <a:latin typeface="Inter"/>
+                <a:ea typeface="Inter"/>
+                <a:cs typeface="Inter"/>
+              </a:rPr>
+              <a:t>Piloto con </a:t>
+            </a:r>
+            <a:r>
+              <a:rPr sz="1300" b="0" i="0">
+                <a:solidFill>
+                  <a:srgbClr val="1C2433"/>
+                </a:solidFill>
+                <a:latin typeface="Inter SemiBold"/>
+                <a:ea typeface="Inter SemiBold"/>
+                <a:cs typeface="Inter SemiBold"/>
+              </a:rPr>
+              <a:t>50 novelas reales</a:t>
+            </a:r>
+            <a:r>
+              <a:rPr sz="1300" b="0" i="0">
+                <a:solidFill>
+                  <a:srgbClr val="1C2433"/>
+                </a:solidFill>
+                <a:latin typeface="Inter"/>
+                <a:ea typeface="Inter"/>
+                <a:cs typeface="Inter"/>
+              </a:rPr>
+              <a:t> de clientes de Relicario</a:t>
+            </a:r>
+          </a:p>
+        </p:txBody>
+      </p:sp>
+      <p:sp>
+        <p:nvSpPr>
+          <p:cNvPr id="21" name="TextBox 20"/>
+          <p:cNvSpPr txBox="1"/>
+          <p:nvPr/>
+        </p:nvSpPr>
+        <p:spPr>
+          <a:xfrm>
+            <a:off x="6362700" y="1828800"/>
+            <a:ext cx="209598" cy="323850"/>
+          </a:xfrm>
+          <a:prstGeom prst="rect">
+            <a:avLst/>
+          </a:prstGeom>
+          <a:noFill/>
+        </p:spPr>
+        <p:txBody>
+          <a:bodyPr wrap="none" lIns="0" tIns="0" rIns="0" bIns="0" anchor="t">
+            <a:noAutofit/>
+          </a:bodyPr>
+          <a:lstStyle/>
+          <a:p>
+            <a:pPr algn="l">
+              <a:lnSpc>
+                <a:spcPts val="1950"/>
+              </a:lnSpc>
+              <a:spcBef>
+                <a:spcPts val="0"/>
+              </a:spcBef>
+              <a:spcAft>
+                <a:spcPts val="0"/>
+              </a:spcAft>
+            </a:pPr>
+            <a:r>
+              <a:rPr sz="2100" b="0" i="0">
+                <a:solidFill>
+                  <a:srgbClr val="9A7A2E"/>
+                </a:solidFill>
+                <a:latin typeface="Fraunces SemiBold"/>
+                <a:ea typeface="Fraunces SemiBold"/>
+                <a:cs typeface="Fraunces SemiBold"/>
+              </a:rPr>
+              <a:t>2</a:t>
+            </a:r>
+          </a:p>
+        </p:txBody>
+      </p:sp>
+      <p:sp>
+        <p:nvSpPr>
+          <p:cNvPr id="22" name="TextBox 21"/>
+          <p:cNvSpPr txBox="1"/>
+          <p:nvPr/>
+        </p:nvSpPr>
+        <p:spPr>
+          <a:xfrm>
+            <a:off x="6743700" y="1876425"/>
+            <a:ext cx="4877257" cy="628650"/>
+          </a:xfrm>
+          <a:prstGeom prst="rect">
+            <a:avLst/>
+          </a:prstGeom>
+          <a:noFill/>
+        </p:spPr>
+        <p:txBody>
+          <a:bodyPr wrap="square" lIns="0" tIns="0" rIns="0" bIns="0" anchor="t">
+            <a:noAutofit/>
+          </a:bodyPr>
+          <a:lstStyle/>
+          <a:p>
+            <a:pPr algn="l">
+              <a:lnSpc>
+                <a:spcPts val="1725"/>
+              </a:lnSpc>
+              <a:spcBef>
+                <a:spcPts val="0"/>
+              </a:spcBef>
+              <a:spcAft>
+                <a:spcPts val="0"/>
+              </a:spcAft>
+            </a:pPr>
+            <a:r>
+              <a:rPr sz="1300" b="0" i="0">
+                <a:solidFill>
+                  <a:srgbClr val="1C2433"/>
+                </a:solidFill>
+                <a:latin typeface="Inter"/>
+                <a:ea typeface="Inter"/>
+                <a:cs typeface="Inter"/>
+              </a:rPr>
+              <a:t>Fechas vitales de los personajes históricos </a:t>
+            </a:r>
+            <a:r>
+              <a:rPr sz="1300" b="0" i="0">
+                <a:solidFill>
+                  <a:srgbClr val="1C2433"/>
+                </a:solidFill>
+                <a:latin typeface="Inter SemiBold"/>
+                <a:ea typeface="Inter SemiBold"/>
+                <a:cs typeface="Inter SemiBold"/>
+              </a:rPr>
+              <a:t>solo desde el corpus sellado</a:t>
+            </a:r>
+            <a:r>
+              <a:rPr sz="1300" b="0" i="0">
+                <a:solidFill>
+                  <a:srgbClr val="1C2433"/>
+                </a:solidFill>
+                <a:latin typeface="Inter"/>
+                <a:ea typeface="Inter"/>
+                <a:cs typeface="Inter"/>
+              </a:rPr>
+              <a:t>: la mitigación determinista de RT-09 va primero, porque «determinista antes que modelo»</a:t>
+            </a:r>
+          </a:p>
+        </p:txBody>
+      </p:sp>
+      <p:sp>
+        <p:nvSpPr>
+          <p:cNvPr id="23" name="TextBox 22"/>
+          <p:cNvSpPr txBox="1"/>
+          <p:nvPr/>
+        </p:nvSpPr>
+        <p:spPr>
+          <a:xfrm>
+            <a:off x="6362700" y="2619375"/>
+            <a:ext cx="194893" cy="323850"/>
+          </a:xfrm>
+          <a:prstGeom prst="rect">
+            <a:avLst/>
+          </a:prstGeom>
+          <a:noFill/>
+        </p:spPr>
+        <p:txBody>
+          <a:bodyPr wrap="none" lIns="0" tIns="0" rIns="0" bIns="0" anchor="t">
+            <a:noAutofit/>
+          </a:bodyPr>
+          <a:lstStyle/>
+          <a:p>
+            <a:pPr algn="l">
+              <a:lnSpc>
+                <a:spcPts val="1950"/>
+              </a:lnSpc>
+              <a:spcBef>
+                <a:spcPts val="0"/>
+              </a:spcBef>
+              <a:spcAft>
+                <a:spcPts val="0"/>
+              </a:spcAft>
+            </a:pPr>
+            <a:r>
+              <a:rPr sz="2100" b="0" i="0">
+                <a:solidFill>
+                  <a:srgbClr val="9A7A2E"/>
+                </a:solidFill>
+                <a:latin typeface="Fraunces SemiBold"/>
+                <a:ea typeface="Fraunces SemiBold"/>
+                <a:cs typeface="Fraunces SemiBold"/>
+              </a:rPr>
+              <a:t>3</a:t>
+            </a:r>
+          </a:p>
+        </p:txBody>
+      </p:sp>
+      <p:sp>
+        <p:nvSpPr>
+          <p:cNvPr id="24" name="TextBox 23"/>
+          <p:cNvSpPr txBox="1"/>
+          <p:nvPr/>
+        </p:nvSpPr>
+        <p:spPr>
+          <a:xfrm>
+            <a:off x="6743700" y="2667000"/>
+            <a:ext cx="4596717" cy="190500"/>
+          </a:xfrm>
+          <a:prstGeom prst="rect">
+            <a:avLst/>
+          </a:prstGeom>
+          <a:noFill/>
+        </p:spPr>
+        <p:txBody>
+          <a:bodyPr wrap="none" lIns="0" tIns="0" rIns="0" bIns="0" anchor="t">
+            <a:noAutofit/>
+          </a:bodyPr>
+          <a:lstStyle/>
+          <a:p>
+            <a:pPr algn="l">
+              <a:lnSpc>
+                <a:spcPts val="1725"/>
+              </a:lnSpc>
+              <a:spcBef>
+                <a:spcPts val="0"/>
+              </a:spcBef>
+              <a:spcAft>
+                <a:spcPts val="0"/>
+              </a:spcAft>
+            </a:pPr>
+            <a:r>
+              <a:rPr sz="1300" b="0" i="0">
+                <a:solidFill>
+                  <a:srgbClr val="1C2433"/>
+                </a:solidFill>
+                <a:latin typeface="Inter"/>
+                <a:ea typeface="Inter"/>
+                <a:cs typeface="Inter"/>
+              </a:rPr>
+              <a:t>La </a:t>
+            </a:r>
+            <a:r>
+              <a:rPr sz="1300" b="0" i="0">
+                <a:solidFill>
+                  <a:srgbClr val="1C2433"/>
+                </a:solidFill>
+                <a:latin typeface="Inter SemiBold"/>
+                <a:ea typeface="Inter SemiBold"/>
+                <a:cs typeface="Inter SemiBold"/>
+              </a:rPr>
+              <a:t>versión 2</a:t>
+            </a:r>
+            <a:r>
+              <a:rPr sz="1300" b="0" i="0">
+                <a:solidFill>
+                  <a:srgbClr val="1C2433"/>
+                </a:solidFill>
+                <a:latin typeface="Inter"/>
+                <a:ea typeface="Inter"/>
+                <a:cs typeface="Inter"/>
+              </a:rPr>
+              <a:t>: críticos internos y modelos por rol (slide 21)</a:t>
+            </a:r>
+          </a:p>
+        </p:txBody>
+      </p:sp>
+      <p:sp>
+        <p:nvSpPr>
+          <p:cNvPr id="25" name="TextBox 24"/>
+          <p:cNvSpPr txBox="1"/>
+          <p:nvPr/>
+        </p:nvSpPr>
+        <p:spPr>
+          <a:xfrm>
+            <a:off x="609600" y="5372100"/>
+            <a:ext cx="7417760" cy="180975"/>
+          </a:xfrm>
+          <a:prstGeom prst="rect">
+            <a:avLst/>
+          </a:prstGeom>
+          <a:noFill/>
+        </p:spPr>
+        <p:txBody>
+          <a:bodyPr wrap="none" lIns="0" tIns="0" rIns="0" bIns="0" anchor="t">
+            <a:noAutofit/>
+          </a:bodyPr>
+          <a:lstStyle/>
+          <a:p>
+            <a:pPr algn="l">
+              <a:lnSpc>
+                <a:spcPts val="1425"/>
+              </a:lnSpc>
+              <a:spcBef>
+                <a:spcPts val="0"/>
+              </a:spcBef>
+              <a:spcAft>
+                <a:spcPts val="0"/>
+              </a:spcAft>
+            </a:pPr>
+            <a:r>
+              <a:rPr sz="1100" b="0" i="0">
+                <a:solidFill>
+                  <a:srgbClr val="7D7869"/>
+                </a:solidFill>
+                <a:latin typeface="Inter"/>
+                <a:ea typeface="Inter"/>
+                <a:cs typeface="Inter"/>
+              </a:rPr>
+              <a:t>Los tokens son ~20 % del coste unitario de la PoC; en la v2 suben, pero la supervisión humana baja más.</a:t>
+            </a:r>
+          </a:p>
+        </p:txBody>
+      </p:sp>
+      <p:pic>
+        <p:nvPicPr>
+          <p:cNvPr id="26" name="Picture 25" descr="r003.png"/>
+          <p:cNvPicPr>
+            <a:picLocks noChangeAspect="1"/>
+          </p:cNvPicPr>
+          <p:nvPr/>
+        </p:nvPicPr>
+        <p:blipFill>
+          <a:blip r:embed="rId4"/>
+          <a:stretch>
+            <a:fillRect/>
+          </a:stretch>
+        </p:blipFill>
+        <p:spPr>
+          <a:xfrm>
+            <a:off x="381000" y="6343650"/>
+            <a:ext cx="11430000" cy="76200"/>
+          </a:xfrm>
+          <a:prstGeom prst="rect">
+            <a:avLst/>
+          </a:prstGeom>
+        </p:spPr>
+      </p:pic>
+      <p:pic>
+        <p:nvPicPr>
+          <p:cNvPr id="27" name="Picture 26" descr="r004.png"/>
+          <p:cNvPicPr>
+            <a:picLocks noChangeAspect="1"/>
+          </p:cNvPicPr>
+          <p:nvPr/>
+        </p:nvPicPr>
+        <p:blipFill>
+          <a:blip r:embed="rId5"/>
+          <a:stretch>
+            <a:fillRect/>
+          </a:stretch>
+        </p:blipFill>
+        <p:spPr>
+          <a:xfrm>
+            <a:off x="381000" y="6505575"/>
+            <a:ext cx="171450" cy="190500"/>
+          </a:xfrm>
+          <a:prstGeom prst="rect">
+            <a:avLst/>
+          </a:prstGeom>
+        </p:spPr>
+      </p:pic>
+      <p:sp>
+        <p:nvSpPr>
+          <p:cNvPr id="28" name="TextBox 27"/>
+          <p:cNvSpPr txBox="1"/>
+          <p:nvPr/>
+        </p:nvSpPr>
+        <p:spPr>
+          <a:xfrm>
+            <a:off x="628650" y="6504384"/>
+            <a:ext cx="666048" cy="180975"/>
+          </a:xfrm>
+          <a:prstGeom prst="rect">
+            <a:avLst/>
+          </a:prstGeom>
+          <a:noFill/>
+        </p:spPr>
+        <p:txBody>
+          <a:bodyPr wrap="none" lIns="0" tIns="0" rIns="0" bIns="0" anchor="t">
+            <a:noAutofit/>
+          </a:bodyPr>
+          <a:lstStyle/>
+          <a:p>
+            <a:pPr algn="l">
+              <a:lnSpc>
+                <a:spcPts val="1518"/>
+              </a:lnSpc>
+              <a:spcBef>
+                <a:spcPts val="0"/>
+              </a:spcBef>
+              <a:spcAft>
+                <a:spcPts val="0"/>
+              </a:spcAft>
+            </a:pPr>
+            <a:r>
+              <a:rPr sz="1100" b="0" i="0">
+                <a:solidFill>
+                  <a:srgbClr val="1C2433"/>
+                </a:solidFill>
+                <a:latin typeface="Fraunces SemiBold"/>
+                <a:ea typeface="Fraunces SemiBold"/>
+                <a:cs typeface="Fraunces SemiBold"/>
+              </a:rPr>
+              <a:t>Qapítulo</a:t>
+            </a:r>
+          </a:p>
+        </p:txBody>
+      </p:sp>
+      <p:sp>
+        <p:nvSpPr>
+          <p:cNvPr id="29" name="TextBox 28"/>
+          <p:cNvSpPr txBox="1"/>
+          <p:nvPr/>
+        </p:nvSpPr>
+        <p:spPr>
+          <a:xfrm>
+            <a:off x="1308646" y="6517184"/>
+            <a:ext cx="1661136" cy="152400"/>
+          </a:xfrm>
+          <a:prstGeom prst="rect">
+            <a:avLst/>
+          </a:prstGeom>
+          <a:noFill/>
+        </p:spPr>
+        <p:txBody>
+          <a:bodyPr wrap="none" lIns="0" tIns="0" rIns="0" bIns="0" anchor="t">
+            <a:noAutofit/>
+          </a:bodyPr>
+          <a:lstStyle/>
+          <a:p>
+            <a:pPr algn="l">
+              <a:lnSpc>
+                <a:spcPts val="1316"/>
+              </a:lnSpc>
+              <a:spcBef>
+                <a:spcPts val="0"/>
+              </a:spcBef>
+              <a:spcAft>
+                <a:spcPts val="0"/>
+              </a:spcAft>
+            </a:pPr>
+            <a:r>
+              <a:rPr sz="1000" b="0" i="0">
+                <a:solidFill>
+                  <a:srgbClr val="7D7869"/>
+                </a:solidFill>
+                <a:latin typeface="Inter"/>
+                <a:ea typeface="Inter"/>
+                <a:cs typeface="Inter"/>
+              </a:rPr>
+              <a:t>· una iniciativa de Qaracter</a:t>
+            </a:r>
+          </a:p>
+        </p:txBody>
+      </p:sp>
+      <p:sp>
+        <p:nvSpPr>
+          <p:cNvPr id="30" name="TextBox 29"/>
+          <p:cNvSpPr txBox="1"/>
+          <p:nvPr/>
+        </p:nvSpPr>
+        <p:spPr>
+          <a:xfrm>
+            <a:off x="5183841" y="6517184"/>
+            <a:ext cx="3752386" cy="152400"/>
+          </a:xfrm>
+          <a:prstGeom prst="rect">
+            <a:avLst/>
+          </a:prstGeom>
+          <a:noFill/>
+        </p:spPr>
+        <p:txBody>
+          <a:bodyPr wrap="none" lIns="0" tIns="0" rIns="0" bIns="0" anchor="t">
+            <a:noAutofit/>
+          </a:bodyPr>
+          <a:lstStyle/>
+          <a:p>
+            <a:pPr algn="ctr">
+              <a:lnSpc>
+                <a:spcPts val="1316"/>
+              </a:lnSpc>
+              <a:spcBef>
+                <a:spcPts val="0"/>
+              </a:spcBef>
+              <a:spcAft>
+                <a:spcPts val="0"/>
+              </a:spcAft>
+            </a:pPr>
+            <a:r>
+              <a:rPr sz="1000" b="0" i="0">
+                <a:solidFill>
+                  <a:srgbClr val="7D7869"/>
+                </a:solidFill>
+                <a:latin typeface="Inter"/>
+                <a:ea typeface="Inter"/>
+                <a:cs typeface="Inter"/>
+              </a:rPr>
+              <a:t>Novela Relicario · Propuesta técnico-comercial para Relicario</a:t>
+            </a:r>
+          </a:p>
+        </p:txBody>
+      </p:sp>
+      <p:sp>
+        <p:nvSpPr>
+          <p:cNvPr id="31" name="TextBox 30"/>
+          <p:cNvSpPr txBox="1"/>
+          <p:nvPr/>
+        </p:nvSpPr>
+        <p:spPr>
+          <a:xfrm>
+            <a:off x="11250811" y="6510784"/>
+            <a:ext cx="620697" cy="171450"/>
+          </a:xfrm>
+          <a:prstGeom prst="rect">
+            <a:avLst/>
+          </a:prstGeom>
+          <a:noFill/>
+        </p:spPr>
+        <p:txBody>
+          <a:bodyPr wrap="none" lIns="0" tIns="0" rIns="0" bIns="0" anchor="t">
+            <a:noAutofit/>
+          </a:bodyPr>
+          <a:lstStyle/>
+          <a:p>
+            <a:pPr algn="l">
+              <a:lnSpc>
+                <a:spcPts val="1417"/>
+              </a:lnSpc>
+              <a:spcBef>
+                <a:spcPts val="0"/>
+              </a:spcBef>
+              <a:spcAft>
+                <a:spcPts val="0"/>
+              </a:spcAft>
+            </a:pPr>
+            <a:r>
+              <a:rPr sz="1050" b="0" i="0">
+                <a:solidFill>
+                  <a:srgbClr val="1C2433"/>
+                </a:solidFill>
+                <a:latin typeface="JetBrains Mono Medium"/>
+                <a:ea typeface="JetBrains Mono Medium"/>
+                <a:cs typeface="JetBrains Mono Medium"/>
+              </a:rPr>
+              <a:t>22 / 23</a:t>
+            </a:r>
+          </a:p>
+        </p:txBody>
+      </p:sp>
+    </p:spTree>
+  </p:cSld>
+  <p:clrMapOvr>
+    <a:masterClrMapping/>
+  </p:clrMapOvr>
+</p:sld>
+</file>
+
+<file path=ppt/slides/slide23.xml><?xml version="1.0" encoding="utf-8"?>
 <p:sld xmlns:a="http://schemas.openxmlformats.org/drawingml/2006/main" xmlns:r="http://schemas.openxmlformats.org/officeDocument/2006/relationships" xmlns:p="http://schemas.openxmlformats.org/presentationml/2006/main">
   <p:cSld>
     <p:bg>
@@ -49224,7 +53509,7 @@
       </p:sp>
       <p:pic>
         <p:nvPicPr>
-          <p:cNvPr id="4" name="Picture 3" descr="r065.png"/>
+          <p:cNvPr id="4" name="Picture 3" descr="r067.png"/>
           <p:cNvPicPr>
             <a:picLocks noChangeAspect="1"/>
           </p:cNvPicPr>
@@ -49532,7 +53817,7 @@
       </p:sp>
       <p:pic>
         <p:nvPicPr>
-          <p:cNvPr id="11" name="Picture 10" descr="r066.png"/>
+          <p:cNvPr id="11" name="Picture 10" descr="r068.png"/>
           <p:cNvPicPr>
             <a:picLocks noChangeAspect="1"/>
           </p:cNvPicPr>
@@ -50982,7 +55267,7 @@
                 <a:ea typeface="JetBrains Mono Medium"/>
                 <a:cs typeface="JetBrains Mono Medium"/>
               </a:rPr>
-              <a:t>03 / 22</a:t>
+              <a:t>03 / 23</a:t>
             </a:r>
           </a:p>
         </p:txBody>
@@ -54564,7 +58849,7 @@
                 <a:ea typeface="JetBrains Mono Medium"/>
                 <a:cs typeface="JetBrains Mono Medium"/>
               </a:rPr>
-              <a:t>04 / 22</a:t>
+              <a:t>04 / 23</a:t>
             </a:r>
           </a:p>
         </p:txBody>
@@ -56403,7 +60688,7 @@
                 <a:ea typeface="JetBrains Mono Medium"/>
                 <a:cs typeface="JetBrains Mono Medium"/>
               </a:rPr>
-              <a:t>05 / 22</a:t>
+              <a:t>05 / 23</a:t>
             </a:r>
           </a:p>
         </p:txBody>
@@ -58202,7 +62487,7 @@
                 <a:ea typeface="JetBrains Mono Medium"/>
                 <a:cs typeface="JetBrains Mono Medium"/>
               </a:rPr>
-              <a:t>06 / 22</a:t>
+              <a:t>06 / 23</a:t>
             </a:r>
           </a:p>
         </p:txBody>
@@ -60753,7 +65038,7 @@
                 <a:ea typeface="JetBrains Mono Medium"/>
                 <a:cs typeface="JetBrains Mono Medium"/>
               </a:rPr>
-              <a:t>07 / 22</a:t>
+              <a:t>07 / 23</a:t>
             </a:r>
           </a:p>
         </p:txBody>
@@ -62451,7 +66736,7 @@
                 <a:ea typeface="JetBrains Mono Medium"/>
                 <a:cs typeface="JetBrains Mono Medium"/>
               </a:rPr>
-              <a:t>08 / 22</a:t>
+              <a:t>08 / 23</a:t>
             </a:r>
           </a:p>
         </p:txBody>
@@ -65304,7 +69589,7 @@
                 <a:ea typeface="JetBrains Mono Medium"/>
                 <a:cs typeface="JetBrains Mono Medium"/>
               </a:rPr>
-              <a:t>09 / 22</a:t>
+              <a:t>09 / 23</a:t>
             </a:r>
           </a:p>
         </p:txBody>
